--- a/docs/PPAMONG_시스템_구조도.pptx
+++ b/docs/PPAMONG_시스템_구조도.pptx
@@ -10,6 +10,12 @@
     <p:sldId id="258" r:id="rId9"/>
     <p:sldId id="259" r:id="rId10"/>
     <p:sldId id="260" r:id="rId11"/>
+    <p:sldId id="261" r:id="rId12"/>
+    <p:sldId id="262" r:id="rId13"/>
+    <p:sldId id="263" r:id="rId14"/>
+    <p:sldId id="264" r:id="rId15"/>
+    <p:sldId id="265" r:id="rId16"/>
+    <p:sldId id="266" r:id="rId17"/>
   </p:sldIdLst>
   <p:sldSz cx="12191695" cy="6858000" type="screen4x3"/>
   <p:notesSz cx="6858000" cy="9144000"/>
@@ -3101,13 +3107,13 @@
         <p:spPr>
           <a:xfrm>
             <a:off x="0" y="0"/>
-            <a:ext cx="12191695" cy="137160"/>
+            <a:ext cx="12191695" cy="6858000"/>
           </a:xfrm>
           <a:prstGeom prst="rect">
             <a:avLst/>
           </a:prstGeom>
           <a:solidFill>
-            <a:srgbClr val="1D4ED8"/>
+            <a:srgbClr val="0F172A"/>
           </a:solidFill>
           <a:ln>
             <a:noFill/>
@@ -3143,8 +3149,8 @@
         </p:nvSpPr>
         <p:spPr>
           <a:xfrm>
-            <a:off x="731520" y="2011680"/>
-            <a:ext cx="10515600" cy="914400"/>
+            <a:off x="731520" y="2194560"/>
+            <a:ext cx="10515600" cy="1097280"/>
           </a:xfrm>
           <a:prstGeom prst="rect">
             <a:avLst/>
@@ -3152,20 +3158,19 @@
           <a:noFill/>
         </p:spPr>
         <p:txBody>
-          <a:bodyPr wrap="square">
+          <a:bodyPr wrap="none">
             <a:spAutoFit/>
           </a:bodyPr>
           <a:lstStyle/>
           <a:p>
-            <a:pPr algn="l"/>
             <a:r>
               <a:rPr sz="4000" b="1">
                 <a:solidFill>
-                  <a:srgbClr val="0F172A"/>
+                  <a:srgbClr val="FFFFFF"/>
                 </a:solidFill>
                 <a:latin typeface="Malgun Gothic"/>
               </a:rPr>
-              <a:t>ppamong 시스템 구조도</a:t>
+              <a:t>PPAMONG 시스템 구조</a:t>
             </a:r>
           </a:p>
         </p:txBody>
@@ -3178,8 +3183,8 @@
         </p:nvSpPr>
         <p:spPr>
           <a:xfrm>
-            <a:off x="731520" y="3017520"/>
-            <a:ext cx="10515600" cy="1097280"/>
+            <a:off x="731520" y="3246120"/>
+            <a:ext cx="10515600" cy="1371600"/>
           </a:xfrm>
           <a:prstGeom prst="rect">
             <a:avLst/>
@@ -3187,46 +3192,105 @@
           <a:noFill/>
         </p:spPr>
         <p:txBody>
-          <a:bodyPr wrap="square">
+          <a:bodyPr wrap="none">
             <a:spAutoFit/>
           </a:bodyPr>
           <a:lstStyle/>
           <a:p>
-            <a:pPr algn="l"/>
-            <a:r>
-              <a:rPr sz="1800" b="0">
-                <a:solidFill>
-                  <a:srgbClr val="64748B"/>
+            <a:r>
+              <a:rPr sz="1600" b="0">
+                <a:solidFill>
+                  <a:srgbClr val="CBD5E1"/>
                 </a:solidFill>
                 <a:latin typeface="Malgun Gothic"/>
               </a:rPr>
-              <a:t>백엔드·API·화면은 Replit의 web 한 서버에서 처리</a:t>
-            </a:r>
-          </a:p>
-          <a:p>
-            <a:pPr algn="l"/>
-            <a:r>
-              <a:rPr sz="1800" b="0">
-                <a:solidFill>
-                  <a:srgbClr val="64748B"/>
+              <a:t>게임 · 쇼핑몰 · 관리자 백오피스 통합 아키텍처</a:t>
+            </a:r>
+          </a:p>
+          <a:p>
+            <a:r>
+              <a:rPr sz="1600" b="0">
+                <a:solidFill>
+                  <a:srgbClr val="CBD5E1"/>
                 </a:solidFill>
                 <a:latin typeface="Malgun Gothic"/>
               </a:rPr>
-              <a:t>클라이언트: 사용자 앱 · 매니저 앱 · 관리자 웹</a:t>
-            </a:r>
-          </a:p>
-        </p:txBody>
-      </p:sp>
-      <p:sp>
-        <p:nvSpPr>
-          <p:cNvPr id="5" name="TextBox 4"/>
+              <a:t>2026년 7월 기준 (Replit · MongoDB Atlas · Redis)</a:t>
+            </a:r>
+          </a:p>
+        </p:txBody>
+      </p:sp>
+    </p:spTree>
+  </p:cSld>
+  <p:clrMapOvr>
+    <a:masterClrMapping/>
+  </p:clrMapOvr>
+</p:sld>
+</file>
+
+<file path=ppt/slides/slide10.xml><?xml version="1.0" encoding="utf-8"?>
+<p:sld xmlns:a="http://schemas.openxmlformats.org/drawingml/2006/main" xmlns:p="http://schemas.openxmlformats.org/presentationml/2006/main" xmlns:r="http://schemas.openxmlformats.org/officeDocument/2006/relationships">
+  <p:cSld>
+    <p:spTree>
+      <p:nvGrpSpPr>
+        <p:cNvPr id="1" name=""/>
+        <p:cNvGrpSpPr/>
+        <p:nvPr/>
+      </p:nvGrpSpPr>
+      <p:grpSpPr/>
+      <p:sp>
+        <p:nvSpPr>
+          <p:cNvPr id="2" name="Rectangle 1"/>
+          <p:cNvSpPr/>
+          <p:nvPr/>
+        </p:nvSpPr>
+        <p:spPr>
+          <a:xfrm>
+            <a:off x="0" y="0"/>
+            <a:ext cx="12191695" cy="960120"/>
+          </a:xfrm>
+          <a:prstGeom prst="rect">
+            <a:avLst/>
+          </a:prstGeom>
+          <a:solidFill>
+            <a:srgbClr val="0F172A"/>
+          </a:solidFill>
+          <a:ln>
+            <a:noFill/>
+          </a:ln>
+        </p:spPr>
+        <p:style>
+          <a:lnRef idx="1">
+            <a:schemeClr val="accent1"/>
+          </a:lnRef>
+          <a:fillRef idx="3">
+            <a:schemeClr val="accent1"/>
+          </a:fillRef>
+          <a:effectRef idx="2">
+            <a:schemeClr val="accent1"/>
+          </a:effectRef>
+          <a:fontRef idx="minor">
+            <a:schemeClr val="lt1"/>
+          </a:fontRef>
+        </p:style>
+        <p:txBody>
+          <a:bodyPr rtlCol="0" anchor="ctr"/>
+          <a:lstStyle/>
+          <a:p>
+            <a:pPr algn="ctr"/>
+          </a:p>
+        </p:txBody>
+      </p:sp>
+      <p:sp>
+        <p:nvSpPr>
+          <p:cNvPr id="3" name="TextBox 2"/>
           <p:cNvSpPr txBox="1"/>
           <p:nvPr/>
         </p:nvSpPr>
         <p:spPr>
           <a:xfrm>
-            <a:off x="731520" y="5943600"/>
-            <a:ext cx="10515600" cy="365760"/>
+            <a:off x="502920" y="201168"/>
+            <a:ext cx="10972800" cy="640080"/>
           </a:xfrm>
           <a:prstGeom prst="rect">
             <a:avLst/>
@@ -3234,20 +3298,698 @@
           <a:noFill/>
         </p:spPr>
         <p:txBody>
+          <a:bodyPr wrap="none">
+            <a:spAutoFit/>
+          </a:bodyPr>
+          <a:lstStyle/>
+          <a:p>
+            <a:r>
+              <a:rPr sz="2800" b="1">
+                <a:solidFill>
+                  <a:srgbClr val="FFFFFF"/>
+                </a:solidFill>
+                <a:latin typeface="Malgun Gothic"/>
+              </a:rPr>
+              <a:t>9. 저장소 폴더 구조</a:t>
+            </a:r>
+          </a:p>
+        </p:txBody>
+      </p:sp>
+      <p:sp>
+        <p:nvSpPr>
+          <p:cNvPr id="4" name="TextBox 3"/>
+          <p:cNvSpPr txBox="1"/>
+          <p:nvPr/>
+        </p:nvSpPr>
+        <p:spPr>
+          <a:xfrm>
+            <a:off x="502920" y="1051560"/>
+            <a:ext cx="10972800" cy="457200"/>
+          </a:xfrm>
+          <a:prstGeom prst="rect">
+            <a:avLst/>
+          </a:prstGeom>
+          <a:noFill/>
+        </p:spPr>
+        <p:txBody>
+          <a:bodyPr wrap="none">
+            <a:spAutoFit/>
+          </a:bodyPr>
+          <a:lstStyle/>
+          <a:p>
+            <a:r>
+              <a:rPr sz="1400" b="0">
+                <a:solidFill>
+                  <a:srgbClr val="64748B"/>
+                </a:solidFill>
+                <a:latin typeface="Malgun Gothic"/>
+              </a:rPr>
+              <a:t>monorepo web — client + server + shared</a:t>
+            </a:r>
+          </a:p>
+        </p:txBody>
+      </p:sp>
+      <p:sp>
+        <p:nvSpPr>
+          <p:cNvPr id="5" name="TextBox 4"/>
+          <p:cNvSpPr txBox="1"/>
+          <p:nvPr/>
+        </p:nvSpPr>
+        <p:spPr>
+          <a:xfrm>
+            <a:off x="502920" y="1371600"/>
+            <a:ext cx="11155680" cy="292608"/>
+          </a:xfrm>
+          <a:prstGeom prst="rect">
+            <a:avLst/>
+          </a:prstGeom>
+          <a:noFill/>
+        </p:spPr>
+        <p:txBody>
           <a:bodyPr wrap="square">
             <a:spAutoFit/>
           </a:bodyPr>
           <a:lstStyle/>
           <a:p>
-            <a:pPr algn="l"/>
-            <a:r>
-              <a:rPr sz="1200" b="0">
-                <a:solidFill>
-                  <a:srgbClr val="64748B"/>
+            <a:r>
+              <a:rPr sz="1300" b="0">
+                <a:solidFill>
+                  <a:srgbClr val="0F172A"/>
                 </a:solidFill>
                 <a:latin typeface="Malgun Gothic"/>
               </a:rPr>
-              <a:t>도메인: ppamong.com  |  호스팅: Replit Autoscale  |  DB: MongoDB Atlas</a:t>
+              <a:t>web/</a:t>
+            </a:r>
+          </a:p>
+        </p:txBody>
+      </p:sp>
+      <p:sp>
+        <p:nvSpPr>
+          <p:cNvPr id="6" name="TextBox 5"/>
+          <p:cNvSpPr txBox="1"/>
+          <p:nvPr/>
+        </p:nvSpPr>
+        <p:spPr>
+          <a:xfrm>
+            <a:off x="502920" y="1664208"/>
+            <a:ext cx="11155680" cy="292608"/>
+          </a:xfrm>
+          <a:prstGeom prst="rect">
+            <a:avLst/>
+          </a:prstGeom>
+          <a:noFill/>
+        </p:spPr>
+        <p:txBody>
+          <a:bodyPr wrap="square">
+            <a:spAutoFit/>
+          </a:bodyPr>
+          <a:lstStyle/>
+          <a:p>
+            <a:r>
+              <a:rPr sz="1300" b="0">
+                <a:solidFill>
+                  <a:srgbClr val="0F172A"/>
+                </a:solidFill>
+                <a:latin typeface="Malgun Gothic"/>
+              </a:rPr>
+              <a:t>  client/src/     UserApp · ManagerApp · AdminApp · MallApp · pages/mall · adminPages</a:t>
+            </a:r>
+          </a:p>
+        </p:txBody>
+      </p:sp>
+      <p:sp>
+        <p:nvSpPr>
+          <p:cNvPr id="7" name="TextBox 6"/>
+          <p:cNvSpPr txBox="1"/>
+          <p:nvPr/>
+        </p:nvSpPr>
+        <p:spPr>
+          <a:xfrm>
+            <a:off x="502920" y="1956816"/>
+            <a:ext cx="11155680" cy="292608"/>
+          </a:xfrm>
+          <a:prstGeom prst="rect">
+            <a:avLst/>
+          </a:prstGeom>
+          <a:noFill/>
+        </p:spPr>
+        <p:txBody>
+          <a:bodyPr wrap="square">
+            <a:spAutoFit/>
+          </a:bodyPr>
+          <a:lstStyle/>
+          <a:p>
+            <a:r>
+              <a:rPr sz="1300" b="0">
+                <a:solidFill>
+                  <a:srgbClr val="0F172A"/>
+                </a:solidFill>
+                <a:latin typeface="Malgun Gothic"/>
+              </a:rPr>
+              <a:t>  server/         Express · UserRoutes · UserStorage · mongodb/models</a:t>
+            </a:r>
+          </a:p>
+        </p:txBody>
+      </p:sp>
+      <p:sp>
+        <p:nvSpPr>
+          <p:cNvPr id="8" name="TextBox 7"/>
+          <p:cNvSpPr txBox="1"/>
+          <p:nvPr/>
+        </p:nvSpPr>
+        <p:spPr>
+          <a:xfrm>
+            <a:off x="502920" y="2249424"/>
+            <a:ext cx="11155680" cy="292608"/>
+          </a:xfrm>
+          <a:prstGeom prst="rect">
+            <a:avLst/>
+          </a:prstGeom>
+          <a:noFill/>
+        </p:spPr>
+        <p:txBody>
+          <a:bodyPr wrap="square">
+            <a:spAutoFit/>
+          </a:bodyPr>
+          <a:lstStyle/>
+          <a:p>
+            <a:r>
+              <a:rPr sz="1300" b="0">
+                <a:solidFill>
+                  <a:srgbClr val="0F172A"/>
+                </a:solidFill>
+                <a:latin typeface="Malgun Gothic"/>
+              </a:rPr>
+              <a:t>  shared/         mallConfig · mallProduct · Zod 공유 상수</a:t>
+            </a:r>
+          </a:p>
+        </p:txBody>
+      </p:sp>
+      <p:sp>
+        <p:nvSpPr>
+          <p:cNvPr id="9" name="TextBox 8"/>
+          <p:cNvSpPr txBox="1"/>
+          <p:nvPr/>
+        </p:nvSpPr>
+        <p:spPr>
+          <a:xfrm>
+            <a:off x="502920" y="2542032"/>
+            <a:ext cx="11155680" cy="292608"/>
+          </a:xfrm>
+          <a:prstGeom prst="rect">
+            <a:avLst/>
+          </a:prstGeom>
+          <a:noFill/>
+        </p:spPr>
+        <p:txBody>
+          <a:bodyPr wrap="square">
+            <a:spAutoFit/>
+          </a:bodyPr>
+          <a:lstStyle/>
+          <a:p>
+            <a:r>
+              <a:rPr sz="1300" b="0">
+                <a:solidFill>
+                  <a:srgbClr val="0F172A"/>
+                </a:solidFill>
+                <a:latin typeface="Malgun Gothic"/>
+              </a:rPr>
+              <a:t>  android-manager/ · ios-manager-standalone/   매니저 네이티브</a:t>
+            </a:r>
+          </a:p>
+        </p:txBody>
+      </p:sp>
+      <p:sp>
+        <p:nvSpPr>
+          <p:cNvPr id="10" name="TextBox 9"/>
+          <p:cNvSpPr txBox="1"/>
+          <p:nvPr/>
+        </p:nvSpPr>
+        <p:spPr>
+          <a:xfrm>
+            <a:off x="502920" y="2834639"/>
+            <a:ext cx="11155680" cy="292608"/>
+          </a:xfrm>
+          <a:prstGeom prst="rect">
+            <a:avLst/>
+          </a:prstGeom>
+          <a:noFill/>
+        </p:spPr>
+        <p:txBody>
+          <a:bodyPr wrap="square">
+            <a:spAutoFit/>
+          </a:bodyPr>
+          <a:lstStyle/>
+          <a:p>
+            <a:r>
+              <a:rPr sz="1300" b="0">
+                <a:solidFill>
+                  <a:srgbClr val="0F172A"/>
+                </a:solidFill>
+                <a:latin typeface="Malgun Gothic"/>
+              </a:rPr>
+              <a:t>  docs/           정책·구조·배포 문서</a:t>
+            </a:r>
+          </a:p>
+        </p:txBody>
+      </p:sp>
+    </p:spTree>
+  </p:cSld>
+  <p:clrMapOvr>
+    <a:masterClrMapping/>
+  </p:clrMapOvr>
+</p:sld>
+</file>
+
+<file path=ppt/slides/slide11.xml><?xml version="1.0" encoding="utf-8"?>
+<p:sld xmlns:a="http://schemas.openxmlformats.org/drawingml/2006/main" xmlns:p="http://schemas.openxmlformats.org/presentationml/2006/main" xmlns:r="http://schemas.openxmlformats.org/officeDocument/2006/relationships">
+  <p:cSld>
+    <p:spTree>
+      <p:nvGrpSpPr>
+        <p:cNvPr id="1" name=""/>
+        <p:cNvGrpSpPr/>
+        <p:nvPr/>
+      </p:nvGrpSpPr>
+      <p:grpSpPr/>
+      <p:sp>
+        <p:nvSpPr>
+          <p:cNvPr id="2" name="Rectangle 1"/>
+          <p:cNvSpPr/>
+          <p:nvPr/>
+        </p:nvSpPr>
+        <p:spPr>
+          <a:xfrm>
+            <a:off x="0" y="0"/>
+            <a:ext cx="12191695" cy="960120"/>
+          </a:xfrm>
+          <a:prstGeom prst="rect">
+            <a:avLst/>
+          </a:prstGeom>
+          <a:solidFill>
+            <a:srgbClr val="0F172A"/>
+          </a:solidFill>
+          <a:ln>
+            <a:noFill/>
+          </a:ln>
+        </p:spPr>
+        <p:style>
+          <a:lnRef idx="1">
+            <a:schemeClr val="accent1"/>
+          </a:lnRef>
+          <a:fillRef idx="3">
+            <a:schemeClr val="accent1"/>
+          </a:fillRef>
+          <a:effectRef idx="2">
+            <a:schemeClr val="accent1"/>
+          </a:effectRef>
+          <a:fontRef idx="minor">
+            <a:schemeClr val="lt1"/>
+          </a:fontRef>
+        </p:style>
+        <p:txBody>
+          <a:bodyPr rtlCol="0" anchor="ctr"/>
+          <a:lstStyle/>
+          <a:p>
+            <a:pPr algn="ctr"/>
+          </a:p>
+        </p:txBody>
+      </p:sp>
+      <p:sp>
+        <p:nvSpPr>
+          <p:cNvPr id="3" name="TextBox 2"/>
+          <p:cNvSpPr txBox="1"/>
+          <p:nvPr/>
+        </p:nvSpPr>
+        <p:spPr>
+          <a:xfrm>
+            <a:off x="502920" y="201168"/>
+            <a:ext cx="10972800" cy="640080"/>
+          </a:xfrm>
+          <a:prstGeom prst="rect">
+            <a:avLst/>
+          </a:prstGeom>
+          <a:noFill/>
+        </p:spPr>
+        <p:txBody>
+          <a:bodyPr wrap="none">
+            <a:spAutoFit/>
+          </a:bodyPr>
+          <a:lstStyle/>
+          <a:p>
+            <a:r>
+              <a:rPr sz="2800" b="1">
+                <a:solidFill>
+                  <a:srgbClr val="FFFFFF"/>
+                </a:solidFill>
+                <a:latin typeface="Malgun Gothic"/>
+              </a:rPr>
+              <a:t>10. 관련 문서 · 배포</a:t>
+            </a:r>
+          </a:p>
+        </p:txBody>
+      </p:sp>
+      <p:sp>
+        <p:nvSpPr>
+          <p:cNvPr id="4" name="TextBox 3"/>
+          <p:cNvSpPr txBox="1"/>
+          <p:nvPr/>
+        </p:nvSpPr>
+        <p:spPr>
+          <a:xfrm>
+            <a:off x="502920" y="1051560"/>
+            <a:ext cx="10972800" cy="457200"/>
+          </a:xfrm>
+          <a:prstGeom prst="rect">
+            <a:avLst/>
+          </a:prstGeom>
+          <a:noFill/>
+        </p:spPr>
+        <p:txBody>
+          <a:bodyPr wrap="none">
+            <a:spAutoFit/>
+          </a:bodyPr>
+          <a:lstStyle/>
+          <a:p>
+            <a:r>
+              <a:rPr sz="1400" b="0">
+                <a:solidFill>
+                  <a:srgbClr val="64748B"/>
+                </a:solidFill>
+                <a:latin typeface="Malgun Gothic"/>
+              </a:rPr>
+              <a:t>운영 시 참고</a:t>
+            </a:r>
+          </a:p>
+        </p:txBody>
+      </p:sp>
+      <p:graphicFrame>
+        <p:nvGraphicFramePr>
+          <p:cNvPr id="5" name="Table 4"/>
+          <p:cNvGraphicFramePr>
+            <a:graphicFrameLocks noGrp="1"/>
+          </p:cNvGraphicFramePr>
+          <p:nvPr/>
+        </p:nvGraphicFramePr>
+        <p:xfrm>
+          <a:off x="502920" y="1417320"/>
+          <a:ext cx="11155679" cy="2715768"/>
+        </p:xfrm>
+        <a:graphic>
+          <a:graphicData uri="http://schemas.openxmlformats.org/drawingml/2006/table">
+            <a:tbl>
+              <a:tblPr firstRow="1" bandRow="1">
+                <a:tableStyleId>{5C22544A-7EE6-4342-B048-85BDC9FD1C3A}</a:tableStyleId>
+              </a:tblPr>
+              <a:tblGrid>
+                <a:gridCol w="3657600"/>
+                <a:gridCol w="7498079"/>
+              </a:tblGrid>
+              <a:tr h="452628">
+                <a:tc>
+                  <a:txBody>
+                    <a:bodyPr/>
+                    <a:lstStyle/>
+                    <a:p>
+                      <a:r>
+                        <a:rPr sz="1100" b="1">
+                          <a:solidFill>
+                            <a:srgbClr val="FFFFFF"/>
+                          </a:solidFill>
+                          <a:latin typeface="Malgun Gothic"/>
+                        </a:rPr>
+                        <a:t>문서</a:t>
+                      </a:r>
+                    </a:p>
+                  </a:txBody>
+                  <a:tcPr>
+                    <a:solidFill>
+                      <a:srgbClr val="0F172A"/>
+                    </a:solidFill>
+                  </a:tcPr>
+                </a:tc>
+                <a:tc>
+                  <a:txBody>
+                    <a:bodyPr/>
+                    <a:lstStyle/>
+                    <a:p>
+                      <a:r>
+                        <a:rPr sz="1100" b="1">
+                          <a:solidFill>
+                            <a:srgbClr val="FFFFFF"/>
+                          </a:solidFill>
+                          <a:latin typeface="Malgun Gothic"/>
+                        </a:rPr>
+                        <a:t>내용</a:t>
+                      </a:r>
+                    </a:p>
+                  </a:txBody>
+                  <a:tcPr>
+                    <a:solidFill>
+                      <a:srgbClr val="0F172A"/>
+                    </a:solidFill>
+                  </a:tcPr>
+                </a:tc>
+              </a:tr>
+              <a:tr h="452628">
+                <a:tc>
+                  <a:txBody>
+                    <a:bodyPr/>
+                    <a:lstStyle/>
+                    <a:p>
+                      <a:r>
+                        <a:rPr sz="1000">
+                          <a:solidFill>
+                            <a:srgbClr val="0F172A"/>
+                          </a:solidFill>
+                          <a:latin typeface="Malgun Gothic"/>
+                        </a:rPr>
+                        <a:t>PPAMONG_시스템_구조도.md</a:t>
+                      </a:r>
+                    </a:p>
+                  </a:txBody>
+                  <a:tcPr/>
+                </a:tc>
+                <a:tc>
+                  <a:txBody>
+                    <a:bodyPr/>
+                    <a:lstStyle/>
+                    <a:p>
+                      <a:r>
+                        <a:rPr sz="1000">
+                          <a:solidFill>
+                            <a:srgbClr val="0F172A"/>
+                          </a:solidFill>
+                          <a:latin typeface="Malgun Gothic"/>
+                        </a:rPr>
+                        <a:t>Mermaid 다이어그램 · 본 PPT 원본</a:t>
+                      </a:r>
+                    </a:p>
+                  </a:txBody>
+                  <a:tcPr/>
+                </a:tc>
+              </a:tr>
+              <a:tr h="452628">
+                <a:tc>
+                  <a:txBody>
+                    <a:bodyPr/>
+                    <a:lstStyle/>
+                    <a:p>
+                      <a:r>
+                        <a:rPr sz="1000">
+                          <a:solidFill>
+                            <a:srgbClr val="0F172A"/>
+                          </a:solidFill>
+                          <a:latin typeface="Malgun Gothic"/>
+                        </a:rPr>
+                        <a:t>PPAMONG_몰_정책.md</a:t>
+                      </a:r>
+                    </a:p>
+                  </a:txBody>
+                  <a:tcPr>
+                    <a:solidFill>
+                      <a:srgbClr val="F8FAFC"/>
+                    </a:solidFill>
+                  </a:tcPr>
+                </a:tc>
+                <a:tc>
+                  <a:txBody>
+                    <a:bodyPr/>
+                    <a:lstStyle/>
+                    <a:p>
+                      <a:r>
+                        <a:rPr sz="1000">
+                          <a:solidFill>
+                            <a:srgbClr val="0F172A"/>
+                          </a:solidFill>
+                          <a:latin typeface="Malgun Gothic"/>
+                        </a:rPr>
+                        <a:t>URL · 정회원 · 결제 · 역할</a:t>
+                      </a:r>
+                    </a:p>
+                  </a:txBody>
+                  <a:tcPr>
+                    <a:solidFill>
+                      <a:srgbClr val="F8FAFC"/>
+                    </a:solidFill>
+                  </a:tcPr>
+                </a:tc>
+              </a:tr>
+              <a:tr h="452628">
+                <a:tc>
+                  <a:txBody>
+                    <a:bodyPr/>
+                    <a:lstStyle/>
+                    <a:p>
+                      <a:r>
+                        <a:rPr sz="1000">
+                          <a:solidFill>
+                            <a:srgbClr val="0F172A"/>
+                          </a:solidFill>
+                          <a:latin typeface="Malgun Gothic"/>
+                        </a:rPr>
+                        <a:t>PPAMONG_몰_판매유형.md</a:t>
+                      </a:r>
+                    </a:p>
+                  </a:txBody>
+                  <a:tcPr/>
+                </a:tc>
+                <a:tc>
+                  <a:txBody>
+                    <a:bodyPr/>
+                    <a:lstStyle/>
+                    <a:p>
+                      <a:r>
+                        <a:rPr sz="1000">
+                          <a:solidFill>
+                            <a:srgbClr val="0F172A"/>
+                          </a:solidFill>
+                          <a:latin typeface="Malgun Gothic"/>
+                        </a:rPr>
+                        <a:t>stock / procure 상세</a:t>
+                      </a:r>
+                    </a:p>
+                  </a:txBody>
+                  <a:tcPr/>
+                </a:tc>
+              </a:tr>
+              <a:tr h="452628">
+                <a:tc>
+                  <a:txBody>
+                    <a:bodyPr/>
+                    <a:lstStyle/>
+                    <a:p>
+                      <a:r>
+                        <a:rPr sz="1000">
+                          <a:solidFill>
+                            <a:srgbClr val="0F172A"/>
+                          </a:solidFill>
+                          <a:latin typeface="Malgun Gothic"/>
+                        </a:rPr>
+                        <a:t>PPAMONG_DEPLOY_CHECKLIST.md</a:t>
+                      </a:r>
+                    </a:p>
+                  </a:txBody>
+                  <a:tcPr>
+                    <a:solidFill>
+                      <a:srgbClr val="F8FAFC"/>
+                    </a:solidFill>
+                  </a:tcPr>
+                </a:tc>
+                <a:tc>
+                  <a:txBody>
+                    <a:bodyPr/>
+                    <a:lstStyle/>
+                    <a:p>
+                      <a:r>
+                        <a:rPr sz="1000">
+                          <a:solidFill>
+                            <a:srgbClr val="0F172A"/>
+                          </a:solidFill>
+                          <a:latin typeface="Malgun Gothic"/>
+                        </a:rPr>
+                        <a:t>Replit 배포 체크리스트</a:t>
+                      </a:r>
+                    </a:p>
+                  </a:txBody>
+                  <a:tcPr>
+                    <a:solidFill>
+                      <a:srgbClr val="F8FAFC"/>
+                    </a:solidFill>
+                  </a:tcPr>
+                </a:tc>
+              </a:tr>
+              <a:tr h="452628">
+                <a:tc>
+                  <a:txBody>
+                    <a:bodyPr/>
+                    <a:lstStyle/>
+                    <a:p>
+                      <a:r>
+                        <a:rPr sz="1000">
+                          <a:solidFill>
+                            <a:srgbClr val="0F172A"/>
+                          </a:solidFill>
+                          <a:latin typeface="Malgun Gothic"/>
+                        </a:rPr>
+                        <a:t>.env.example</a:t>
+                      </a:r>
+                    </a:p>
+                  </a:txBody>
+                  <a:tcPr/>
+                </a:tc>
+                <a:tc>
+                  <a:txBody>
+                    <a:bodyPr/>
+                    <a:lstStyle/>
+                    <a:p>
+                      <a:r>
+                        <a:rPr sz="1000">
+                          <a:solidFill>
+                            <a:srgbClr val="0F172A"/>
+                          </a:solidFill>
+                          <a:latin typeface="Malgun Gothic"/>
+                        </a:rPr>
+                        <a:t>Object Storage · SOLAPI Secrets</a:t>
+                      </a:r>
+                    </a:p>
+                  </a:txBody>
+                  <a:tcPr/>
+                </a:tc>
+              </a:tr>
+            </a:tbl>
+          </a:graphicData>
+        </a:graphic>
+      </p:graphicFrame>
+      <p:sp>
+        <p:nvSpPr>
+          <p:cNvPr id="6" name="TextBox 5"/>
+          <p:cNvSpPr txBox="1"/>
+          <p:nvPr/>
+        </p:nvSpPr>
+        <p:spPr>
+          <a:xfrm>
+            <a:off x="502920" y="3977639"/>
+            <a:ext cx="11155680" cy="347472"/>
+          </a:xfrm>
+          <a:prstGeom prst="rect">
+            <a:avLst/>
+          </a:prstGeom>
+          <a:noFill/>
+        </p:spPr>
+        <p:txBody>
+          <a:bodyPr wrap="square">
+            <a:spAutoFit/>
+          </a:bodyPr>
+          <a:lstStyle/>
+          <a:p>
+            <a:r>
+              <a:rPr sz="1400" b="0">
+                <a:solidFill>
+                  <a:srgbClr val="0F172A"/>
+                </a:solidFill>
+                <a:latin typeface="Malgun Gothic"/>
+              </a:rPr>
+              <a:t>Replit 배포: git fetch origin &amp;&amp; git reset --hard origin/main &amp;&amp; npm run build</a:t>
             </a:r>
           </a:p>
         </p:txBody>
@@ -3279,13 +4021,13 @@
         <p:spPr>
           <a:xfrm>
             <a:off x="0" y="0"/>
-            <a:ext cx="12191695" cy="109728"/>
+            <a:ext cx="12191695" cy="960120"/>
           </a:xfrm>
           <a:prstGeom prst="rect">
             <a:avLst/>
           </a:prstGeom>
           <a:solidFill>
-            <a:srgbClr val="1D4ED8"/>
+            <a:srgbClr val="0F172A"/>
           </a:solidFill>
           <a:ln>
             <a:noFill/>
@@ -3321,8 +4063,8 @@
         </p:nvSpPr>
         <p:spPr>
           <a:xfrm>
-            <a:off x="457200" y="274320"/>
-            <a:ext cx="10972800" cy="457200"/>
+            <a:off x="502920" y="201168"/>
+            <a:ext cx="10972800" cy="640080"/>
           </a:xfrm>
           <a:prstGeom prst="rect">
             <a:avLst/>
@@ -3330,20 +4072,19 @@
           <a:noFill/>
         </p:spPr>
         <p:txBody>
-          <a:bodyPr wrap="square">
+          <a:bodyPr wrap="none">
             <a:spAutoFit/>
           </a:bodyPr>
           <a:lstStyle/>
           <a:p>
-            <a:pPr algn="l"/>
             <a:r>
               <a:rPr sz="2800" b="1">
                 <a:solidFill>
-                  <a:srgbClr val="0F172A"/>
+                  <a:srgbClr val="FFFFFF"/>
                 </a:solidFill>
                 <a:latin typeface="Malgun Gothic"/>
               </a:rPr>
-              <a:t>1. 전체 구조</a:t>
+              <a:t>1. 전체 시스템 개요</a:t>
             </a:r>
           </a:p>
         </p:txBody>
@@ -3356,8 +4097,8 @@
         </p:nvSpPr>
         <p:spPr>
           <a:xfrm>
-            <a:off x="457200" y="868680"/>
-            <a:ext cx="2743200" cy="320040"/>
+            <a:off x="502920" y="1051560"/>
+            <a:ext cx="10972800" cy="457200"/>
           </a:xfrm>
           <a:prstGeom prst="rect">
             <a:avLst/>
@@ -3365,20 +4106,19 @@
           <a:noFill/>
         </p:spPr>
         <p:txBody>
-          <a:bodyPr wrap="square">
+          <a:bodyPr wrap="none">
             <a:spAutoFit/>
           </a:bodyPr>
           <a:lstStyle/>
           <a:p>
-            <a:pPr algn="l"/>
-            <a:r>
-              <a:rPr sz="1200" b="1">
-                <a:solidFill>
-                  <a:srgbClr val="1E40AF"/>
+            <a:r>
+              <a:rPr sz="1400" b="0">
+                <a:solidFill>
+                  <a:srgbClr val="64748B"/>
                 </a:solidFill>
                 <a:latin typeface="Malgun Gothic"/>
               </a:rPr>
-              <a:t>클라이언트</a:t>
+              <a:t>백엔드 1대(Replit) · 클라이언트 4종 · DB MongoDB Atlas</a:t>
             </a:r>
           </a:p>
         </p:txBody>
@@ -3391,13 +4131,11 @@
         </p:nvSpPr>
         <p:spPr>
           <a:xfrm>
-            <a:off x="457200" y="1188720"/>
-            <a:ext cx="3474720" cy="1051560"/>
+            <a:off x="502920" y="1417320"/>
+            <a:ext cx="2706624" cy="658368"/>
           </a:xfrm>
           <a:prstGeom prst="roundRect">
-            <a:avLst>
-              <a:gd name="adj" fmla="val 10000"/>
-            </a:avLst>
+            <a:avLst/>
           </a:prstGeom>
           <a:solidFill>
             <a:srgbClr val="1E40AF"/>
@@ -3421,12 +4159,12 @@
           </a:fontRef>
         </p:style>
         <p:txBody>
-          <a:bodyPr rtlCol="0" anchor="ctr" wrap="square"/>
+          <a:bodyPr rtlCol="0" anchor="ctr"/>
           <a:lstStyle/>
           <a:p>
             <a:pPr algn="ctr"/>
             <a:r>
-              <a:rPr sz="1400" b="1">
+              <a:rPr sz="1100" b="1">
                 <a:solidFill>
                   <a:srgbClr val="FFFFFF"/>
                 </a:solidFill>
@@ -3435,18 +4173,6 @@
               <a:t>사용자 앱</a:t>
             </a:r>
           </a:p>
-          <a:p>
-            <a:pPr algn="ctr"/>
-            <a:r>
-              <a:rPr sz="1100" b="0">
-                <a:solidFill>
-                  <a:srgbClr val="E2E8F0"/>
-                </a:solidFill>
-                <a:latin typeface="Malgun Gothic"/>
-              </a:rPr>
-              <a:t>Android / iOS · Capacitor WebView</a:t>
-            </a:r>
-          </a:p>
         </p:txBody>
       </p:sp>
       <p:sp>
@@ -3457,16 +4183,14 @@
         </p:nvSpPr>
         <p:spPr>
           <a:xfrm>
-            <a:off x="4297680" y="1188720"/>
-            <a:ext cx="3474720" cy="1051560"/>
+            <a:off x="3319272" y="1417320"/>
+            <a:ext cx="2706624" cy="658368"/>
           </a:xfrm>
           <a:prstGeom prst="roundRect">
-            <a:avLst>
-              <a:gd name="adj" fmla="val 10000"/>
-            </a:avLst>
+            <a:avLst/>
           </a:prstGeom>
           <a:solidFill>
-            <a:srgbClr val="1E40AF"/>
+            <a:srgbClr val="0F766E"/>
           </a:solidFill>
           <a:ln>
             <a:noFill/>
@@ -3487,12 +4211,12 @@
           </a:fontRef>
         </p:style>
         <p:txBody>
-          <a:bodyPr rtlCol="0" anchor="ctr" wrap="square"/>
+          <a:bodyPr rtlCol="0" anchor="ctr"/>
           <a:lstStyle/>
           <a:p>
             <a:pPr algn="ctr"/>
             <a:r>
-              <a:rPr sz="1400" b="1">
+              <a:rPr sz="1100" b="1">
                 <a:solidFill>
                   <a:srgbClr val="FFFFFF"/>
                 </a:solidFill>
@@ -3501,18 +4225,6 @@
               <a:t>매니저 앱</a:t>
             </a:r>
           </a:p>
-          <a:p>
-            <a:pPr algn="ctr"/>
-            <a:r>
-              <a:rPr sz="1100" b="0">
-                <a:solidFill>
-                  <a:srgbClr val="E2E8F0"/>
-                </a:solidFill>
-                <a:latin typeface="Malgun Gothic"/>
-              </a:rPr>
-              <a:t>Android / iOS · Capacitor WebView</a:t>
-            </a:r>
-          </a:p>
         </p:txBody>
       </p:sp>
       <p:sp>
@@ -3523,16 +4235,14 @@
         </p:nvSpPr>
         <p:spPr>
           <a:xfrm>
-            <a:off x="8138160" y="1188720"/>
-            <a:ext cx="3474720" cy="1051560"/>
+            <a:off x="6135624" y="1417320"/>
+            <a:ext cx="2706624" cy="658368"/>
           </a:xfrm>
           <a:prstGeom prst="roundRect">
-            <a:avLst>
-              <a:gd name="adj" fmla="val 10000"/>
-            </a:avLst>
+            <a:avLst/>
           </a:prstGeom>
           <a:solidFill>
-            <a:srgbClr val="1E40AF"/>
+            <a:srgbClr val="B45309"/>
           </a:solidFill>
           <a:ln>
             <a:noFill/>
@@ -3553,12 +4263,64 @@
           </a:fontRef>
         </p:style>
         <p:txBody>
-          <a:bodyPr rtlCol="0" anchor="ctr" wrap="square"/>
+          <a:bodyPr rtlCol="0" anchor="ctr"/>
           <a:lstStyle/>
           <a:p>
             <a:pPr algn="ctr"/>
             <a:r>
-              <a:rPr sz="1400" b="1">
+              <a:rPr sz="1100" b="1">
+                <a:solidFill>
+                  <a:srgbClr val="FFFFFF"/>
+                </a:solidFill>
+                <a:latin typeface="Malgun Gothic"/>
+              </a:rPr>
+              <a:t>쇼핑몰 웹</a:t>
+            </a:r>
+          </a:p>
+        </p:txBody>
+      </p:sp>
+      <p:sp>
+        <p:nvSpPr>
+          <p:cNvPr id="8" name="Rounded Rectangle 7"/>
+          <p:cNvSpPr/>
+          <p:nvPr/>
+        </p:nvSpPr>
+        <p:spPr>
+          <a:xfrm>
+            <a:off x="8951976" y="1417320"/>
+            <a:ext cx="2706624" cy="658368"/>
+          </a:xfrm>
+          <a:prstGeom prst="roundRect">
+            <a:avLst/>
+          </a:prstGeom>
+          <a:solidFill>
+            <a:srgbClr val="E11936"/>
+          </a:solidFill>
+          <a:ln>
+            <a:noFill/>
+          </a:ln>
+        </p:spPr>
+        <p:style>
+          <a:lnRef idx="1">
+            <a:schemeClr val="accent1"/>
+          </a:lnRef>
+          <a:fillRef idx="3">
+            <a:schemeClr val="accent1"/>
+          </a:fillRef>
+          <a:effectRef idx="2">
+            <a:schemeClr val="accent1"/>
+          </a:effectRef>
+          <a:fontRef idx="minor">
+            <a:schemeClr val="lt1"/>
+          </a:fontRef>
+        </p:style>
+        <p:txBody>
+          <a:bodyPr rtlCol="0" anchor="ctr"/>
+          <a:lstStyle/>
+          <a:p>
+            <a:pPr algn="ctr"/>
+            <a:r>
+              <a:rPr sz="1100" b="1">
                 <a:solidFill>
                   <a:srgbClr val="FFFFFF"/>
                 </a:solidFill>
@@ -3567,30 +4329,18 @@
               <a:t>관리자 웹</a:t>
             </a:r>
           </a:p>
-          <a:p>
-            <a:pPr algn="ctr"/>
-            <a:r>
-              <a:rPr sz="1100" b="0">
-                <a:solidFill>
-                  <a:srgbClr val="E2E8F0"/>
-                </a:solidFill>
-                <a:latin typeface="Malgun Gothic"/>
-              </a:rPr>
-              <a:t>브라우저</a:t>
-            </a:r>
-          </a:p>
-        </p:txBody>
-      </p:sp>
-      <p:sp>
-        <p:nvSpPr>
-          <p:cNvPr id="8" name="TextBox 7"/>
+        </p:txBody>
+      </p:sp>
+      <p:sp>
+        <p:nvSpPr>
+          <p:cNvPr id="9" name="TextBox 8"/>
           <p:cNvSpPr txBox="1"/>
           <p:nvPr/>
         </p:nvSpPr>
         <p:spPr>
           <a:xfrm>
-            <a:off x="457200" y="2331720"/>
-            <a:ext cx="11247120" cy="320040"/>
+            <a:off x="5394960" y="2194560"/>
+            <a:ext cx="1371600" cy="274320"/>
           </a:xfrm>
           <a:prstGeom prst="rect">
             <a:avLst/>
@@ -3598,39 +4348,36 @@
           <a:noFill/>
         </p:spPr>
         <p:txBody>
-          <a:bodyPr wrap="square">
+          <a:bodyPr wrap="none">
             <a:spAutoFit/>
           </a:bodyPr>
           <a:lstStyle/>
           <a:p>
-            <a:pPr algn="ctr"/>
-            <a:r>
-              <a:rPr sz="1200" b="0">
+            <a:r>
+              <a:rPr sz="1600" b="1">
                 <a:solidFill>
                   <a:srgbClr val="64748B"/>
                 </a:solidFill>
                 <a:latin typeface="Malgun Gothic"/>
               </a:rPr>
-              <a:t>↓  https://ppamong.com   ·   /manager   ·   /admin</a:t>
-            </a:r>
-          </a:p>
-        </p:txBody>
-      </p:sp>
-      <p:sp>
-        <p:nvSpPr>
-          <p:cNvPr id="9" name="Rounded Rectangle 8"/>
+              <a:t>▼</a:t>
+            </a:r>
+          </a:p>
+        </p:txBody>
+      </p:sp>
+      <p:sp>
+        <p:nvSpPr>
+          <p:cNvPr id="10" name="Rounded Rectangle 9"/>
           <p:cNvSpPr/>
           <p:nvPr/>
         </p:nvSpPr>
         <p:spPr>
           <a:xfrm>
-            <a:off x="4114800" y="2697480"/>
-            <a:ext cx="3931920" cy="640080"/>
+            <a:off x="502920" y="2423160"/>
+            <a:ext cx="3645407" cy="658368"/>
           </a:xfrm>
           <a:prstGeom prst="roundRect">
-            <a:avLst>
-              <a:gd name="adj" fmla="val 10000"/>
-            </a:avLst>
+            <a:avLst/>
           </a:prstGeom>
           <a:solidFill>
             <a:srgbClr val="5B21B6"/>
@@ -3654,53 +4401,19 @@
           </a:fontRef>
         </p:style>
         <p:txBody>
-          <a:bodyPr rtlCol="0" anchor="ctr" wrap="square"/>
+          <a:bodyPr rtlCol="0" anchor="ctr"/>
           <a:lstStyle/>
           <a:p>
             <a:pPr algn="ctr"/>
             <a:r>
-              <a:rPr sz="1300" b="1">
+              <a:rPr sz="1100" b="1">
                 <a:solidFill>
                   <a:srgbClr val="FFFFFF"/>
                 </a:solidFill>
                 <a:latin typeface="Malgun Gothic"/>
               </a:rPr>
-              <a:t>가비아 DNS → ppamong.com</a:t>
-            </a:r>
-          </a:p>
-        </p:txBody>
-      </p:sp>
-      <p:sp>
-        <p:nvSpPr>
-          <p:cNvPr id="10" name="TextBox 9"/>
-          <p:cNvSpPr txBox="1"/>
-          <p:nvPr/>
-        </p:nvSpPr>
-        <p:spPr>
-          <a:xfrm>
-            <a:off x="457200" y="3429000"/>
-            <a:ext cx="10972800" cy="274320"/>
-          </a:xfrm>
-          <a:prstGeom prst="rect">
-            <a:avLst/>
-          </a:prstGeom>
-          <a:noFill/>
-        </p:spPr>
-        <p:txBody>
-          <a:bodyPr wrap="square">
-            <a:spAutoFit/>
-          </a:bodyPr>
-          <a:lstStyle/>
-          <a:p>
-            <a:pPr algn="ctr"/>
-            <a:r>
-              <a:rPr sz="1400" b="0">
-                <a:solidFill>
-                  <a:srgbClr val="64748B"/>
-                </a:solidFill>
-                <a:latin typeface="Malgun Gothic"/>
-              </a:rPr>
-              <a:t>↓</a:t>
+              <a:t>가비아 DNS
+ppamong.com</a:t>
             </a:r>
           </a:p>
         </p:txBody>
@@ -3713,95 +4426,11 @@
         </p:nvSpPr>
         <p:spPr>
           <a:xfrm>
-            <a:off x="365760" y="3749039"/>
-            <a:ext cx="7680960" cy="2651760"/>
+            <a:off x="4258056" y="2423160"/>
+            <a:ext cx="3645407" cy="658368"/>
           </a:xfrm>
           <a:prstGeom prst="roundRect">
-            <a:avLst>
-              <a:gd name="adj" fmla="val 5000"/>
-            </a:avLst>
-          </a:prstGeom>
-          <a:solidFill>
-            <a:srgbClr val="ECFDF5"/>
-          </a:solidFill>
-          <a:ln w="15875">
-            <a:solidFill>
-              <a:srgbClr val="0F766E"/>
-            </a:solidFill>
-          </a:ln>
-        </p:spPr>
-        <p:style>
-          <a:lnRef idx="1">
-            <a:schemeClr val="accent1"/>
-          </a:lnRef>
-          <a:fillRef idx="3">
-            <a:schemeClr val="accent1"/>
-          </a:fillRef>
-          <a:effectRef idx="2">
-            <a:schemeClr val="accent1"/>
-          </a:effectRef>
-          <a:fontRef idx="minor">
-            <a:schemeClr val="lt1"/>
-          </a:fontRef>
-        </p:style>
-        <p:txBody>
-          <a:bodyPr rtlCol="0" anchor="ctr"/>
-          <a:lstStyle/>
-          <a:p>
-            <a:pPr algn="ctr"/>
-          </a:p>
-        </p:txBody>
-      </p:sp>
-      <p:sp>
-        <p:nvSpPr>
-          <p:cNvPr id="12" name="TextBox 11"/>
-          <p:cNvSpPr txBox="1"/>
-          <p:nvPr/>
-        </p:nvSpPr>
-        <p:spPr>
-          <a:xfrm>
-            <a:off x="548640" y="3840480"/>
-            <a:ext cx="7315200" cy="320040"/>
-          </a:xfrm>
-          <a:prstGeom prst="rect">
             <a:avLst/>
-          </a:prstGeom>
-          <a:noFill/>
-        </p:spPr>
-        <p:txBody>
-          <a:bodyPr wrap="square">
-            <a:spAutoFit/>
-          </a:bodyPr>
-          <a:lstStyle/>
-          <a:p>
-            <a:pPr algn="l"/>
-            <a:r>
-              <a:rPr sz="1200" b="1">
-                <a:solidFill>
-                  <a:srgbClr val="0F766E"/>
-                </a:solidFill>
-                <a:latin typeface="Malgun Gothic"/>
-              </a:rPr>
-              <a:t>호스팅 · Replit Autoscale</a:t>
-            </a:r>
-          </a:p>
-        </p:txBody>
-      </p:sp>
-      <p:sp>
-        <p:nvSpPr>
-          <p:cNvPr id="13" name="Rounded Rectangle 12"/>
-          <p:cNvSpPr/>
-          <p:nvPr/>
-        </p:nvSpPr>
-        <p:spPr>
-          <a:xfrm>
-            <a:off x="640080" y="4206240"/>
-            <a:ext cx="7132320" cy="502920"/>
-          </a:xfrm>
-          <a:prstGeom prst="roundRect">
-            <a:avLst>
-              <a:gd name="adj" fmla="val 10000"/>
-            </a:avLst>
           </a:prstGeom>
           <a:solidFill>
             <a:srgbClr val="0F766E"/>
@@ -3825,45 +4454,42 @@
           </a:fontRef>
         </p:style>
         <p:txBody>
-          <a:bodyPr rtlCol="0" anchor="ctr" wrap="square"/>
+          <a:bodyPr rtlCol="0" anchor="ctr"/>
           <a:lstStyle/>
           <a:p>
             <a:pPr algn="ctr"/>
             <a:r>
-              <a:rPr sz="1300" b="1">
+              <a:rPr sz="1100" b="1">
                 <a:solidFill>
                   <a:srgbClr val="FFFFFF"/>
                 </a:solidFill>
                 <a:latin typeface="Malgun Gothic"/>
               </a:rPr>
-              <a:t>ppamong.com  ·  Node.js + Express</a:t>
-            </a:r>
-          </a:p>
-        </p:txBody>
-      </p:sp>
-      <p:sp>
-        <p:nvSpPr>
-          <p:cNvPr id="14" name="Rounded Rectangle 13"/>
+              <a:t>Replit Autoscale
+Node.js + Express</a:t>
+            </a:r>
+          </a:p>
+        </p:txBody>
+      </p:sp>
+      <p:sp>
+        <p:nvSpPr>
+          <p:cNvPr id="12" name="Rounded Rectangle 11"/>
           <p:cNvSpPr/>
           <p:nvPr/>
         </p:nvSpPr>
         <p:spPr>
           <a:xfrm>
-            <a:off x="640080" y="4892040"/>
-            <a:ext cx="2194560" cy="777240"/>
+            <a:off x="8013191" y="2423160"/>
+            <a:ext cx="3645407" cy="658368"/>
           </a:xfrm>
           <a:prstGeom prst="roundRect">
-            <a:avLst>
-              <a:gd name="adj" fmla="val 8000"/>
-            </a:avLst>
+            <a:avLst/>
           </a:prstGeom>
           <a:solidFill>
-            <a:srgbClr val="FFFFFF"/>
+            <a:srgbClr val="5B21B6"/>
           </a:solidFill>
-          <a:ln w="19050">
-            <a:solidFill>
-              <a:srgbClr val="0F766E"/>
-            </a:solidFill>
+          <a:ln>
+            <a:noFill/>
           </a:ln>
         </p:spPr>
         <p:style>
@@ -3881,288 +4507,33 @@
           </a:fontRef>
         </p:style>
         <p:txBody>
-          <a:bodyPr rtlCol="0" anchor="ctr" wrap="square"/>
+          <a:bodyPr rtlCol="0" anchor="ctr"/>
           <a:lstStyle/>
           <a:p>
             <a:pPr algn="ctr"/>
             <a:r>
-              <a:rPr sz="1300" b="1">
-                <a:solidFill>
-                  <a:srgbClr val="0F766E"/>
+              <a:rPr sz="1100" b="1">
+                <a:solidFill>
+                  <a:srgbClr val="FFFFFF"/>
                 </a:solidFill>
                 <a:latin typeface="Malgun Gothic"/>
               </a:rPr>
-              <a:t>UserApp</a:t>
-            </a:r>
-          </a:p>
-          <a:p>
-            <a:pPr algn="ctr"/>
-            <a:r>
-              <a:rPr sz="1000" b="0">
-                <a:solidFill>
-                  <a:srgbClr val="64748B"/>
-                </a:solidFill>
-                <a:latin typeface="Malgun Gothic"/>
-              </a:rPr>
-              <a:t>/login, /home …</a:t>
-            </a:r>
-          </a:p>
-        </p:txBody>
-      </p:sp>
-      <p:sp>
-        <p:nvSpPr>
-          <p:cNvPr id="15" name="Rounded Rectangle 14"/>
-          <p:cNvSpPr/>
-          <p:nvPr/>
-        </p:nvSpPr>
-        <p:spPr>
-          <a:xfrm>
-            <a:off x="3017520" y="4892040"/>
-            <a:ext cx="2194560" cy="777240"/>
-          </a:xfrm>
-          <a:prstGeom prst="roundRect">
-            <a:avLst>
-              <a:gd name="adj" fmla="val 8000"/>
-            </a:avLst>
-          </a:prstGeom>
-          <a:solidFill>
-            <a:srgbClr val="FFFFFF"/>
-          </a:solidFill>
-          <a:ln w="19050">
-            <a:solidFill>
-              <a:srgbClr val="0F766E"/>
-            </a:solidFill>
-          </a:ln>
-        </p:spPr>
-        <p:style>
-          <a:lnRef idx="1">
-            <a:schemeClr val="accent1"/>
-          </a:lnRef>
-          <a:fillRef idx="3">
-            <a:schemeClr val="accent1"/>
-          </a:fillRef>
-          <a:effectRef idx="2">
-            <a:schemeClr val="accent1"/>
-          </a:effectRef>
-          <a:fontRef idx="minor">
-            <a:schemeClr val="lt1"/>
-          </a:fontRef>
-        </p:style>
-        <p:txBody>
-          <a:bodyPr rtlCol="0" anchor="ctr" wrap="square"/>
-          <a:lstStyle/>
-          <a:p>
-            <a:pPr algn="ctr"/>
-            <a:r>
-              <a:rPr sz="1300" b="1">
-                <a:solidFill>
-                  <a:srgbClr val="0F766E"/>
-                </a:solidFill>
-                <a:latin typeface="Malgun Gothic"/>
-              </a:rPr>
-              <a:t>ManagerApp</a:t>
-            </a:r>
-          </a:p>
-          <a:p>
-            <a:pPr algn="ctr"/>
-            <a:r>
-              <a:rPr sz="1000" b="0">
-                <a:solidFill>
-                  <a:srgbClr val="64748B"/>
-                </a:solidFill>
-                <a:latin typeface="Malgun Gothic"/>
-              </a:rPr>
-              <a:t>/manager/*</a:t>
-            </a:r>
-          </a:p>
-        </p:txBody>
-      </p:sp>
-      <p:sp>
-        <p:nvSpPr>
-          <p:cNvPr id="16" name="Rounded Rectangle 15"/>
-          <p:cNvSpPr/>
-          <p:nvPr/>
-        </p:nvSpPr>
-        <p:spPr>
-          <a:xfrm>
-            <a:off x="5394960" y="4892040"/>
-            <a:ext cx="2194560" cy="777240"/>
-          </a:xfrm>
-          <a:prstGeom prst="roundRect">
-            <a:avLst>
-              <a:gd name="adj" fmla="val 8000"/>
-            </a:avLst>
-          </a:prstGeom>
-          <a:solidFill>
-            <a:srgbClr val="FFFFFF"/>
-          </a:solidFill>
-          <a:ln w="19050">
-            <a:solidFill>
-              <a:srgbClr val="0F766E"/>
-            </a:solidFill>
-          </a:ln>
-        </p:spPr>
-        <p:style>
-          <a:lnRef idx="1">
-            <a:schemeClr val="accent1"/>
-          </a:lnRef>
-          <a:fillRef idx="3">
-            <a:schemeClr val="accent1"/>
-          </a:fillRef>
-          <a:effectRef idx="2">
-            <a:schemeClr val="accent1"/>
-          </a:effectRef>
-          <a:fontRef idx="minor">
-            <a:schemeClr val="lt1"/>
-          </a:fontRef>
-        </p:style>
-        <p:txBody>
-          <a:bodyPr rtlCol="0" anchor="ctr" wrap="square"/>
-          <a:lstStyle/>
-          <a:p>
-            <a:pPr algn="ctr"/>
-            <a:r>
-              <a:rPr sz="1300" b="1">
-                <a:solidFill>
-                  <a:srgbClr val="0F766E"/>
-                </a:solidFill>
-                <a:latin typeface="Malgun Gothic"/>
-              </a:rPr>
-              <a:t>AdminApp</a:t>
-            </a:r>
-          </a:p>
-          <a:p>
-            <a:pPr algn="ctr"/>
-            <a:r>
-              <a:rPr sz="1000" b="0">
-                <a:solidFill>
-                  <a:srgbClr val="64748B"/>
-                </a:solidFill>
-                <a:latin typeface="Malgun Gothic"/>
-              </a:rPr>
-              <a:t>/admin/*</a:t>
-            </a:r>
-          </a:p>
-        </p:txBody>
-      </p:sp>
-      <p:sp>
-        <p:nvSpPr>
-          <p:cNvPr id="17" name="Rounded Rectangle 16"/>
-          <p:cNvSpPr/>
-          <p:nvPr/>
-        </p:nvSpPr>
-        <p:spPr>
-          <a:xfrm>
-            <a:off x="640080" y="5852160"/>
-            <a:ext cx="3383280" cy="411480"/>
-          </a:xfrm>
-          <a:prstGeom prst="roundRect">
-            <a:avLst>
-              <a:gd name="adj" fmla="val 10000"/>
-            </a:avLst>
-          </a:prstGeom>
-          <a:solidFill>
-            <a:srgbClr val="0F766E"/>
-          </a:solidFill>
-          <a:ln>
-            <a:noFill/>
-          </a:ln>
-        </p:spPr>
-        <p:style>
-          <a:lnRef idx="1">
-            <a:schemeClr val="accent1"/>
-          </a:lnRef>
-          <a:fillRef idx="3">
-            <a:schemeClr val="accent1"/>
-          </a:fillRef>
-          <a:effectRef idx="2">
-            <a:schemeClr val="accent1"/>
-          </a:effectRef>
-          <a:fontRef idx="minor">
-            <a:schemeClr val="lt1"/>
-          </a:fontRef>
-        </p:style>
-        <p:txBody>
-          <a:bodyPr rtlCol="0" anchor="ctr" wrap="square"/>
-          <a:lstStyle/>
-          <a:p>
-            <a:pPr algn="ctr"/>
-            <a:r>
-              <a:rPr sz="1200" b="1">
-                <a:solidFill>
-                  <a:srgbClr val="FFFFFF"/>
-                </a:solidFill>
-                <a:latin typeface="Malgun Gothic"/>
-              </a:rPr>
-              <a:t>Express API  /api/*</a:t>
-            </a:r>
-          </a:p>
-        </p:txBody>
-      </p:sp>
-      <p:sp>
-        <p:nvSpPr>
-          <p:cNvPr id="18" name="Rounded Rectangle 17"/>
-          <p:cNvSpPr/>
-          <p:nvPr/>
-        </p:nvSpPr>
-        <p:spPr>
-          <a:xfrm>
-            <a:off x="4206240" y="5852160"/>
-            <a:ext cx="3383280" cy="411480"/>
-          </a:xfrm>
-          <a:prstGeom prst="roundRect">
-            <a:avLst>
-              <a:gd name="adj" fmla="val 10000"/>
-            </a:avLst>
-          </a:prstGeom>
-          <a:solidFill>
-            <a:srgbClr val="0F766E"/>
-          </a:solidFill>
-          <a:ln>
-            <a:noFill/>
-          </a:ln>
-        </p:spPr>
-        <p:style>
-          <a:lnRef idx="1">
-            <a:schemeClr val="accent1"/>
-          </a:lnRef>
-          <a:fillRef idx="3">
-            <a:schemeClr val="accent1"/>
-          </a:fillRef>
-          <a:effectRef idx="2">
-            <a:schemeClr val="accent1"/>
-          </a:effectRef>
-          <a:fontRef idx="minor">
-            <a:schemeClr val="lt1"/>
-          </a:fontRef>
-        </p:style>
-        <p:txBody>
-          <a:bodyPr rtlCol="0" anchor="ctr" wrap="square"/>
-          <a:lstStyle/>
-          <a:p>
-            <a:pPr algn="ctr"/>
-            <a:r>
-              <a:rPr sz="1200" b="1">
-                <a:solidFill>
-                  <a:srgbClr val="FFFFFF"/>
-                </a:solidFill>
-                <a:latin typeface="Malgun Gothic"/>
-              </a:rPr>
-              <a:t>Redis · 세션·캐시</a:t>
-            </a:r>
-          </a:p>
-        </p:txBody>
-      </p:sp>
-      <p:sp>
-        <p:nvSpPr>
-          <p:cNvPr id="19" name="TextBox 18"/>
+              <a:t>MongoDB Atlas
++ Redis</a:t>
+            </a:r>
+          </a:p>
+        </p:txBody>
+      </p:sp>
+      <p:sp>
+        <p:nvSpPr>
+          <p:cNvPr id="13" name="TextBox 12"/>
           <p:cNvSpPr txBox="1"/>
           <p:nvPr/>
         </p:nvSpPr>
         <p:spPr>
           <a:xfrm>
-            <a:off x="8321040" y="3840480"/>
-            <a:ext cx="3474720" cy="320040"/>
+            <a:off x="502920" y="3337560"/>
+            <a:ext cx="11155680" cy="347472"/>
           </a:xfrm>
           <a:prstGeom prst="rect">
             <a:avLst/>
@@ -4175,147 +4546,116 @@
           </a:bodyPr>
           <a:lstStyle/>
           <a:p>
-            <a:pPr algn="l"/>
-            <a:r>
-              <a:rPr sz="1200" b="1">
-                <a:solidFill>
-                  <a:srgbClr val="B45309"/>
+            <a:r>
+              <a:rPr sz="1400" b="0">
+                <a:solidFill>
+                  <a:srgbClr val="0F172A"/>
                 </a:solidFill>
                 <a:latin typeface="Malgun Gothic"/>
               </a:rPr>
-              <a:t>외부 서비스</a:t>
-            </a:r>
-          </a:p>
-        </p:txBody>
-      </p:sp>
-      <p:sp>
-        <p:nvSpPr>
-          <p:cNvPr id="20" name="Rounded Rectangle 19"/>
-          <p:cNvSpPr/>
+              <a:t>• main.tsx 경로 분기: /manager → ManagerApp · /admin → AdminApp · /shop → MallApp · 그 외 → UserApp</a:t>
+            </a:r>
+          </a:p>
+        </p:txBody>
+      </p:sp>
+      <p:sp>
+        <p:nvSpPr>
+          <p:cNvPr id="14" name="TextBox 13"/>
+          <p:cNvSpPr txBox="1"/>
           <p:nvPr/>
         </p:nvSpPr>
         <p:spPr>
           <a:xfrm>
-            <a:off x="8321040" y="4206240"/>
-            <a:ext cx="3383280" cy="914400"/>
-          </a:xfrm>
-          <a:prstGeom prst="roundRect">
-            <a:avLst>
-              <a:gd name="adj" fmla="val 10000"/>
-            </a:avLst>
+            <a:off x="502920" y="3685032"/>
+            <a:ext cx="11155680" cy="347472"/>
+          </a:xfrm>
+          <a:prstGeom prst="rect">
+            <a:avLst/>
           </a:prstGeom>
-          <a:solidFill>
-            <a:srgbClr val="B45309"/>
-          </a:solidFill>
-          <a:ln>
-            <a:noFill/>
-          </a:ln>
-        </p:spPr>
-        <p:style>
-          <a:lnRef idx="1">
-            <a:schemeClr val="accent1"/>
-          </a:lnRef>
-          <a:fillRef idx="3">
-            <a:schemeClr val="accent1"/>
-          </a:fillRef>
-          <a:effectRef idx="2">
-            <a:schemeClr val="accent1"/>
-          </a:effectRef>
-          <a:fontRef idx="minor">
-            <a:schemeClr val="lt1"/>
-          </a:fontRef>
-        </p:style>
-        <p:txBody>
-          <a:bodyPr rtlCol="0" anchor="ctr" wrap="square"/>
-          <a:lstStyle/>
-          <a:p>
-            <a:pPr algn="ctr"/>
-            <a:r>
-              <a:rPr sz="1400" b="1">
-                <a:solidFill>
-                  <a:srgbClr val="FFFFFF"/>
+          <a:noFill/>
+        </p:spPr>
+        <p:txBody>
+          <a:bodyPr wrap="square">
+            <a:spAutoFit/>
+          </a:bodyPr>
+          <a:lstStyle/>
+          <a:p>
+            <a:r>
+              <a:rPr sz="1400" b="0">
+                <a:solidFill>
+                  <a:srgbClr val="0F172A"/>
                 </a:solidFill>
                 <a:latin typeface="Malgun Gothic"/>
               </a:rPr>
-              <a:t>MongoDB Atlas</a:t>
-            </a:r>
-          </a:p>
-          <a:p>
-            <a:pPr algn="ctr"/>
-            <a:r>
-              <a:rPr sz="1100" b="0">
-                <a:solidFill>
-                  <a:srgbClr val="E2E8F0"/>
+              <a:t>• Capacitor 앱(사용자·매니저)은 WebView로 ppamong.com 접속 — 서버 배포만으로 UI 대부분 반영</a:t>
+            </a:r>
+          </a:p>
+        </p:txBody>
+      </p:sp>
+      <p:sp>
+        <p:nvSpPr>
+          <p:cNvPr id="15" name="TextBox 14"/>
+          <p:cNvSpPr txBox="1"/>
+          <p:nvPr/>
+        </p:nvSpPr>
+        <p:spPr>
+          <a:xfrm>
+            <a:off x="502920" y="4032504"/>
+            <a:ext cx="11155680" cy="347472"/>
+          </a:xfrm>
+          <a:prstGeom prst="rect">
+            <a:avLst/>
+          </a:prstGeom>
+          <a:noFill/>
+        </p:spPr>
+        <p:txBody>
+          <a:bodyPr wrap="square">
+            <a:spAutoFit/>
+          </a:bodyPr>
+          <a:lstStyle/>
+          <a:p>
+            <a:r>
+              <a:rPr sz="1400" b="0">
+                <a:solidFill>
+                  <a:srgbClr val="0F172A"/>
                 </a:solidFill>
                 <a:latin typeface="Malgun Gothic"/>
               </a:rPr>
-              <a:t>DB: ppamong</a:t>
-            </a:r>
-          </a:p>
-        </p:txBody>
-      </p:sp>
-      <p:sp>
-        <p:nvSpPr>
-          <p:cNvPr id="21" name="Rounded Rectangle 20"/>
-          <p:cNvSpPr/>
+              <a:t>• OAuth(카카오·구글·애플), SOLAPI(SMS), Object Storage(영상·상품 이미지) 연동</a:t>
+            </a:r>
+          </a:p>
+        </p:txBody>
+      </p:sp>
+      <p:sp>
+        <p:nvSpPr>
+          <p:cNvPr id="16" name="TextBox 15"/>
+          <p:cNvSpPr txBox="1"/>
           <p:nvPr/>
         </p:nvSpPr>
         <p:spPr>
           <a:xfrm>
-            <a:off x="8321040" y="5349240"/>
-            <a:ext cx="3383280" cy="914400"/>
-          </a:xfrm>
-          <a:prstGeom prst="roundRect">
-            <a:avLst>
-              <a:gd name="adj" fmla="val 10000"/>
-            </a:avLst>
+            <a:off x="457200" y="6400800"/>
+            <a:ext cx="11247120" cy="320040"/>
+          </a:xfrm>
+          <a:prstGeom prst="rect">
+            <a:avLst/>
           </a:prstGeom>
-          <a:solidFill>
-            <a:srgbClr val="B45309"/>
-          </a:solidFill>
-          <a:ln>
-            <a:noFill/>
-          </a:ln>
-        </p:spPr>
-        <p:style>
-          <a:lnRef idx="1">
-            <a:schemeClr val="accent1"/>
-          </a:lnRef>
-          <a:fillRef idx="3">
-            <a:schemeClr val="accent1"/>
-          </a:fillRef>
-          <a:effectRef idx="2">
-            <a:schemeClr val="accent1"/>
-          </a:effectRef>
-          <a:fontRef idx="minor">
-            <a:schemeClr val="lt1"/>
-          </a:fontRef>
-        </p:style>
-        <p:txBody>
-          <a:bodyPr rtlCol="0" anchor="ctr" wrap="square"/>
-          <a:lstStyle/>
-          <a:p>
-            <a:pPr algn="ctr"/>
-            <a:r>
-              <a:rPr sz="1400" b="1">
-                <a:solidFill>
-                  <a:srgbClr val="FFFFFF"/>
+          <a:noFill/>
+        </p:spPr>
+        <p:txBody>
+          <a:bodyPr wrap="none">
+            <a:spAutoFit/>
+          </a:bodyPr>
+          <a:lstStyle/>
+          <a:p>
+            <a:r>
+              <a:rPr sz="1000" b="0">
+                <a:solidFill>
+                  <a:srgbClr val="64748B"/>
                 </a:solidFill>
                 <a:latin typeface="Malgun Gothic"/>
               </a:rPr>
-              <a:t>OAuth</a:t>
-            </a:r>
-          </a:p>
-          <a:p>
-            <a:pPr algn="ctr"/>
-            <a:r>
-              <a:rPr sz="1100" b="0">
-                <a:solidFill>
-                  <a:srgbClr val="E2E8F0"/>
-                </a:solidFill>
-                <a:latin typeface="Malgun Gothic"/>
-              </a:rPr>
-              <a:t>카카오 · 구글 · 애플</a:t>
+              <a:t>docs/PPAMONG_시스템_구조도.md · GitHub hanbaedal/bbamong</a:t>
             </a:r>
           </a:p>
         </p:txBody>
@@ -4347,13 +4687,13 @@
         <p:spPr>
           <a:xfrm>
             <a:off x="0" y="0"/>
-            <a:ext cx="12191695" cy="109728"/>
+            <a:ext cx="12191695" cy="960120"/>
           </a:xfrm>
           <a:prstGeom prst="rect">
             <a:avLst/>
           </a:prstGeom>
           <a:solidFill>
-            <a:srgbClr val="1D4ED8"/>
+            <a:srgbClr val="0F172A"/>
           </a:solidFill>
           <a:ln>
             <a:noFill/>
@@ -4389,8 +4729,8 @@
         </p:nvSpPr>
         <p:spPr>
           <a:xfrm>
-            <a:off x="457200" y="274320"/>
-            <a:ext cx="10972800" cy="457200"/>
+            <a:off x="502920" y="201168"/>
+            <a:ext cx="10972800" cy="640080"/>
           </a:xfrm>
           <a:prstGeom prst="rect">
             <a:avLst/>
@@ -4398,20 +4738,19 @@
           <a:noFill/>
         </p:spPr>
         <p:txBody>
-          <a:bodyPr wrap="square">
+          <a:bodyPr wrap="none">
             <a:spAutoFit/>
           </a:bodyPr>
           <a:lstStyle/>
           <a:p>
-            <a:pPr algn="l"/>
             <a:r>
               <a:rPr sz="2800" b="1">
                 <a:solidFill>
-                  <a:srgbClr val="0F172A"/>
+                  <a:srgbClr val="FFFFFF"/>
                 </a:solidFill>
                 <a:latin typeface="Malgun Gothic"/>
               </a:rPr>
-              <a:t>2. 역할별 흐름</a:t>
+              <a:t>2. 클라이언트 4종 · 역할</a:t>
             </a:r>
           </a:p>
         </p:txBody>
@@ -4424,8 +4763,8 @@
         </p:nvSpPr>
         <p:spPr>
           <a:xfrm>
-            <a:off x="731520" y="1005840"/>
-            <a:ext cx="2286000" cy="320040"/>
+            <a:off x="502920" y="1051560"/>
+            <a:ext cx="10972800" cy="457200"/>
           </a:xfrm>
           <a:prstGeom prst="rect">
             <a:avLst/>
@@ -4433,34 +4772,479 @@
           <a:noFill/>
         </p:spPr>
         <p:txBody>
-          <a:bodyPr wrap="square">
+          <a:bodyPr wrap="none">
             <a:spAutoFit/>
           </a:bodyPr>
           <a:lstStyle/>
           <a:p>
-            <a:pPr algn="ctr"/>
-            <a:r>
-              <a:rPr sz="1300" b="1">
+            <a:r>
+              <a:rPr sz="1400" b="0">
                 <a:solidFill>
                   <a:srgbClr val="64748B"/>
                 </a:solidFill>
                 <a:latin typeface="Malgun Gothic"/>
               </a:rPr>
-              <a:t>누가</a:t>
-            </a:r>
-          </a:p>
-        </p:txBody>
-      </p:sp>
-      <p:sp>
-        <p:nvSpPr>
-          <p:cNvPr id="5" name="TextBox 4"/>
+              <a:t>URL · 사용자 · 주요 기능</a:t>
+            </a:r>
+          </a:p>
+        </p:txBody>
+      </p:sp>
+      <p:graphicFrame>
+        <p:nvGraphicFramePr>
+          <p:cNvPr id="5" name="Table 4"/>
+          <p:cNvGraphicFramePr>
+            <a:graphicFrameLocks noGrp="1"/>
+          </p:cNvGraphicFramePr>
+          <p:nvPr/>
+        </p:nvGraphicFramePr>
+        <p:xfrm>
+          <a:off x="502920" y="1417320"/>
+          <a:ext cx="11155680" cy="2331720"/>
+        </p:xfrm>
+        <a:graphic>
+          <a:graphicData uri="http://schemas.openxmlformats.org/drawingml/2006/table">
+            <a:tbl>
+              <a:tblPr firstRow="1" bandRow="1">
+                <a:tableStyleId>{5C22544A-7EE6-4342-B048-85BDC9FD1C3A}</a:tableStyleId>
+              </a:tblPr>
+              <a:tblGrid>
+                <a:gridCol w="2011680"/>
+                <a:gridCol w="2926080"/>
+                <a:gridCol w="1645920"/>
+                <a:gridCol w="4572000"/>
+              </a:tblGrid>
+              <a:tr h="466344">
+                <a:tc>
+                  <a:txBody>
+                    <a:bodyPr/>
+                    <a:lstStyle/>
+                    <a:p>
+                      <a:r>
+                        <a:rPr sz="1100" b="1">
+                          <a:solidFill>
+                            <a:srgbClr val="FFFFFF"/>
+                          </a:solidFill>
+                          <a:latin typeface="Malgun Gothic"/>
+                        </a:rPr>
+                        <a:t>클라이언트</a:t>
+                      </a:r>
+                    </a:p>
+                  </a:txBody>
+                  <a:tcPr>
+                    <a:solidFill>
+                      <a:srgbClr val="0F172A"/>
+                    </a:solidFill>
+                  </a:tcPr>
+                </a:tc>
+                <a:tc>
+                  <a:txBody>
+                    <a:bodyPr/>
+                    <a:lstStyle/>
+                    <a:p>
+                      <a:r>
+                        <a:rPr sz="1100" b="1">
+                          <a:solidFill>
+                            <a:srgbClr val="FFFFFF"/>
+                          </a:solidFill>
+                          <a:latin typeface="Malgun Gothic"/>
+                        </a:rPr>
+                        <a:t>접속</a:t>
+                      </a:r>
+                    </a:p>
+                  </a:txBody>
+                  <a:tcPr>
+                    <a:solidFill>
+                      <a:srgbClr val="0F172A"/>
+                    </a:solidFill>
+                  </a:tcPr>
+                </a:tc>
+                <a:tc>
+                  <a:txBody>
+                    <a:bodyPr/>
+                    <a:lstStyle/>
+                    <a:p>
+                      <a:r>
+                        <a:rPr sz="1100" b="1">
+                          <a:solidFill>
+                            <a:srgbClr val="FFFFFF"/>
+                          </a:solidFill>
+                          <a:latin typeface="Malgun Gothic"/>
+                        </a:rPr>
+                        <a:t>대상</a:t>
+                      </a:r>
+                    </a:p>
+                  </a:txBody>
+                  <a:tcPr>
+                    <a:solidFill>
+                      <a:srgbClr val="0F172A"/>
+                    </a:solidFill>
+                  </a:tcPr>
+                </a:tc>
+                <a:tc>
+                  <a:txBody>
+                    <a:bodyPr/>
+                    <a:lstStyle/>
+                    <a:p>
+                      <a:r>
+                        <a:rPr sz="1100" b="1">
+                          <a:solidFill>
+                            <a:srgbClr val="FFFFFF"/>
+                          </a:solidFill>
+                          <a:latin typeface="Malgun Gothic"/>
+                        </a:rPr>
+                        <a:t>주요 기능</a:t>
+                      </a:r>
+                    </a:p>
+                  </a:txBody>
+                  <a:tcPr>
+                    <a:solidFill>
+                      <a:srgbClr val="0F172A"/>
+                    </a:solidFill>
+                  </a:tcPr>
+                </a:tc>
+              </a:tr>
+              <a:tr h="466344">
+                <a:tc>
+                  <a:txBody>
+                    <a:bodyPr/>
+                    <a:lstStyle/>
+                    <a:p>
+                      <a:r>
+                        <a:rPr sz="1000">
+                          <a:solidFill>
+                            <a:srgbClr val="0F172A"/>
+                          </a:solidFill>
+                          <a:latin typeface="Malgun Gothic"/>
+                        </a:rPr>
+                        <a:t>사용자 앱</a:t>
+                      </a:r>
+                    </a:p>
+                  </a:txBody>
+                  <a:tcPr/>
+                </a:tc>
+                <a:tc>
+                  <a:txBody>
+                    <a:bodyPr/>
+                    <a:lstStyle/>
+                    <a:p>
+                      <a:r>
+                        <a:rPr sz="1000">
+                          <a:solidFill>
+                            <a:srgbClr val="0F172A"/>
+                          </a:solidFill>
+                          <a:latin typeface="Malgun Gothic"/>
+                        </a:rPr>
+                        <a:t>/login, /home, /prediction …</a:t>
+                      </a:r>
+                    </a:p>
+                  </a:txBody>
+                  <a:tcPr/>
+                </a:tc>
+                <a:tc>
+                  <a:txBody>
+                    <a:bodyPr/>
+                    <a:lstStyle/>
+                    <a:p>
+                      <a:r>
+                        <a:rPr sz="1000">
+                          <a:solidFill>
+                            <a:srgbClr val="0F172A"/>
+                          </a:solidFill>
+                          <a:latin typeface="Malgun Gothic"/>
+                        </a:rPr>
+                        <a:t>참여자</a:t>
+                      </a:r>
+                    </a:p>
+                  </a:txBody>
+                  <a:tcPr/>
+                </a:tc>
+                <a:tc>
+                  <a:txBody>
+                    <a:bodyPr/>
+                    <a:lstStyle/>
+                    <a:p>
+                      <a:r>
+                        <a:rPr sz="1000">
+                          <a:solidFill>
+                            <a:srgbClr val="0F172A"/>
+                          </a:solidFill>
+                          <a:latin typeface="Malgun Gothic"/>
+                        </a:rPr>
+                        <a:t>게임 · 회원가입(유일) · 몰 링크</a:t>
+                      </a:r>
+                    </a:p>
+                  </a:txBody>
+                  <a:tcPr/>
+                </a:tc>
+              </a:tr>
+              <a:tr h="466344">
+                <a:tc>
+                  <a:txBody>
+                    <a:bodyPr/>
+                    <a:lstStyle/>
+                    <a:p>
+                      <a:r>
+                        <a:rPr sz="1000">
+                          <a:solidFill>
+                            <a:srgbClr val="0F172A"/>
+                          </a:solidFill>
+                          <a:latin typeface="Malgun Gothic"/>
+                        </a:rPr>
+                        <a:t>쇼핑몰 웹</a:t>
+                      </a:r>
+                    </a:p>
+                  </a:txBody>
+                  <a:tcPr>
+                    <a:solidFill>
+                      <a:srgbClr val="F8FAFC"/>
+                    </a:solidFill>
+                  </a:tcPr>
+                </a:tc>
+                <a:tc>
+                  <a:txBody>
+                    <a:bodyPr/>
+                    <a:lstStyle/>
+                    <a:p>
+                      <a:r>
+                        <a:rPr sz="1000">
+                          <a:solidFill>
+                            <a:srgbClr val="0F172A"/>
+                          </a:solidFill>
+                          <a:latin typeface="Malgun Gothic"/>
+                        </a:rPr>
+                        <a:t>/shop, /shop/product/:id</a:t>
+                      </a:r>
+                    </a:p>
+                  </a:txBody>
+                  <a:tcPr>
+                    <a:solidFill>
+                      <a:srgbClr val="F8FAFC"/>
+                    </a:solidFill>
+                  </a:tcPr>
+                </a:tc>
+                <a:tc>
+                  <a:txBody>
+                    <a:bodyPr/>
+                    <a:lstStyle/>
+                    <a:p>
+                      <a:r>
+                        <a:rPr sz="1000">
+                          <a:solidFill>
+                            <a:srgbClr val="0F172A"/>
+                          </a:solidFill>
+                          <a:latin typeface="Malgun Gothic"/>
+                        </a:rPr>
+                        <a:t>일반 고객</a:t>
+                      </a:r>
+                    </a:p>
+                  </a:txBody>
+                  <a:tcPr>
+                    <a:solidFill>
+                      <a:srgbClr val="F8FAFC"/>
+                    </a:solidFill>
+                  </a:tcPr>
+                </a:tc>
+                <a:tc>
+                  <a:txBody>
+                    <a:bodyPr/>
+                    <a:lstStyle/>
+                    <a:p>
+                      <a:r>
+                        <a:rPr sz="1000">
+                          <a:solidFill>
+                            <a:srgbClr val="0F172A"/>
+                          </a:solidFill>
+                          <a:latin typeface="Malgun Gothic"/>
+                        </a:rPr>
+                        <a:t>상품·장바구니 · 정회원 주문 · 구매 문의</a:t>
+                      </a:r>
+                    </a:p>
+                  </a:txBody>
+                  <a:tcPr>
+                    <a:solidFill>
+                      <a:srgbClr val="F8FAFC"/>
+                    </a:solidFill>
+                  </a:tcPr>
+                </a:tc>
+              </a:tr>
+              <a:tr h="466344">
+                <a:tc>
+                  <a:txBody>
+                    <a:bodyPr/>
+                    <a:lstStyle/>
+                    <a:p>
+                      <a:r>
+                        <a:rPr sz="1000">
+                          <a:solidFill>
+                            <a:srgbClr val="0F172A"/>
+                          </a:solidFill>
+                          <a:latin typeface="Malgun Gothic"/>
+                        </a:rPr>
+                        <a:t>매니저 앱</a:t>
+                      </a:r>
+                    </a:p>
+                  </a:txBody>
+                  <a:tcPr/>
+                </a:tc>
+                <a:tc>
+                  <a:txBody>
+                    <a:bodyPr/>
+                    <a:lstStyle/>
+                    <a:p>
+                      <a:r>
+                        <a:rPr sz="1000">
+                          <a:solidFill>
+                            <a:srgbClr val="0F172A"/>
+                          </a:solidFill>
+                          <a:latin typeface="Malgun Gothic"/>
+                        </a:rPr>
+                        <a:t>/manager/*</a:t>
+                      </a:r>
+                    </a:p>
+                  </a:txBody>
+                  <a:tcPr/>
+                </a:tc>
+                <a:tc>
+                  <a:txBody>
+                    <a:bodyPr/>
+                    <a:lstStyle/>
+                    <a:p>
+                      <a:r>
+                        <a:rPr sz="1000">
+                          <a:solidFill>
+                            <a:srgbClr val="0F172A"/>
+                          </a:solidFill>
+                          <a:latin typeface="Malgun Gothic"/>
+                        </a:rPr>
+                        <a:t>현장 운영자</a:t>
+                      </a:r>
+                    </a:p>
+                  </a:txBody>
+                  <a:tcPr/>
+                </a:tc>
+                <a:tc>
+                  <a:txBody>
+                    <a:bodyPr/>
+                    <a:lstStyle/>
+                    <a:p>
+                      <a:r>
+                        <a:rPr sz="1000">
+                          <a:solidFill>
+                            <a:srgbClr val="0F172A"/>
+                          </a:solidFill>
+                          <a:latin typeface="Malgun Gothic"/>
+                        </a:rPr>
+                        <a:t>경기 운영 · 예측 진행 (관리자 웹 불가)</a:t>
+                      </a:r>
+                    </a:p>
+                  </a:txBody>
+                  <a:tcPr/>
+                </a:tc>
+              </a:tr>
+              <a:tr h="466344">
+                <a:tc>
+                  <a:txBody>
+                    <a:bodyPr/>
+                    <a:lstStyle/>
+                    <a:p>
+                      <a:r>
+                        <a:rPr sz="1000">
+                          <a:solidFill>
+                            <a:srgbClr val="0F172A"/>
+                          </a:solidFill>
+                          <a:latin typeface="Malgun Gothic"/>
+                        </a:rPr>
+                        <a:t>관리자 웹</a:t>
+                      </a:r>
+                    </a:p>
+                  </a:txBody>
+                  <a:tcPr>
+                    <a:solidFill>
+                      <a:srgbClr val="F8FAFC"/>
+                    </a:solidFill>
+                  </a:tcPr>
+                </a:tc>
+                <a:tc>
+                  <a:txBody>
+                    <a:bodyPr/>
+                    <a:lstStyle/>
+                    <a:p>
+                      <a:r>
+                        <a:rPr sz="1000">
+                          <a:solidFill>
+                            <a:srgbClr val="0F172A"/>
+                          </a:solidFill>
+                          <a:latin typeface="Malgun Gothic"/>
+                        </a:rPr>
+                        <a:t>/admin/*</a:t>
+                      </a:r>
+                    </a:p>
+                  </a:txBody>
+                  <a:tcPr>
+                    <a:solidFill>
+                      <a:srgbClr val="F8FAFC"/>
+                    </a:solidFill>
+                  </a:tcPr>
+                </a:tc>
+                <a:tc>
+                  <a:txBody>
+                    <a:bodyPr/>
+                    <a:lstStyle/>
+                    <a:p>
+                      <a:r>
+                        <a:rPr sz="1000">
+                          <a:solidFill>
+                            <a:srgbClr val="0F172A"/>
+                          </a:solidFill>
+                          <a:latin typeface="Malgun Gothic"/>
+                        </a:rPr>
+                        <a:t>슈퍼·일반 어드민</a:t>
+                      </a:r>
+                    </a:p>
+                  </a:txBody>
+                  <a:tcPr>
+                    <a:solidFill>
+                      <a:srgbClr val="F8FAFC"/>
+                    </a:solidFill>
+                  </a:tcPr>
+                </a:tc>
+                <a:tc>
+                  <a:txBody>
+                    <a:bodyPr/>
+                    <a:lstStyle/>
+                    <a:p>
+                      <a:r>
+                        <a:rPr sz="1000">
+                          <a:solidFill>
+                            <a:srgbClr val="0F172A"/>
+                          </a:solidFill>
+                          <a:latin typeface="Malgun Gothic"/>
+                        </a:rPr>
+                        <a:t>게임·회원·몰·주문·재고·구매 백오피스</a:t>
+                      </a:r>
+                    </a:p>
+                  </a:txBody>
+                  <a:tcPr>
+                    <a:solidFill>
+                      <a:srgbClr val="F8FAFC"/>
+                    </a:solidFill>
+                  </a:tcPr>
+                </a:tc>
+              </a:tr>
+            </a:tbl>
+          </a:graphicData>
+        </a:graphic>
+      </p:graphicFrame>
+      <p:sp>
+        <p:nvSpPr>
+          <p:cNvPr id="6" name="TextBox 5"/>
           <p:cNvSpPr txBox="1"/>
           <p:nvPr/>
         </p:nvSpPr>
         <p:spPr>
           <a:xfrm>
-            <a:off x="3657600" y="1005840"/>
-            <a:ext cx="2286000" cy="320040"/>
+            <a:off x="457200" y="6400800"/>
+            <a:ext cx="11247120" cy="320040"/>
           </a:xfrm>
           <a:prstGeom prst="rect">
             <a:avLst/>
@@ -4468,935 +5252,19 @@
           <a:noFill/>
         </p:spPr>
         <p:txBody>
-          <a:bodyPr wrap="square">
+          <a:bodyPr wrap="none">
             <a:spAutoFit/>
           </a:bodyPr>
           <a:lstStyle/>
           <a:p>
-            <a:pPr algn="ctr"/>
-            <a:r>
-              <a:rPr sz="1300" b="1">
+            <a:r>
+              <a:rPr sz="1000" b="0">
                 <a:solidFill>
                   <a:srgbClr val="64748B"/>
                 </a:solidFill>
                 <a:latin typeface="Malgun Gothic"/>
               </a:rPr>
-              <a:t>어떻게</a:t>
-            </a:r>
-          </a:p>
-        </p:txBody>
-      </p:sp>
-      <p:sp>
-        <p:nvSpPr>
-          <p:cNvPr id="6" name="TextBox 5"/>
-          <p:cNvSpPr txBox="1"/>
-          <p:nvPr/>
-        </p:nvSpPr>
-        <p:spPr>
-          <a:xfrm>
-            <a:off x="6583680" y="1005840"/>
-            <a:ext cx="2286000" cy="320040"/>
-          </a:xfrm>
-          <a:prstGeom prst="rect">
-            <a:avLst/>
-          </a:prstGeom>
-          <a:noFill/>
-        </p:spPr>
-        <p:txBody>
-          <a:bodyPr wrap="square">
-            <a:spAutoFit/>
-          </a:bodyPr>
-          <a:lstStyle/>
-          <a:p>
-            <a:pPr algn="ctr"/>
-            <a:r>
-              <a:rPr sz="1300" b="1">
-                <a:solidFill>
-                  <a:srgbClr val="64748B"/>
-                </a:solidFill>
-                <a:latin typeface="Malgun Gothic"/>
-              </a:rPr>
-              <a:t>어디 (URL)</a:t>
-            </a:r>
-          </a:p>
-        </p:txBody>
-      </p:sp>
-      <p:sp>
-        <p:nvSpPr>
-          <p:cNvPr id="7" name="TextBox 6"/>
-          <p:cNvSpPr txBox="1"/>
-          <p:nvPr/>
-        </p:nvSpPr>
-        <p:spPr>
-          <a:xfrm>
-            <a:off x="9601200" y="1005840"/>
-            <a:ext cx="2286000" cy="320040"/>
-          </a:xfrm>
-          <a:prstGeom prst="rect">
-            <a:avLst/>
-          </a:prstGeom>
-          <a:noFill/>
-        </p:spPr>
-        <p:txBody>
-          <a:bodyPr wrap="square">
-            <a:spAutoFit/>
-          </a:bodyPr>
-          <a:lstStyle/>
-          <a:p>
-            <a:pPr algn="ctr"/>
-            <a:r>
-              <a:rPr sz="1300" b="1">
-                <a:solidFill>
-                  <a:srgbClr val="64748B"/>
-                </a:solidFill>
-                <a:latin typeface="Malgun Gothic"/>
-              </a:rPr>
-              <a:t>서버</a:t>
-            </a:r>
-          </a:p>
-        </p:txBody>
-      </p:sp>
-      <p:sp>
-        <p:nvSpPr>
-          <p:cNvPr id="8" name="Rounded Rectangle 7"/>
-          <p:cNvSpPr/>
-          <p:nvPr/>
-        </p:nvSpPr>
-        <p:spPr>
-          <a:xfrm>
-            <a:off x="548640" y="1463040"/>
-            <a:ext cx="2560320" cy="914400"/>
-          </a:xfrm>
-          <a:prstGeom prst="roundRect">
-            <a:avLst>
-              <a:gd name="adj" fmla="val 10000"/>
-            </a:avLst>
-          </a:prstGeom>
-          <a:solidFill>
-            <a:srgbClr val="1E40AF"/>
-          </a:solidFill>
-          <a:ln>
-            <a:noFill/>
-          </a:ln>
-        </p:spPr>
-        <p:style>
-          <a:lnRef idx="1">
-            <a:schemeClr val="accent1"/>
-          </a:lnRef>
-          <a:fillRef idx="3">
-            <a:schemeClr val="accent1"/>
-          </a:fillRef>
-          <a:effectRef idx="2">
-            <a:schemeClr val="accent1"/>
-          </a:effectRef>
-          <a:fontRef idx="minor">
-            <a:schemeClr val="lt1"/>
-          </a:fontRef>
-        </p:style>
-        <p:txBody>
-          <a:bodyPr rtlCol="0" anchor="ctr" wrap="square"/>
-          <a:lstStyle/>
-          <a:p>
-            <a:pPr algn="ctr"/>
-            <a:r>
-              <a:rPr sz="1600" b="1">
-                <a:solidFill>
-                  <a:srgbClr val="FFFFFF"/>
-                </a:solidFill>
-                <a:latin typeface="Malgun Gothic"/>
-              </a:rPr>
-              <a:t>참여자</a:t>
-            </a:r>
-          </a:p>
-        </p:txBody>
-      </p:sp>
-      <p:sp>
-        <p:nvSpPr>
-          <p:cNvPr id="9" name="TextBox 8"/>
-          <p:cNvSpPr txBox="1"/>
-          <p:nvPr/>
-        </p:nvSpPr>
-        <p:spPr>
-          <a:xfrm>
-            <a:off x="3200400" y="1737360"/>
-            <a:ext cx="365760" cy="365760"/>
-          </a:xfrm>
-          <a:prstGeom prst="rect">
-            <a:avLst/>
-          </a:prstGeom>
-          <a:noFill/>
-        </p:spPr>
-        <p:txBody>
-          <a:bodyPr wrap="square">
-            <a:spAutoFit/>
-          </a:bodyPr>
-          <a:lstStyle/>
-          <a:p>
-            <a:pPr algn="ctr"/>
-            <a:r>
-              <a:rPr sz="2000" b="1">
-                <a:solidFill>
-                  <a:srgbClr val="64748B"/>
-                </a:solidFill>
-                <a:latin typeface="Malgun Gothic"/>
-              </a:rPr>
-              <a:t>→</a:t>
-            </a:r>
-          </a:p>
-        </p:txBody>
-      </p:sp>
-      <p:sp>
-        <p:nvSpPr>
-          <p:cNvPr id="10" name="Rounded Rectangle 9"/>
-          <p:cNvSpPr/>
-          <p:nvPr/>
-        </p:nvSpPr>
-        <p:spPr>
-          <a:xfrm>
-            <a:off x="3566160" y="1463040"/>
-            <a:ext cx="2560320" cy="914400"/>
-          </a:xfrm>
-          <a:prstGeom prst="roundRect">
-            <a:avLst>
-              <a:gd name="adj" fmla="val 8000"/>
-            </a:avLst>
-          </a:prstGeom>
-          <a:solidFill>
-            <a:srgbClr val="FFFFFF"/>
-          </a:solidFill>
-          <a:ln w="19050">
-            <a:solidFill>
-              <a:srgbClr val="1E40AF"/>
-            </a:solidFill>
-          </a:ln>
-        </p:spPr>
-        <p:style>
-          <a:lnRef idx="1">
-            <a:schemeClr val="accent1"/>
-          </a:lnRef>
-          <a:fillRef idx="3">
-            <a:schemeClr val="accent1"/>
-          </a:fillRef>
-          <a:effectRef idx="2">
-            <a:schemeClr val="accent1"/>
-          </a:effectRef>
-          <a:fontRef idx="minor">
-            <a:schemeClr val="lt1"/>
-          </a:fontRef>
-        </p:style>
-        <p:txBody>
-          <a:bodyPr rtlCol="0" anchor="ctr" wrap="square"/>
-          <a:lstStyle/>
-          <a:p>
-            <a:pPr algn="ctr"/>
-            <a:r>
-              <a:rPr sz="1300" b="1">
-                <a:solidFill>
-                  <a:srgbClr val="1E40AF"/>
-                </a:solidFill>
-                <a:latin typeface="Malgun Gothic"/>
-              </a:rPr>
-              <a:t>사용자 앱</a:t>
-            </a:r>
-          </a:p>
-        </p:txBody>
-      </p:sp>
-      <p:sp>
-        <p:nvSpPr>
-          <p:cNvPr id="11" name="TextBox 10"/>
-          <p:cNvSpPr txBox="1"/>
-          <p:nvPr/>
-        </p:nvSpPr>
-        <p:spPr>
-          <a:xfrm>
-            <a:off x="6217920" y="1737360"/>
-            <a:ext cx="365760" cy="365760"/>
-          </a:xfrm>
-          <a:prstGeom prst="rect">
-            <a:avLst/>
-          </a:prstGeom>
-          <a:noFill/>
-        </p:spPr>
-        <p:txBody>
-          <a:bodyPr wrap="square">
-            <a:spAutoFit/>
-          </a:bodyPr>
-          <a:lstStyle/>
-          <a:p>
-            <a:pPr algn="ctr"/>
-            <a:r>
-              <a:rPr sz="2000" b="1">
-                <a:solidFill>
-                  <a:srgbClr val="64748B"/>
-                </a:solidFill>
-                <a:latin typeface="Malgun Gothic"/>
-              </a:rPr>
-              <a:t>→</a:t>
-            </a:r>
-          </a:p>
-        </p:txBody>
-      </p:sp>
-      <p:sp>
-        <p:nvSpPr>
-          <p:cNvPr id="12" name="Rounded Rectangle 11"/>
-          <p:cNvSpPr/>
-          <p:nvPr/>
-        </p:nvSpPr>
-        <p:spPr>
-          <a:xfrm>
-            <a:off x="6583680" y="1463040"/>
-            <a:ext cx="2560320" cy="914400"/>
-          </a:xfrm>
-          <a:prstGeom prst="roundRect">
-            <a:avLst>
-              <a:gd name="adj" fmla="val 8000"/>
-            </a:avLst>
-          </a:prstGeom>
-          <a:solidFill>
-            <a:srgbClr val="FFFFFF"/>
-          </a:solidFill>
-          <a:ln w="19050">
-            <a:solidFill>
-              <a:srgbClr val="1E40AF"/>
-            </a:solidFill>
-          </a:ln>
-        </p:spPr>
-        <p:style>
-          <a:lnRef idx="1">
-            <a:schemeClr val="accent1"/>
-          </a:lnRef>
-          <a:fillRef idx="3">
-            <a:schemeClr val="accent1"/>
-          </a:fillRef>
-          <a:effectRef idx="2">
-            <a:schemeClr val="accent1"/>
-          </a:effectRef>
-          <a:fontRef idx="minor">
-            <a:schemeClr val="lt1"/>
-          </a:fontRef>
-        </p:style>
-        <p:txBody>
-          <a:bodyPr rtlCol="0" anchor="ctr" wrap="square"/>
-          <a:lstStyle/>
-          <a:p>
-            <a:pPr algn="ctr"/>
-            <a:r>
-              <a:rPr sz="1300" b="1">
-                <a:solidFill>
-                  <a:srgbClr val="1E40AF"/>
-                </a:solidFill>
-                <a:latin typeface="Malgun Gothic"/>
-              </a:rPr>
-              <a:t>/login, /home …</a:t>
-            </a:r>
-          </a:p>
-        </p:txBody>
-      </p:sp>
-      <p:sp>
-        <p:nvSpPr>
-          <p:cNvPr id="13" name="Rounded Rectangle 12"/>
-          <p:cNvSpPr/>
-          <p:nvPr/>
-        </p:nvSpPr>
-        <p:spPr>
-          <a:xfrm>
-            <a:off x="548640" y="2697480"/>
-            <a:ext cx="2560320" cy="914400"/>
-          </a:xfrm>
-          <a:prstGeom prst="roundRect">
-            <a:avLst>
-              <a:gd name="adj" fmla="val 10000"/>
-            </a:avLst>
-          </a:prstGeom>
-          <a:solidFill>
-            <a:srgbClr val="0E7490"/>
-          </a:solidFill>
-          <a:ln>
-            <a:noFill/>
-          </a:ln>
-        </p:spPr>
-        <p:style>
-          <a:lnRef idx="1">
-            <a:schemeClr val="accent1"/>
-          </a:lnRef>
-          <a:fillRef idx="3">
-            <a:schemeClr val="accent1"/>
-          </a:fillRef>
-          <a:effectRef idx="2">
-            <a:schemeClr val="accent1"/>
-          </a:effectRef>
-          <a:fontRef idx="minor">
-            <a:schemeClr val="lt1"/>
-          </a:fontRef>
-        </p:style>
-        <p:txBody>
-          <a:bodyPr rtlCol="0" anchor="ctr" wrap="square"/>
-          <a:lstStyle/>
-          <a:p>
-            <a:pPr algn="ctr"/>
-            <a:r>
-              <a:rPr sz="1600" b="1">
-                <a:solidFill>
-                  <a:srgbClr val="FFFFFF"/>
-                </a:solidFill>
-                <a:latin typeface="Malgun Gothic"/>
-              </a:rPr>
-              <a:t>현장 운영자</a:t>
-            </a:r>
-          </a:p>
-        </p:txBody>
-      </p:sp>
-      <p:sp>
-        <p:nvSpPr>
-          <p:cNvPr id="14" name="TextBox 13"/>
-          <p:cNvSpPr txBox="1"/>
-          <p:nvPr/>
-        </p:nvSpPr>
-        <p:spPr>
-          <a:xfrm>
-            <a:off x="3200400" y="2971800"/>
-            <a:ext cx="365760" cy="365760"/>
-          </a:xfrm>
-          <a:prstGeom prst="rect">
-            <a:avLst/>
-          </a:prstGeom>
-          <a:noFill/>
-        </p:spPr>
-        <p:txBody>
-          <a:bodyPr wrap="square">
-            <a:spAutoFit/>
-          </a:bodyPr>
-          <a:lstStyle/>
-          <a:p>
-            <a:pPr algn="ctr"/>
-            <a:r>
-              <a:rPr sz="2000" b="1">
-                <a:solidFill>
-                  <a:srgbClr val="64748B"/>
-                </a:solidFill>
-                <a:latin typeface="Malgun Gothic"/>
-              </a:rPr>
-              <a:t>→</a:t>
-            </a:r>
-          </a:p>
-        </p:txBody>
-      </p:sp>
-      <p:sp>
-        <p:nvSpPr>
-          <p:cNvPr id="15" name="Rounded Rectangle 14"/>
-          <p:cNvSpPr/>
-          <p:nvPr/>
-        </p:nvSpPr>
-        <p:spPr>
-          <a:xfrm>
-            <a:off x="3566160" y="2697480"/>
-            <a:ext cx="2560320" cy="914400"/>
-          </a:xfrm>
-          <a:prstGeom prst="roundRect">
-            <a:avLst>
-              <a:gd name="adj" fmla="val 8000"/>
-            </a:avLst>
-          </a:prstGeom>
-          <a:solidFill>
-            <a:srgbClr val="FFFFFF"/>
-          </a:solidFill>
-          <a:ln w="19050">
-            <a:solidFill>
-              <a:srgbClr val="0E7490"/>
-            </a:solidFill>
-          </a:ln>
-        </p:spPr>
-        <p:style>
-          <a:lnRef idx="1">
-            <a:schemeClr val="accent1"/>
-          </a:lnRef>
-          <a:fillRef idx="3">
-            <a:schemeClr val="accent1"/>
-          </a:fillRef>
-          <a:effectRef idx="2">
-            <a:schemeClr val="accent1"/>
-          </a:effectRef>
-          <a:fontRef idx="minor">
-            <a:schemeClr val="lt1"/>
-          </a:fontRef>
-        </p:style>
-        <p:txBody>
-          <a:bodyPr rtlCol="0" anchor="ctr" wrap="square"/>
-          <a:lstStyle/>
-          <a:p>
-            <a:pPr algn="ctr"/>
-            <a:r>
-              <a:rPr sz="1300" b="1">
-                <a:solidFill>
-                  <a:srgbClr val="0E7490"/>
-                </a:solidFill>
-                <a:latin typeface="Malgun Gothic"/>
-              </a:rPr>
-              <a:t>매니저 앱</a:t>
-            </a:r>
-          </a:p>
-        </p:txBody>
-      </p:sp>
-      <p:sp>
-        <p:nvSpPr>
-          <p:cNvPr id="16" name="TextBox 15"/>
-          <p:cNvSpPr txBox="1"/>
-          <p:nvPr/>
-        </p:nvSpPr>
-        <p:spPr>
-          <a:xfrm>
-            <a:off x="6217920" y="2971800"/>
-            <a:ext cx="365760" cy="365760"/>
-          </a:xfrm>
-          <a:prstGeom prst="rect">
-            <a:avLst/>
-          </a:prstGeom>
-          <a:noFill/>
-        </p:spPr>
-        <p:txBody>
-          <a:bodyPr wrap="square">
-            <a:spAutoFit/>
-          </a:bodyPr>
-          <a:lstStyle/>
-          <a:p>
-            <a:pPr algn="ctr"/>
-            <a:r>
-              <a:rPr sz="2000" b="1">
-                <a:solidFill>
-                  <a:srgbClr val="64748B"/>
-                </a:solidFill>
-                <a:latin typeface="Malgun Gothic"/>
-              </a:rPr>
-              <a:t>→</a:t>
-            </a:r>
-          </a:p>
-        </p:txBody>
-      </p:sp>
-      <p:sp>
-        <p:nvSpPr>
-          <p:cNvPr id="17" name="Rounded Rectangle 16"/>
-          <p:cNvSpPr/>
-          <p:nvPr/>
-        </p:nvSpPr>
-        <p:spPr>
-          <a:xfrm>
-            <a:off x="6583680" y="2697480"/>
-            <a:ext cx="2560320" cy="914400"/>
-          </a:xfrm>
-          <a:prstGeom prst="roundRect">
-            <a:avLst>
-              <a:gd name="adj" fmla="val 8000"/>
-            </a:avLst>
-          </a:prstGeom>
-          <a:solidFill>
-            <a:srgbClr val="FFFFFF"/>
-          </a:solidFill>
-          <a:ln w="19050">
-            <a:solidFill>
-              <a:srgbClr val="0E7490"/>
-            </a:solidFill>
-          </a:ln>
-        </p:spPr>
-        <p:style>
-          <a:lnRef idx="1">
-            <a:schemeClr val="accent1"/>
-          </a:lnRef>
-          <a:fillRef idx="3">
-            <a:schemeClr val="accent1"/>
-          </a:fillRef>
-          <a:effectRef idx="2">
-            <a:schemeClr val="accent1"/>
-          </a:effectRef>
-          <a:fontRef idx="minor">
-            <a:schemeClr val="lt1"/>
-          </a:fontRef>
-        </p:style>
-        <p:txBody>
-          <a:bodyPr rtlCol="0" anchor="ctr" wrap="square"/>
-          <a:lstStyle/>
-          <a:p>
-            <a:pPr algn="ctr"/>
-            <a:r>
-              <a:rPr sz="1300" b="1">
-                <a:solidFill>
-                  <a:srgbClr val="0E7490"/>
-                </a:solidFill>
-                <a:latin typeface="Malgun Gothic"/>
-              </a:rPr>
-              <a:t>/manager/*</a:t>
-            </a:r>
-          </a:p>
-        </p:txBody>
-      </p:sp>
-      <p:sp>
-        <p:nvSpPr>
-          <p:cNvPr id="18" name="Rounded Rectangle 17"/>
-          <p:cNvSpPr/>
-          <p:nvPr/>
-        </p:nvSpPr>
-        <p:spPr>
-          <a:xfrm>
-            <a:off x="548640" y="3931920"/>
-            <a:ext cx="2560320" cy="914400"/>
-          </a:xfrm>
-          <a:prstGeom prst="roundRect">
-            <a:avLst>
-              <a:gd name="adj" fmla="val 10000"/>
-            </a:avLst>
-          </a:prstGeom>
-          <a:solidFill>
-            <a:srgbClr val="7C2D12"/>
-          </a:solidFill>
-          <a:ln>
-            <a:noFill/>
-          </a:ln>
-        </p:spPr>
-        <p:style>
-          <a:lnRef idx="1">
-            <a:schemeClr val="accent1"/>
-          </a:lnRef>
-          <a:fillRef idx="3">
-            <a:schemeClr val="accent1"/>
-          </a:fillRef>
-          <a:effectRef idx="2">
-            <a:schemeClr val="accent1"/>
-          </a:effectRef>
-          <a:fontRef idx="minor">
-            <a:schemeClr val="lt1"/>
-          </a:fontRef>
-        </p:style>
-        <p:txBody>
-          <a:bodyPr rtlCol="0" anchor="ctr" wrap="square"/>
-          <a:lstStyle/>
-          <a:p>
-            <a:pPr algn="ctr"/>
-            <a:r>
-              <a:rPr sz="1600" b="1">
-                <a:solidFill>
-                  <a:srgbClr val="FFFFFF"/>
-                </a:solidFill>
-                <a:latin typeface="Malgun Gothic"/>
-              </a:rPr>
-              <a:t>본사 관리자</a:t>
-            </a:r>
-          </a:p>
-        </p:txBody>
-      </p:sp>
-      <p:sp>
-        <p:nvSpPr>
-          <p:cNvPr id="19" name="TextBox 18"/>
-          <p:cNvSpPr txBox="1"/>
-          <p:nvPr/>
-        </p:nvSpPr>
-        <p:spPr>
-          <a:xfrm>
-            <a:off x="3200400" y="4206240"/>
-            <a:ext cx="365760" cy="365760"/>
-          </a:xfrm>
-          <a:prstGeom prst="rect">
-            <a:avLst/>
-          </a:prstGeom>
-          <a:noFill/>
-        </p:spPr>
-        <p:txBody>
-          <a:bodyPr wrap="square">
-            <a:spAutoFit/>
-          </a:bodyPr>
-          <a:lstStyle/>
-          <a:p>
-            <a:pPr algn="ctr"/>
-            <a:r>
-              <a:rPr sz="2000" b="1">
-                <a:solidFill>
-                  <a:srgbClr val="64748B"/>
-                </a:solidFill>
-                <a:latin typeface="Malgun Gothic"/>
-              </a:rPr>
-              <a:t>→</a:t>
-            </a:r>
-          </a:p>
-        </p:txBody>
-      </p:sp>
-      <p:sp>
-        <p:nvSpPr>
-          <p:cNvPr id="20" name="Rounded Rectangle 19"/>
-          <p:cNvSpPr/>
-          <p:nvPr/>
-        </p:nvSpPr>
-        <p:spPr>
-          <a:xfrm>
-            <a:off x="3566160" y="3931920"/>
-            <a:ext cx="2560320" cy="914400"/>
-          </a:xfrm>
-          <a:prstGeom prst="roundRect">
-            <a:avLst>
-              <a:gd name="adj" fmla="val 8000"/>
-            </a:avLst>
-          </a:prstGeom>
-          <a:solidFill>
-            <a:srgbClr val="FFFFFF"/>
-          </a:solidFill>
-          <a:ln w="19050">
-            <a:solidFill>
-              <a:srgbClr val="7C2D12"/>
-            </a:solidFill>
-          </a:ln>
-        </p:spPr>
-        <p:style>
-          <a:lnRef idx="1">
-            <a:schemeClr val="accent1"/>
-          </a:lnRef>
-          <a:fillRef idx="3">
-            <a:schemeClr val="accent1"/>
-          </a:fillRef>
-          <a:effectRef idx="2">
-            <a:schemeClr val="accent1"/>
-          </a:effectRef>
-          <a:fontRef idx="minor">
-            <a:schemeClr val="lt1"/>
-          </a:fontRef>
-        </p:style>
-        <p:txBody>
-          <a:bodyPr rtlCol="0" anchor="ctr" wrap="square"/>
-          <a:lstStyle/>
-          <a:p>
-            <a:pPr algn="ctr"/>
-            <a:r>
-              <a:rPr sz="1300" b="1">
-                <a:solidFill>
-                  <a:srgbClr val="7C2D12"/>
-                </a:solidFill>
-                <a:latin typeface="Malgun Gothic"/>
-              </a:rPr>
-              <a:t>웹 브라우저</a:t>
-            </a:r>
-          </a:p>
-        </p:txBody>
-      </p:sp>
-      <p:sp>
-        <p:nvSpPr>
-          <p:cNvPr id="21" name="TextBox 20"/>
-          <p:cNvSpPr txBox="1"/>
-          <p:nvPr/>
-        </p:nvSpPr>
-        <p:spPr>
-          <a:xfrm>
-            <a:off x="6217920" y="4206240"/>
-            <a:ext cx="365760" cy="365760"/>
-          </a:xfrm>
-          <a:prstGeom prst="rect">
-            <a:avLst/>
-          </a:prstGeom>
-          <a:noFill/>
-        </p:spPr>
-        <p:txBody>
-          <a:bodyPr wrap="square">
-            <a:spAutoFit/>
-          </a:bodyPr>
-          <a:lstStyle/>
-          <a:p>
-            <a:pPr algn="ctr"/>
-            <a:r>
-              <a:rPr sz="2000" b="1">
-                <a:solidFill>
-                  <a:srgbClr val="64748B"/>
-                </a:solidFill>
-                <a:latin typeface="Malgun Gothic"/>
-              </a:rPr>
-              <a:t>→</a:t>
-            </a:r>
-          </a:p>
-        </p:txBody>
-      </p:sp>
-      <p:sp>
-        <p:nvSpPr>
-          <p:cNvPr id="22" name="Rounded Rectangle 21"/>
-          <p:cNvSpPr/>
-          <p:nvPr/>
-        </p:nvSpPr>
-        <p:spPr>
-          <a:xfrm>
-            <a:off x="6583680" y="3931920"/>
-            <a:ext cx="2560320" cy="914400"/>
-          </a:xfrm>
-          <a:prstGeom prst="roundRect">
-            <a:avLst>
-              <a:gd name="adj" fmla="val 8000"/>
-            </a:avLst>
-          </a:prstGeom>
-          <a:solidFill>
-            <a:srgbClr val="FFFFFF"/>
-          </a:solidFill>
-          <a:ln w="19050">
-            <a:solidFill>
-              <a:srgbClr val="7C2D12"/>
-            </a:solidFill>
-          </a:ln>
-        </p:spPr>
-        <p:style>
-          <a:lnRef idx="1">
-            <a:schemeClr val="accent1"/>
-          </a:lnRef>
-          <a:fillRef idx="3">
-            <a:schemeClr val="accent1"/>
-          </a:fillRef>
-          <a:effectRef idx="2">
-            <a:schemeClr val="accent1"/>
-          </a:effectRef>
-          <a:fontRef idx="minor">
-            <a:schemeClr val="lt1"/>
-          </a:fontRef>
-        </p:style>
-        <p:txBody>
-          <a:bodyPr rtlCol="0" anchor="ctr" wrap="square"/>
-          <a:lstStyle/>
-          <a:p>
-            <a:pPr algn="ctr"/>
-            <a:r>
-              <a:rPr sz="1300" b="1">
-                <a:solidFill>
-                  <a:srgbClr val="7C2D12"/>
-                </a:solidFill>
-                <a:latin typeface="Malgun Gothic"/>
-              </a:rPr>
-              <a:t>/admin/*</a:t>
-            </a:r>
-          </a:p>
-        </p:txBody>
-      </p:sp>
-      <p:sp>
-        <p:nvSpPr>
-          <p:cNvPr id="23" name="Rounded Rectangle 22"/>
-          <p:cNvSpPr/>
-          <p:nvPr/>
-        </p:nvSpPr>
-        <p:spPr>
-          <a:xfrm>
-            <a:off x="9509760" y="1463040"/>
-            <a:ext cx="2286000" cy="3566160"/>
-          </a:xfrm>
-          <a:prstGeom prst="roundRect">
-            <a:avLst>
-              <a:gd name="adj" fmla="val 10000"/>
-            </a:avLst>
-          </a:prstGeom>
-          <a:solidFill>
-            <a:srgbClr val="0F766E"/>
-          </a:solidFill>
-          <a:ln>
-            <a:noFill/>
-          </a:ln>
-        </p:spPr>
-        <p:style>
-          <a:lnRef idx="1">
-            <a:schemeClr val="accent1"/>
-          </a:lnRef>
-          <a:fillRef idx="3">
-            <a:schemeClr val="accent1"/>
-          </a:fillRef>
-          <a:effectRef idx="2">
-            <a:schemeClr val="accent1"/>
-          </a:effectRef>
-          <a:fontRef idx="minor">
-            <a:schemeClr val="lt1"/>
-          </a:fontRef>
-        </p:style>
-        <p:txBody>
-          <a:bodyPr rtlCol="0" anchor="ctr" wrap="square"/>
-          <a:lstStyle/>
-          <a:p>
-            <a:pPr algn="ctr"/>
-            <a:r>
-              <a:rPr sz="1800" b="1">
-                <a:solidFill>
-                  <a:srgbClr val="FFFFFF"/>
-                </a:solidFill>
-                <a:latin typeface="Malgun Gothic"/>
-              </a:rPr>
-              <a:t>Replit
-서버 1대</a:t>
-            </a:r>
-          </a:p>
-          <a:p>
-            <a:pPr algn="ctr"/>
-            <a:r>
-              <a:rPr sz="1200" b="0">
-                <a:solidFill>
-                  <a:srgbClr val="E2E8F0"/>
-                </a:solidFill>
-                <a:latin typeface="Malgun Gothic"/>
-              </a:rPr>
-              <a:t>Express + React</a:t>
-            </a:r>
-          </a:p>
-        </p:txBody>
-      </p:sp>
-      <p:sp>
-        <p:nvSpPr>
-          <p:cNvPr id="24" name="TextBox 23"/>
-          <p:cNvSpPr txBox="1"/>
-          <p:nvPr/>
-        </p:nvSpPr>
-        <p:spPr>
-          <a:xfrm>
-            <a:off x="9144000" y="3017520"/>
-            <a:ext cx="365760" cy="365760"/>
-          </a:xfrm>
-          <a:prstGeom prst="rect">
-            <a:avLst/>
-          </a:prstGeom>
-          <a:noFill/>
-        </p:spPr>
-        <p:txBody>
-          <a:bodyPr wrap="square">
-            <a:spAutoFit/>
-          </a:bodyPr>
-          <a:lstStyle/>
-          <a:p>
-            <a:pPr algn="ctr"/>
-            <a:r>
-              <a:rPr sz="2000" b="1">
-                <a:solidFill>
-                  <a:srgbClr val="64748B"/>
-                </a:solidFill>
-                <a:latin typeface="Malgun Gothic"/>
-              </a:rPr>
-              <a:t>→</a:t>
-            </a:r>
-          </a:p>
-        </p:txBody>
-      </p:sp>
-      <p:sp>
-        <p:nvSpPr>
-          <p:cNvPr id="25" name="TextBox 24"/>
-          <p:cNvSpPr txBox="1"/>
-          <p:nvPr/>
-        </p:nvSpPr>
-        <p:spPr>
-          <a:xfrm>
-            <a:off x="548640" y="5760720"/>
-            <a:ext cx="10972800" cy="548640"/>
-          </a:xfrm>
-          <a:prstGeom prst="rect">
-            <a:avLst/>
-          </a:prstGeom>
-          <a:noFill/>
-        </p:spPr>
-        <p:txBody>
-          <a:bodyPr wrap="square">
-            <a:spAutoFit/>
-          </a:bodyPr>
-          <a:lstStyle/>
-          <a:p>
-            <a:pPr algn="l"/>
-            <a:r>
-              <a:rPr sz="1400" b="0">
-                <a:solidFill>
-                  <a:srgbClr val="64748B"/>
-                </a:solidFill>
-                <a:latin typeface="Malgun Gothic"/>
-              </a:rPr>
-              <a:t>세 경로 모두 같은 Replit 서버로 모입니다. 앱은 Capacitor WebView로 ppamong.com을 엽니다.</a:t>
+              <a:t>정회원만 쇼핑몰 주문 가능 — 게스트·비로그인은 열람·장바구니만</a:t>
             </a:r>
           </a:p>
         </p:txBody>
@@ -5428,13 +5296,13 @@
         <p:spPr>
           <a:xfrm>
             <a:off x="0" y="0"/>
-            <a:ext cx="12191695" cy="109728"/>
+            <a:ext cx="12191695" cy="960120"/>
           </a:xfrm>
           <a:prstGeom prst="rect">
             <a:avLst/>
           </a:prstGeom>
           <a:solidFill>
-            <a:srgbClr val="1D4ED8"/>
+            <a:srgbClr val="0F172A"/>
           </a:solidFill>
           <a:ln>
             <a:noFill/>
@@ -5470,8 +5338,8 @@
         </p:nvSpPr>
         <p:spPr>
           <a:xfrm>
-            <a:off x="457200" y="274320"/>
-            <a:ext cx="10972800" cy="457200"/>
+            <a:off x="502920" y="201168"/>
+            <a:ext cx="10972800" cy="640080"/>
           </a:xfrm>
           <a:prstGeom prst="rect">
             <a:avLst/>
@@ -5479,434 +5347,427 @@
           <a:noFill/>
         </p:spPr>
         <p:txBody>
+          <a:bodyPr wrap="none">
+            <a:spAutoFit/>
+          </a:bodyPr>
+          <a:lstStyle/>
+          <a:p>
+            <a:r>
+              <a:rPr sz="2800" b="1">
+                <a:solidFill>
+                  <a:srgbClr val="FFFFFF"/>
+                </a:solidFill>
+                <a:latin typeface="Malgun Gothic"/>
+              </a:rPr>
+              <a:t>3. 서버 · API 계층</a:t>
+            </a:r>
+          </a:p>
+        </p:txBody>
+      </p:sp>
+      <p:sp>
+        <p:nvSpPr>
+          <p:cNvPr id="4" name="TextBox 3"/>
+          <p:cNvSpPr txBox="1"/>
+          <p:nvPr/>
+        </p:nvSpPr>
+        <p:spPr>
+          <a:xfrm>
+            <a:off x="502920" y="1051560"/>
+            <a:ext cx="10972800" cy="457200"/>
+          </a:xfrm>
+          <a:prstGeom prst="rect">
+            <a:avLst/>
+          </a:prstGeom>
+          <a:noFill/>
+        </p:spPr>
+        <p:txBody>
+          <a:bodyPr wrap="none">
+            <a:spAutoFit/>
+          </a:bodyPr>
+          <a:lstStyle/>
+          <a:p>
+            <a:r>
+              <a:rPr sz="1400" b="0">
+                <a:solidFill>
+                  <a:srgbClr val="64748B"/>
+                </a:solidFill>
+                <a:latin typeface="Malgun Gothic"/>
+              </a:rPr>
+              <a:t>Express 단일 프로세스 · UserRoutes 모듈화</a:t>
+            </a:r>
+          </a:p>
+        </p:txBody>
+      </p:sp>
+      <p:sp>
+        <p:nvSpPr>
+          <p:cNvPr id="5" name="Rounded Rectangle 4"/>
+          <p:cNvSpPr/>
+          <p:nvPr/>
+        </p:nvSpPr>
+        <p:spPr>
+          <a:xfrm>
+            <a:off x="502920" y="1371600"/>
+            <a:ext cx="2686050" cy="1234440"/>
+          </a:xfrm>
+          <a:prstGeom prst="roundRect">
+            <a:avLst/>
+          </a:prstGeom>
+          <a:solidFill>
+            <a:srgbClr val="1E40AF"/>
+          </a:solidFill>
+          <a:ln>
+            <a:solidFill>
+              <a:srgbClr val="1E40AF"/>
+            </a:solidFill>
+          </a:ln>
+        </p:spPr>
+        <p:style>
+          <a:lnRef idx="1">
+            <a:schemeClr val="accent1"/>
+          </a:lnRef>
+          <a:fillRef idx="3">
+            <a:schemeClr val="accent1"/>
+          </a:fillRef>
+          <a:effectRef idx="2">
+            <a:schemeClr val="accent1"/>
+          </a:effectRef>
+          <a:fontRef idx="minor">
+            <a:schemeClr val="lt1"/>
+          </a:fontRef>
+        </p:style>
+        <p:txBody>
+          <a:bodyPr rtlCol="0" anchor="ctr"/>
+          <a:lstStyle/>
+          <a:p>
+            <a:pPr algn="ctr"/>
+            <a:r>
+              <a:rPr sz="1300" b="1">
+                <a:solidFill>
+                  <a:srgbClr val="FFFFFF"/>
+                </a:solidFill>
+                <a:latin typeface="Malgun Gothic"/>
+              </a:rPr>
+              <a:t>게임 API</a:t>
+            </a:r>
+          </a:p>
+          <a:p>
+            <a:pPr algn="ctr"/>
+            <a:r>
+              <a:rPr sz="1000" b="0">
+                <a:solidFill>
+                  <a:srgbClr val="FFFFFF"/>
+                </a:solidFill>
+                <a:latin typeface="Malgun Gothic"/>
+              </a:rPr>
+              <a:t>/api/matches
+/api/predictions</a:t>
+            </a:r>
+          </a:p>
+        </p:txBody>
+      </p:sp>
+      <p:sp>
+        <p:nvSpPr>
+          <p:cNvPr id="6" name="Rounded Rectangle 5"/>
+          <p:cNvSpPr/>
+          <p:nvPr/>
+        </p:nvSpPr>
+        <p:spPr>
+          <a:xfrm>
+            <a:off x="3326130" y="1371600"/>
+            <a:ext cx="2686050" cy="1234440"/>
+          </a:xfrm>
+          <a:prstGeom prst="roundRect">
+            <a:avLst/>
+          </a:prstGeom>
+          <a:solidFill>
+            <a:srgbClr val="B45309"/>
+          </a:solidFill>
+          <a:ln>
+            <a:solidFill>
+              <a:srgbClr val="B45309"/>
+            </a:solidFill>
+          </a:ln>
+        </p:spPr>
+        <p:style>
+          <a:lnRef idx="1">
+            <a:schemeClr val="accent1"/>
+          </a:lnRef>
+          <a:fillRef idx="3">
+            <a:schemeClr val="accent1"/>
+          </a:fillRef>
+          <a:effectRef idx="2">
+            <a:schemeClr val="accent1"/>
+          </a:effectRef>
+          <a:fontRef idx="minor">
+            <a:schemeClr val="lt1"/>
+          </a:fontRef>
+        </p:style>
+        <p:txBody>
+          <a:bodyPr rtlCol="0" anchor="ctr"/>
+          <a:lstStyle/>
+          <a:p>
+            <a:pPr algn="ctr"/>
+            <a:r>
+              <a:rPr sz="1300" b="1">
+                <a:solidFill>
+                  <a:srgbClr val="FFFFFF"/>
+                </a:solidFill>
+                <a:latin typeface="Malgun Gothic"/>
+              </a:rPr>
+              <a:t>쇼핑몰 API</a:t>
+            </a:r>
+          </a:p>
+          <a:p>
+            <a:pPr algn="ctr"/>
+            <a:r>
+              <a:rPr sz="1000" b="0">
+                <a:solidFill>
+                  <a:srgbClr val="FFFFFF"/>
+                </a:solidFill>
+                <a:latin typeface="Malgun Gothic"/>
+              </a:rPr>
+              <a:t>/api/mall/*
+상품·주문·문의</a:t>
+            </a:r>
+          </a:p>
+        </p:txBody>
+      </p:sp>
+      <p:sp>
+        <p:nvSpPr>
+          <p:cNvPr id="7" name="Rounded Rectangle 6"/>
+          <p:cNvSpPr/>
+          <p:nvPr/>
+        </p:nvSpPr>
+        <p:spPr>
+          <a:xfrm>
+            <a:off x="6149340" y="1371600"/>
+            <a:ext cx="2686050" cy="1234440"/>
+          </a:xfrm>
+          <a:prstGeom prst="roundRect">
+            <a:avLst/>
+          </a:prstGeom>
+          <a:solidFill>
+            <a:srgbClr val="E11936"/>
+          </a:solidFill>
+          <a:ln>
+            <a:solidFill>
+              <a:srgbClr val="E11936"/>
+            </a:solidFill>
+          </a:ln>
+        </p:spPr>
+        <p:style>
+          <a:lnRef idx="1">
+            <a:schemeClr val="accent1"/>
+          </a:lnRef>
+          <a:fillRef idx="3">
+            <a:schemeClr val="accent1"/>
+          </a:fillRef>
+          <a:effectRef idx="2">
+            <a:schemeClr val="accent1"/>
+          </a:effectRef>
+          <a:fontRef idx="minor">
+            <a:schemeClr val="lt1"/>
+          </a:fontRef>
+        </p:style>
+        <p:txBody>
+          <a:bodyPr rtlCol="0" anchor="ctr"/>
+          <a:lstStyle/>
+          <a:p>
+            <a:pPr algn="ctr"/>
+            <a:r>
+              <a:rPr sz="1300" b="1">
+                <a:solidFill>
+                  <a:srgbClr val="FFFFFF"/>
+                </a:solidFill>
+                <a:latin typeface="Malgun Gothic"/>
+              </a:rPr>
+              <a:t>관리자 API</a:t>
+            </a:r>
+          </a:p>
+          <a:p>
+            <a:pPr algn="ctr"/>
+            <a:r>
+              <a:rPr sz="1000" b="0">
+                <a:solidFill>
+                  <a:srgbClr val="FFFFFF"/>
+                </a:solidFill>
+                <a:latin typeface="Malgun Gothic"/>
+              </a:rPr>
+              <a:t>/api/admin/*
+몰·회원·경기</a:t>
+            </a:r>
+          </a:p>
+        </p:txBody>
+      </p:sp>
+      <p:sp>
+        <p:nvSpPr>
+          <p:cNvPr id="8" name="Rounded Rectangle 7"/>
+          <p:cNvSpPr/>
+          <p:nvPr/>
+        </p:nvSpPr>
+        <p:spPr>
+          <a:xfrm>
+            <a:off x="8972550" y="1371600"/>
+            <a:ext cx="2686050" cy="1234440"/>
+          </a:xfrm>
+          <a:prstGeom prst="roundRect">
+            <a:avLst/>
+          </a:prstGeom>
+          <a:solidFill>
+            <a:srgbClr val="0F766E"/>
+          </a:solidFill>
+          <a:ln>
+            <a:solidFill>
+              <a:srgbClr val="0F766E"/>
+            </a:solidFill>
+          </a:ln>
+        </p:spPr>
+        <p:style>
+          <a:lnRef idx="1">
+            <a:schemeClr val="accent1"/>
+          </a:lnRef>
+          <a:fillRef idx="3">
+            <a:schemeClr val="accent1"/>
+          </a:fillRef>
+          <a:effectRef idx="2">
+            <a:schemeClr val="accent1"/>
+          </a:effectRef>
+          <a:fontRef idx="minor">
+            <a:schemeClr val="lt1"/>
+          </a:fontRef>
+        </p:style>
+        <p:txBody>
+          <a:bodyPr rtlCol="0" anchor="ctr"/>
+          <a:lstStyle/>
+          <a:p>
+            <a:pPr algn="ctr"/>
+            <a:r>
+              <a:rPr sz="1300" b="1">
+                <a:solidFill>
+                  <a:srgbClr val="FFFFFF"/>
+                </a:solidFill>
+                <a:latin typeface="Malgun Gothic"/>
+              </a:rPr>
+              <a:t>공통</a:t>
+            </a:r>
+          </a:p>
+          <a:p>
+            <a:pPr algn="ctr"/>
+            <a:r>
+              <a:rPr sz="1000" b="0">
+                <a:solidFill>
+                  <a:srgbClr val="FFFFFF"/>
+                </a:solidFill>
+                <a:latin typeface="Malgun Gothic"/>
+              </a:rPr>
+              <a:t>WebSocket
+Redis 세션</a:t>
+            </a:r>
+          </a:p>
+        </p:txBody>
+      </p:sp>
+      <p:sp>
+        <p:nvSpPr>
+          <p:cNvPr id="9" name="TextBox 8"/>
+          <p:cNvSpPr txBox="1"/>
+          <p:nvPr/>
+        </p:nvSpPr>
+        <p:spPr>
+          <a:xfrm>
+            <a:off x="502920" y="2926080"/>
+            <a:ext cx="11155680" cy="347472"/>
+          </a:xfrm>
+          <a:prstGeom prst="rect">
+            <a:avLst/>
+          </a:prstGeom>
+          <a:noFill/>
+        </p:spPr>
+        <p:txBody>
           <a:bodyPr wrap="square">
             <a:spAutoFit/>
           </a:bodyPr>
           <a:lstStyle/>
           <a:p>
-            <a:pPr algn="l"/>
-            <a:r>
-              <a:rPr sz="2800" b="1">
+            <a:r>
+              <a:rPr sz="1300" b="0">
                 <a:solidFill>
                   <a:srgbClr val="0F172A"/>
                 </a:solidFill>
                 <a:latin typeface="Malgun Gothic"/>
               </a:rPr>
-              <a:t>3. 계층 요약</a:t>
-            </a:r>
-          </a:p>
-        </p:txBody>
-      </p:sp>
-      <p:graphicFrame>
-        <p:nvGraphicFramePr>
-          <p:cNvPr id="4" name="Table 3"/>
-          <p:cNvGraphicFramePr>
-            <a:graphicFrameLocks noGrp="1"/>
-          </p:cNvGraphicFramePr>
+              <a:t>• 빌드: npm run build → Vite(React) + esbuild(server) · 실행: npm run start (PORT 5000)</a:t>
+            </a:r>
+          </a:p>
+        </p:txBody>
+      </p:sp>
+      <p:sp>
+        <p:nvSpPr>
+          <p:cNvPr id="10" name="TextBox 9"/>
+          <p:cNvSpPr txBox="1"/>
           <p:nvPr/>
-        </p:nvGraphicFramePr>
-        <p:xfrm>
-          <a:off x="1371600" y="1097280"/>
-          <a:ext cx="9418320" cy="3511296"/>
-        </p:xfrm>
-        <a:graphic>
-          <a:graphicData uri="http://schemas.openxmlformats.org/drawingml/2006/table">
-            <a:tbl>
-              <a:tblPr firstRow="1" bandRow="1">
-                <a:tableStyleId>{5C22544A-7EE6-4342-B048-85BDC9FD1C3A}</a:tableStyleId>
-              </a:tblPr>
-              <a:tblGrid>
-                <a:gridCol w="2286000"/>
-                <a:gridCol w="7132320"/>
-              </a:tblGrid>
-              <a:tr h="438912">
-                <a:tc>
-                  <a:txBody>
-                    <a:bodyPr/>
-                    <a:lstStyle/>
-                    <a:p>
-                      <a:pPr algn="l"/>
-                      <a:r>
-                        <a:rPr sz="1300" b="1">
-                          <a:solidFill>
-                            <a:srgbClr val="FFFFFF"/>
-                          </a:solidFill>
-                          <a:latin typeface="Malgun Gothic"/>
-                        </a:rPr>
-                        <a:t>계층</a:t>
-                      </a:r>
-                    </a:p>
-                  </a:txBody>
-                  <a:tcPr>
-                    <a:solidFill>
-                      <a:srgbClr val="1D4ED8"/>
-                    </a:solidFill>
-                  </a:tcPr>
-                </a:tc>
-                <a:tc>
-                  <a:txBody>
-                    <a:bodyPr/>
-                    <a:lstStyle/>
-                    <a:p>
-                      <a:pPr algn="l"/>
-                      <a:r>
-                        <a:rPr sz="1300" b="1">
-                          <a:solidFill>
-                            <a:srgbClr val="FFFFFF"/>
-                          </a:solidFill>
-                          <a:latin typeface="Malgun Gothic"/>
-                        </a:rPr>
-                        <a:t>내용</a:t>
-                      </a:r>
-                    </a:p>
-                  </a:txBody>
-                  <a:tcPr>
-                    <a:solidFill>
-                      <a:srgbClr val="1D4ED8"/>
-                    </a:solidFill>
-                  </a:tcPr>
-                </a:tc>
-              </a:tr>
-              <a:tr h="438912">
-                <a:tc>
-                  <a:txBody>
-                    <a:bodyPr/>
-                    <a:lstStyle/>
-                    <a:p>
-                      <a:pPr algn="l"/>
-                      <a:r>
-                        <a:rPr sz="1200" b="0">
-                          <a:solidFill>
-                            <a:srgbClr val="0F172A"/>
-                          </a:solidFill>
-                          <a:latin typeface="Malgun Gothic"/>
-                        </a:rPr>
-                        <a:t>클라이언트</a:t>
-                      </a:r>
-                    </a:p>
-                  </a:txBody>
-                  <a:tcPr>
-                    <a:solidFill>
-                      <a:srgbClr val="FFFFFF"/>
-                    </a:solidFill>
-                  </a:tcPr>
-                </a:tc>
-                <a:tc>
-                  <a:txBody>
-                    <a:bodyPr/>
-                    <a:lstStyle/>
-                    <a:p>
-                      <a:pPr algn="l"/>
-                      <a:r>
-                        <a:rPr sz="1200" b="0">
-                          <a:solidFill>
-                            <a:srgbClr val="0F172A"/>
-                          </a:solidFill>
-                          <a:latin typeface="Malgun Gothic"/>
-                        </a:rPr>
-                        <a:t>사용자 앱 · 매니저 앱 · 관리자 웹 (3종)</a:t>
-                      </a:r>
-                    </a:p>
-                  </a:txBody>
-                  <a:tcPr>
-                    <a:solidFill>
-                      <a:srgbClr val="FFFFFF"/>
-                    </a:solidFill>
-                  </a:tcPr>
-                </a:tc>
-              </a:tr>
-              <a:tr h="438912">
-                <a:tc>
-                  <a:txBody>
-                    <a:bodyPr/>
-                    <a:lstStyle/>
-                    <a:p>
-                      <a:pPr algn="l"/>
-                      <a:r>
-                        <a:rPr sz="1200" b="0">
-                          <a:solidFill>
-                            <a:srgbClr val="0F172A"/>
-                          </a:solidFill>
-                          <a:latin typeface="Malgun Gothic"/>
-                        </a:rPr>
-                        <a:t>호스팅</a:t>
-                      </a:r>
-                    </a:p>
-                  </a:txBody>
-                  <a:tcPr>
-                    <a:solidFill>
-                      <a:srgbClr val="F8FAFC"/>
-                    </a:solidFill>
-                  </a:tcPr>
-                </a:tc>
-                <a:tc>
-                  <a:txBody>
-                    <a:bodyPr/>
-                    <a:lstStyle/>
-                    <a:p>
-                      <a:pPr algn="l"/>
-                      <a:r>
-                        <a:rPr sz="1200" b="0">
-                          <a:solidFill>
-                            <a:srgbClr val="0F172A"/>
-                          </a:solidFill>
-                          <a:latin typeface="Malgun Gothic"/>
-                        </a:rPr>
-                        <a:t>Replit Autoscale (ppamong.com)</a:t>
-                      </a:r>
-                    </a:p>
-                  </a:txBody>
-                  <a:tcPr>
-                    <a:solidFill>
-                      <a:srgbClr val="F8FAFC"/>
-                    </a:solidFill>
-                  </a:tcPr>
-                </a:tc>
-              </a:tr>
-              <a:tr h="438912">
-                <a:tc>
-                  <a:txBody>
-                    <a:bodyPr/>
-                    <a:lstStyle/>
-                    <a:p>
-                      <a:pPr algn="l"/>
-                      <a:r>
-                        <a:rPr sz="1200" b="0">
-                          <a:solidFill>
-                            <a:srgbClr val="0F172A"/>
-                          </a:solidFill>
-                          <a:latin typeface="Malgun Gothic"/>
-                        </a:rPr>
-                        <a:t>서버</a:t>
-                      </a:r>
-                    </a:p>
-                  </a:txBody>
-                  <a:tcPr>
-                    <a:solidFill>
-                      <a:srgbClr val="FFFFFF"/>
-                    </a:solidFill>
-                  </a:tcPr>
-                </a:tc>
-                <a:tc>
-                  <a:txBody>
-                    <a:bodyPr/>
-                    <a:lstStyle/>
-                    <a:p>
-                      <a:pPr algn="l"/>
-                      <a:r>
-                        <a:rPr sz="1200" b="0">
-                          <a:solidFill>
-                            <a:srgbClr val="0F172A"/>
-                          </a:solidFill>
-                          <a:latin typeface="Malgun Gothic"/>
-                        </a:rPr>
-                        <a:t>Node.js 20 + Express (server/)</a:t>
-                      </a:r>
-                    </a:p>
-                  </a:txBody>
-                  <a:tcPr>
-                    <a:solidFill>
-                      <a:srgbClr val="FFFFFF"/>
-                    </a:solidFill>
-                  </a:tcPr>
-                </a:tc>
-              </a:tr>
-              <a:tr h="438912">
-                <a:tc>
-                  <a:txBody>
-                    <a:bodyPr/>
-                    <a:lstStyle/>
-                    <a:p>
-                      <a:pPr algn="l"/>
-                      <a:r>
-                        <a:rPr sz="1200" b="0">
-                          <a:solidFill>
-                            <a:srgbClr val="0F172A"/>
-                          </a:solidFill>
-                          <a:latin typeface="Malgun Gothic"/>
-                        </a:rPr>
-                        <a:t>UI</a:t>
-                      </a:r>
-                    </a:p>
-                  </a:txBody>
-                  <a:tcPr>
-                    <a:solidFill>
-                      <a:srgbClr val="F8FAFC"/>
-                    </a:solidFill>
-                  </a:tcPr>
-                </a:tc>
-                <a:tc>
-                  <a:txBody>
-                    <a:bodyPr/>
-                    <a:lstStyle/>
-                    <a:p>
-                      <a:pPr algn="l"/>
-                      <a:r>
-                        <a:rPr sz="1200" b="0">
-                          <a:solidFill>
-                            <a:srgbClr val="0F172A"/>
-                          </a:solidFill>
-                          <a:latin typeface="Malgun Gothic"/>
-                        </a:rPr>
-                        <a:t>React 3벌 (client/) — URL 경로로 분기</a:t>
-                      </a:r>
-                    </a:p>
-                  </a:txBody>
-                  <a:tcPr>
-                    <a:solidFill>
-                      <a:srgbClr val="F8FAFC"/>
-                    </a:solidFill>
-                  </a:tcPr>
-                </a:tc>
-              </a:tr>
-              <a:tr h="438912">
-                <a:tc>
-                  <a:txBody>
-                    <a:bodyPr/>
-                    <a:lstStyle/>
-                    <a:p>
-                      <a:pPr algn="l"/>
-                      <a:r>
-                        <a:rPr sz="1200" b="0">
-                          <a:solidFill>
-                            <a:srgbClr val="0F172A"/>
-                          </a:solidFill>
-                          <a:latin typeface="Malgun Gothic"/>
-                        </a:rPr>
-                        <a:t>데이터</a:t>
-                      </a:r>
-                    </a:p>
-                  </a:txBody>
-                  <a:tcPr>
-                    <a:solidFill>
-                      <a:srgbClr val="FFFFFF"/>
-                    </a:solidFill>
-                  </a:tcPr>
-                </a:tc>
-                <a:tc>
-                  <a:txBody>
-                    <a:bodyPr/>
-                    <a:lstStyle/>
-                    <a:p>
-                      <a:pPr algn="l"/>
-                      <a:r>
-                        <a:rPr sz="1200" b="0">
-                          <a:solidFill>
-                            <a:srgbClr val="0F172A"/>
-                          </a:solidFill>
-                          <a:latin typeface="Malgun Gothic"/>
-                        </a:rPr>
-                        <a:t>MongoDB Atlas (ppamong) + Redis</a:t>
-                      </a:r>
-                    </a:p>
-                  </a:txBody>
-                  <a:tcPr>
-                    <a:solidFill>
-                      <a:srgbClr val="FFFFFF"/>
-                    </a:solidFill>
-                  </a:tcPr>
-                </a:tc>
-              </a:tr>
-              <a:tr h="438912">
-                <a:tc>
-                  <a:txBody>
-                    <a:bodyPr/>
-                    <a:lstStyle/>
-                    <a:p>
-                      <a:pPr algn="l"/>
-                      <a:r>
-                        <a:rPr sz="1200" b="0">
-                          <a:solidFill>
-                            <a:srgbClr val="0F172A"/>
-                          </a:solidFill>
-                          <a:latin typeface="Malgun Gothic"/>
-                        </a:rPr>
-                        <a:t>DNS</a:t>
-                      </a:r>
-                    </a:p>
-                  </a:txBody>
-                  <a:tcPr>
-                    <a:solidFill>
-                      <a:srgbClr val="F8FAFC"/>
-                    </a:solidFill>
-                  </a:tcPr>
-                </a:tc>
-                <a:tc>
-                  <a:txBody>
-                    <a:bodyPr/>
-                    <a:lstStyle/>
-                    <a:p>
-                      <a:pPr algn="l"/>
-                      <a:r>
-                        <a:rPr sz="1200" b="0">
-                          <a:solidFill>
-                            <a:srgbClr val="0F172A"/>
-                          </a:solidFill>
-                          <a:latin typeface="Malgun Gothic"/>
-                        </a:rPr>
-                        <a:t>가비아 → ppamong.com</a:t>
-                      </a:r>
-                    </a:p>
-                  </a:txBody>
-                  <a:tcPr>
-                    <a:solidFill>
-                      <a:srgbClr val="F8FAFC"/>
-                    </a:solidFill>
-                  </a:tcPr>
-                </a:tc>
-              </a:tr>
-              <a:tr h="438912">
-                <a:tc>
-                  <a:txBody>
-                    <a:bodyPr/>
-                    <a:lstStyle/>
-                    <a:p>
-                      <a:pPr algn="l"/>
-                      <a:r>
-                        <a:rPr sz="1200" b="0">
-                          <a:solidFill>
-                            <a:srgbClr val="0F172A"/>
-                          </a:solidFill>
-                          <a:latin typeface="Malgun Gothic"/>
-                        </a:rPr>
-                        <a:t>인증</a:t>
-                      </a:r>
-                    </a:p>
-                  </a:txBody>
-                  <a:tcPr>
-                    <a:solidFill>
-                      <a:srgbClr val="FFFFFF"/>
-                    </a:solidFill>
-                  </a:tcPr>
-                </a:tc>
-                <a:tc>
-                  <a:txBody>
-                    <a:bodyPr/>
-                    <a:lstStyle/>
-                    <a:p>
-                      <a:pPr algn="l"/>
-                      <a:r>
-                        <a:rPr sz="1200" b="0">
-                          <a:solidFill>
-                            <a:srgbClr val="0F172A"/>
-                          </a:solidFill>
-                          <a:latin typeface="Malgun Gothic"/>
-                        </a:rPr>
-                        <a:t>JWT + OAuth (카카오 · 구글 · 애플)</a:t>
-                      </a:r>
-                    </a:p>
-                  </a:txBody>
-                  <a:tcPr>
-                    <a:solidFill>
-                      <a:srgbClr val="FFFFFF"/>
-                    </a:solidFill>
-                  </a:tcPr>
-                </a:tc>
-              </a:tr>
-            </a:tbl>
-          </a:graphicData>
-        </a:graphic>
-      </p:graphicFrame>
+        </p:nvSpPr>
+        <p:spPr>
+          <a:xfrm>
+            <a:off x="502920" y="3273552"/>
+            <a:ext cx="11155680" cy="347472"/>
+          </a:xfrm>
+          <a:prstGeom prst="rect">
+            <a:avLst/>
+          </a:prstGeom>
+          <a:noFill/>
+        </p:spPr>
+        <p:txBody>
+          <a:bodyPr wrap="square">
+            <a:spAutoFit/>
+          </a:bodyPr>
+          <a:lstStyle/>
+          <a:p>
+            <a:r>
+              <a:rPr sz="1300" b="0">
+                <a:solidFill>
+                  <a:srgbClr val="0F172A"/>
+                </a:solidFill>
+                <a:latin typeface="Malgun Gothic"/>
+              </a:rPr>
+              <a:t>• 정적 파일: dist/public · 업로드: /uploads (로컬) 또는 GCS Object Storage</a:t>
+            </a:r>
+          </a:p>
+        </p:txBody>
+      </p:sp>
+      <p:sp>
+        <p:nvSpPr>
+          <p:cNvPr id="11" name="TextBox 10"/>
+          <p:cNvSpPr txBox="1"/>
+          <p:nvPr/>
+        </p:nvSpPr>
+        <p:spPr>
+          <a:xfrm>
+            <a:off x="502920" y="3621024"/>
+            <a:ext cx="11155680" cy="347472"/>
+          </a:xfrm>
+          <a:prstGeom prst="rect">
+            <a:avLst/>
+          </a:prstGeom>
+          <a:noFill/>
+        </p:spPr>
+        <p:txBody>
+          <a:bodyPr wrap="square">
+            <a:spAutoFit/>
+          </a:bodyPr>
+          <a:lstStyle/>
+          <a:p>
+            <a:r>
+              <a:rPr sz="1300" b="0">
+                <a:solidFill>
+                  <a:srgbClr val="0F172A"/>
+                </a:solidFill>
+                <a:latin typeface="Malgun Gothic"/>
+              </a:rPr>
+              <a:t>• 배포: Replit Autoscale · git fetch &amp;&amp; reset --hard origin/main &amp;&amp; npm run build</a:t>
+            </a:r>
+          </a:p>
+        </p:txBody>
+      </p:sp>
     </p:spTree>
   </p:cSld>
   <p:clrMapOvr>
@@ -5934,13 +5795,13 @@
         <p:spPr>
           <a:xfrm>
             <a:off x="0" y="0"/>
-            <a:ext cx="12191695" cy="109728"/>
+            <a:ext cx="12191695" cy="960120"/>
           </a:xfrm>
           <a:prstGeom prst="rect">
             <a:avLst/>
           </a:prstGeom>
           <a:solidFill>
-            <a:srgbClr val="1D4ED8"/>
+            <a:srgbClr val="0F172A"/>
           </a:solidFill>
           <a:ln>
             <a:noFill/>
@@ -5976,8 +5837,8 @@
         </p:nvSpPr>
         <p:spPr>
           <a:xfrm>
-            <a:off x="457200" y="274320"/>
-            <a:ext cx="10972800" cy="457200"/>
+            <a:off x="502920" y="201168"/>
+            <a:ext cx="10972800" cy="640080"/>
           </a:xfrm>
           <a:prstGeom prst="rect">
             <a:avLst/>
@@ -5985,35 +5846,362 @@
           <a:noFill/>
         </p:spPr>
         <p:txBody>
-          <a:bodyPr wrap="square">
+          <a:bodyPr wrap="none">
             <a:spAutoFit/>
           </a:bodyPr>
           <a:lstStyle/>
           <a:p>
-            <a:pPr algn="l"/>
             <a:r>
               <a:rPr sz="2800" b="1">
                 <a:solidFill>
-                  <a:srgbClr val="0F172A"/>
+                  <a:srgbClr val="FFFFFF"/>
                 </a:solidFill>
                 <a:latin typeface="Malgun Gothic"/>
               </a:rPr>
-              <a:t>4. 역할별 접속</a:t>
+              <a:t>4. 쇼핑몰(/shop) 고객 흐름</a:t>
+            </a:r>
+          </a:p>
+        </p:txBody>
+      </p:sp>
+      <p:sp>
+        <p:nvSpPr>
+          <p:cNvPr id="4" name="TextBox 3"/>
+          <p:cNvSpPr txBox="1"/>
+          <p:nvPr/>
+        </p:nvSpPr>
+        <p:spPr>
+          <a:xfrm>
+            <a:off x="502920" y="1051560"/>
+            <a:ext cx="10972800" cy="457200"/>
+          </a:xfrm>
+          <a:prstGeom prst="rect">
+            <a:avLst/>
+          </a:prstGeom>
+          <a:noFill/>
+        </p:spPr>
+        <p:txBody>
+          <a:bodyPr wrap="none">
+            <a:spAutoFit/>
+          </a:bodyPr>
+          <a:lstStyle/>
+          <a:p>
+            <a:r>
+              <a:rPr sz="1400" b="0">
+                <a:solidFill>
+                  <a:srgbClr val="64748B"/>
+                </a:solidFill>
+                <a:latin typeface="Malgun Gothic"/>
+              </a:rPr>
+              <a:t>굿웨어몰형 UI · 앱 계정과 세션 공유</a:t>
+            </a:r>
+          </a:p>
+        </p:txBody>
+      </p:sp>
+      <p:sp>
+        <p:nvSpPr>
+          <p:cNvPr id="5" name="Rounded Rectangle 4"/>
+          <p:cNvSpPr/>
+          <p:nvPr/>
+        </p:nvSpPr>
+        <p:spPr>
+          <a:xfrm>
+            <a:off x="502920" y="1417320"/>
+            <a:ext cx="2143353" cy="658368"/>
+          </a:xfrm>
+          <a:prstGeom prst="roundRect">
+            <a:avLst/>
+          </a:prstGeom>
+          <a:solidFill>
+            <a:srgbClr val="B45309"/>
+          </a:solidFill>
+          <a:ln>
+            <a:noFill/>
+          </a:ln>
+        </p:spPr>
+        <p:style>
+          <a:lnRef idx="1">
+            <a:schemeClr val="accent1"/>
+          </a:lnRef>
+          <a:fillRef idx="3">
+            <a:schemeClr val="accent1"/>
+          </a:fillRef>
+          <a:effectRef idx="2">
+            <a:schemeClr val="accent1"/>
+          </a:effectRef>
+          <a:fontRef idx="minor">
+            <a:schemeClr val="lt1"/>
+          </a:fontRef>
+        </p:style>
+        <p:txBody>
+          <a:bodyPr rtlCol="0" anchor="ctr"/>
+          <a:lstStyle/>
+          <a:p>
+            <a:pPr algn="ctr"/>
+            <a:r>
+              <a:rPr sz="1100" b="1">
+                <a:solidFill>
+                  <a:srgbClr val="FFFFFF"/>
+                </a:solidFill>
+                <a:latin typeface="Malgun Gothic"/>
+              </a:rPr>
+              <a:t>카테고리·검색</a:t>
+            </a:r>
+          </a:p>
+        </p:txBody>
+      </p:sp>
+      <p:sp>
+        <p:nvSpPr>
+          <p:cNvPr id="6" name="Rounded Rectangle 5"/>
+          <p:cNvSpPr/>
+          <p:nvPr/>
+        </p:nvSpPr>
+        <p:spPr>
+          <a:xfrm>
+            <a:off x="2756001" y="1417320"/>
+            <a:ext cx="2143353" cy="658368"/>
+          </a:xfrm>
+          <a:prstGeom prst="roundRect">
+            <a:avLst/>
+          </a:prstGeom>
+          <a:solidFill>
+            <a:srgbClr val="B45309"/>
+          </a:solidFill>
+          <a:ln>
+            <a:noFill/>
+          </a:ln>
+        </p:spPr>
+        <p:style>
+          <a:lnRef idx="1">
+            <a:schemeClr val="accent1"/>
+          </a:lnRef>
+          <a:fillRef idx="3">
+            <a:schemeClr val="accent1"/>
+          </a:fillRef>
+          <a:effectRef idx="2">
+            <a:schemeClr val="accent1"/>
+          </a:effectRef>
+          <a:fontRef idx="minor">
+            <a:schemeClr val="lt1"/>
+          </a:fontRef>
+        </p:style>
+        <p:txBody>
+          <a:bodyPr rtlCol="0" anchor="ctr"/>
+          <a:lstStyle/>
+          <a:p>
+            <a:pPr algn="ctr"/>
+            <a:r>
+              <a:rPr sz="1100" b="1">
+                <a:solidFill>
+                  <a:srgbClr val="FFFFFF"/>
+                </a:solidFill>
+                <a:latin typeface="Malgun Gothic"/>
+              </a:rPr>
+              <a:t>상품 상세</a:t>
+            </a:r>
+          </a:p>
+        </p:txBody>
+      </p:sp>
+      <p:sp>
+        <p:nvSpPr>
+          <p:cNvPr id="7" name="Rounded Rectangle 6"/>
+          <p:cNvSpPr/>
+          <p:nvPr/>
+        </p:nvSpPr>
+        <p:spPr>
+          <a:xfrm>
+            <a:off x="5009083" y="1417320"/>
+            <a:ext cx="2143353" cy="658368"/>
+          </a:xfrm>
+          <a:prstGeom prst="roundRect">
+            <a:avLst/>
+          </a:prstGeom>
+          <a:solidFill>
+            <a:srgbClr val="B45309"/>
+          </a:solidFill>
+          <a:ln>
+            <a:noFill/>
+          </a:ln>
+        </p:spPr>
+        <p:style>
+          <a:lnRef idx="1">
+            <a:schemeClr val="accent1"/>
+          </a:lnRef>
+          <a:fillRef idx="3">
+            <a:schemeClr val="accent1"/>
+          </a:fillRef>
+          <a:effectRef idx="2">
+            <a:schemeClr val="accent1"/>
+          </a:effectRef>
+          <a:fontRef idx="minor">
+            <a:schemeClr val="lt1"/>
+          </a:fontRef>
+        </p:style>
+        <p:txBody>
+          <a:bodyPr rtlCol="0" anchor="ctr"/>
+          <a:lstStyle/>
+          <a:p>
+            <a:pPr algn="ctr"/>
+            <a:r>
+              <a:rPr sz="1100" b="1">
+                <a:solidFill>
+                  <a:srgbClr val="FFFFFF"/>
+                </a:solidFill>
+                <a:latin typeface="Malgun Gothic"/>
+              </a:rPr>
+              <a:t>장바구니</a:t>
+            </a:r>
+          </a:p>
+        </p:txBody>
+      </p:sp>
+      <p:sp>
+        <p:nvSpPr>
+          <p:cNvPr id="8" name="Rounded Rectangle 7"/>
+          <p:cNvSpPr/>
+          <p:nvPr/>
+        </p:nvSpPr>
+        <p:spPr>
+          <a:xfrm>
+            <a:off x="7262164" y="1417320"/>
+            <a:ext cx="2143353" cy="658368"/>
+          </a:xfrm>
+          <a:prstGeom prst="roundRect">
+            <a:avLst/>
+          </a:prstGeom>
+          <a:solidFill>
+            <a:srgbClr val="E11936"/>
+          </a:solidFill>
+          <a:ln>
+            <a:noFill/>
+          </a:ln>
+        </p:spPr>
+        <p:style>
+          <a:lnRef idx="1">
+            <a:schemeClr val="accent1"/>
+          </a:lnRef>
+          <a:fillRef idx="3">
+            <a:schemeClr val="accent1"/>
+          </a:fillRef>
+          <a:effectRef idx="2">
+            <a:schemeClr val="accent1"/>
+          </a:effectRef>
+          <a:fontRef idx="minor">
+            <a:schemeClr val="lt1"/>
+          </a:fontRef>
+        </p:style>
+        <p:txBody>
+          <a:bodyPr rtlCol="0" anchor="ctr"/>
+          <a:lstStyle/>
+          <a:p>
+            <a:pPr algn="ctr"/>
+            <a:r>
+              <a:rPr sz="1100" b="1">
+                <a:solidFill>
+                  <a:srgbClr val="FFFFFF"/>
+                </a:solidFill>
+                <a:latin typeface="Malgun Gothic"/>
+              </a:rPr>
+              <a:t>주문(정회원)</a:t>
+            </a:r>
+          </a:p>
+        </p:txBody>
+      </p:sp>
+      <p:sp>
+        <p:nvSpPr>
+          <p:cNvPr id="9" name="Rounded Rectangle 8"/>
+          <p:cNvSpPr/>
+          <p:nvPr/>
+        </p:nvSpPr>
+        <p:spPr>
+          <a:xfrm>
+            <a:off x="9515246" y="1417320"/>
+            <a:ext cx="2143353" cy="658368"/>
+          </a:xfrm>
+          <a:prstGeom prst="roundRect">
+            <a:avLst/>
+          </a:prstGeom>
+          <a:solidFill>
+            <a:srgbClr val="1E40AF"/>
+          </a:solidFill>
+          <a:ln>
+            <a:noFill/>
+          </a:ln>
+        </p:spPr>
+        <p:style>
+          <a:lnRef idx="1">
+            <a:schemeClr val="accent1"/>
+          </a:lnRef>
+          <a:fillRef idx="3">
+            <a:schemeClr val="accent1"/>
+          </a:fillRef>
+          <a:effectRef idx="2">
+            <a:schemeClr val="accent1"/>
+          </a:effectRef>
+          <a:fontRef idx="minor">
+            <a:schemeClr val="lt1"/>
+          </a:fontRef>
+        </p:style>
+        <p:txBody>
+          <a:bodyPr rtlCol="0" anchor="ctr"/>
+          <a:lstStyle/>
+          <a:p>
+            <a:pPr algn="ctr"/>
+            <a:r>
+              <a:rPr sz="1100" b="1">
+                <a:solidFill>
+                  <a:srgbClr val="FFFFFF"/>
+                </a:solidFill>
+                <a:latin typeface="Malgun Gothic"/>
+              </a:rPr>
+              <a:t>구매 문의</a:t>
+            </a:r>
+          </a:p>
+        </p:txBody>
+      </p:sp>
+      <p:sp>
+        <p:nvSpPr>
+          <p:cNvPr id="10" name="TextBox 9"/>
+          <p:cNvSpPr txBox="1"/>
+          <p:nvPr/>
+        </p:nvSpPr>
+        <p:spPr>
+          <a:xfrm>
+            <a:off x="5394960" y="2194560"/>
+            <a:ext cx="1371600" cy="274320"/>
+          </a:xfrm>
+          <a:prstGeom prst="rect">
+            <a:avLst/>
+          </a:prstGeom>
+          <a:noFill/>
+        </p:spPr>
+        <p:txBody>
+          <a:bodyPr wrap="none">
+            <a:spAutoFit/>
+          </a:bodyPr>
+          <a:lstStyle/>
+          <a:p>
+            <a:r>
+              <a:rPr sz="1600" b="1">
+                <a:solidFill>
+                  <a:srgbClr val="64748B"/>
+                </a:solidFill>
+                <a:latin typeface="Malgun Gothic"/>
+              </a:rPr>
+              <a:t>▼</a:t>
             </a:r>
           </a:p>
         </p:txBody>
       </p:sp>
       <p:graphicFrame>
         <p:nvGraphicFramePr>
-          <p:cNvPr id="4" name="Table 3"/>
+          <p:cNvPr id="11" name="Table 10"/>
           <p:cNvGraphicFramePr>
             <a:graphicFrameLocks noGrp="1"/>
           </p:cNvGraphicFramePr>
           <p:nvPr/>
         </p:nvGraphicFramePr>
         <p:xfrm>
-          <a:off x="914400" y="1280160"/>
-          <a:ext cx="10332720" cy="1755648"/>
+          <a:off x="502920" y="2331720"/>
+          <a:ext cx="11155680" cy="2715768"/>
         </p:xfrm>
         <a:graphic>
           <a:graphicData uri="http://schemas.openxmlformats.org/drawingml/2006/table">
@@ -6022,31 +6210,29 @@
                 <a:tableStyleId>{5C22544A-7EE6-4342-B048-85BDC9FD1C3A}</a:tableStyleId>
               </a:tblPr>
               <a:tblGrid>
-                <a:gridCol w="2560320"/>
-                <a:gridCol w="3840480"/>
-                <a:gridCol w="3931920"/>
+                <a:gridCol w="2286000"/>
+                <a:gridCol w="8869680"/>
               </a:tblGrid>
-              <a:tr h="438912">
+              <a:tr h="452628">
                 <a:tc>
                   <a:txBody>
                     <a:bodyPr/>
                     <a:lstStyle/>
                     <a:p>
-                      <a:pPr algn="l"/>
                       <a:r>
-                        <a:rPr sz="1300" b="1">
+                        <a:rPr sz="1100" b="1">
                           <a:solidFill>
                             <a:srgbClr val="FFFFFF"/>
                           </a:solidFill>
                           <a:latin typeface="Malgun Gothic"/>
                         </a:rPr>
-                        <a:t>역할</a:t>
+                        <a:t>항목</a:t>
                       </a:r>
                     </a:p>
                   </a:txBody>
                   <a:tcPr>
                     <a:solidFill>
-                      <a:srgbClr val="1D4ED8"/>
+                      <a:srgbClr val="0F172A"/>
                     </a:solidFill>
                   </a:tcPr>
                 </a:tc>
@@ -6055,134 +6241,76 @@
                     <a:bodyPr/>
                     <a:lstStyle/>
                     <a:p>
-                      <a:pPr algn="l"/>
                       <a:r>
-                        <a:rPr sz="1300" b="1">
+                        <a:rPr sz="1100" b="1">
                           <a:solidFill>
                             <a:srgbClr val="FFFFFF"/>
                           </a:solidFill>
                           <a:latin typeface="Malgun Gothic"/>
                         </a:rPr>
-                        <a:t>사용 방식</a:t>
+                        <a:t>정책</a:t>
                       </a:r>
                     </a:p>
                   </a:txBody>
                   <a:tcPr>
                     <a:solidFill>
-                      <a:srgbClr val="1D4ED8"/>
+                      <a:srgbClr val="0F172A"/>
                     </a:solidFill>
                   </a:tcPr>
+                </a:tc>
+              </a:tr>
+              <a:tr h="452628">
+                <a:tc>
+                  <a:txBody>
+                    <a:bodyPr/>
+                    <a:lstStyle/>
+                    <a:p>
+                      <a:r>
+                        <a:rPr sz="1000">
+                          <a:solidFill>
+                            <a:srgbClr val="0F172A"/>
+                          </a:solidFill>
+                          <a:latin typeface="Malgun Gothic"/>
+                        </a:rPr>
+                        <a:t>운영 URL</a:t>
+                      </a:r>
+                    </a:p>
+                  </a:txBody>
+                  <a:tcPr/>
                 </a:tc>
                 <a:tc>
                   <a:txBody>
                     <a:bodyPr/>
                     <a:lstStyle/>
                     <a:p>
-                      <a:pPr algn="l"/>
                       <a:r>
-                        <a:rPr sz="1300" b="1">
+                        <a:rPr sz="1000">
                           <a:solidFill>
-                            <a:srgbClr val="FFFFFF"/>
+                            <a:srgbClr val="0F172A"/>
                           </a:solidFill>
                           <a:latin typeface="Malgun Gothic"/>
                         </a:rPr>
-                        <a:t>URL</a:t>
+                        <a:t>https://ppamong.com/shop (향후 shop.ppamong.com)</a:t>
                       </a:r>
                     </a:p>
                   </a:txBody>
-                  <a:tcPr>
-                    <a:solidFill>
-                      <a:srgbClr val="1D4ED8"/>
-                    </a:solidFill>
-                  </a:tcPr>
+                  <a:tcPr/>
                 </a:tc>
               </a:tr>
-              <a:tr h="438912">
+              <a:tr h="452628">
                 <a:tc>
                   <a:txBody>
                     <a:bodyPr/>
                     <a:lstStyle/>
                     <a:p>
-                      <a:pPr algn="l"/>
                       <a:r>
-                        <a:rPr sz="1200" b="0">
+                        <a:rPr sz="1000">
                           <a:solidFill>
                             <a:srgbClr val="0F172A"/>
                           </a:solidFill>
                           <a:latin typeface="Malgun Gothic"/>
                         </a:rPr>
-                        <a:t>일반 사용자</a:t>
-                      </a:r>
-                    </a:p>
-                  </a:txBody>
-                  <a:tcPr>
-                    <a:solidFill>
-                      <a:srgbClr val="FFFFFF"/>
-                    </a:solidFill>
-                  </a:tcPr>
-                </a:tc>
-                <a:tc>
-                  <a:txBody>
-                    <a:bodyPr/>
-                    <a:lstStyle/>
-                    <a:p>
-                      <a:pPr algn="l"/>
-                      <a:r>
-                        <a:rPr sz="1200" b="0">
-                          <a:solidFill>
-                            <a:srgbClr val="0F172A"/>
-                          </a:solidFill>
-                          <a:latin typeface="Malgun Gothic"/>
-                        </a:rPr>
-                        <a:t>Android / iOS 앱 (WebView)</a:t>
-                      </a:r>
-                    </a:p>
-                  </a:txBody>
-                  <a:tcPr>
-                    <a:solidFill>
-                      <a:srgbClr val="FFFFFF"/>
-                    </a:solidFill>
-                  </a:tcPr>
-                </a:tc>
-                <a:tc>
-                  <a:txBody>
-                    <a:bodyPr/>
-                    <a:lstStyle/>
-                    <a:p>
-                      <a:pPr algn="l"/>
-                      <a:r>
-                        <a:rPr sz="1200" b="0">
-                          <a:solidFill>
-                            <a:srgbClr val="0F172A"/>
-                          </a:solidFill>
-                          <a:latin typeface="Malgun Gothic"/>
-                        </a:rPr>
-                        <a:t>/login, /home, /prediction …</a:t>
-                      </a:r>
-                    </a:p>
-                  </a:txBody>
-                  <a:tcPr>
-                    <a:solidFill>
-                      <a:srgbClr val="FFFFFF"/>
-                    </a:solidFill>
-                  </a:tcPr>
-                </a:tc>
-              </a:tr>
-              <a:tr h="438912">
-                <a:tc>
-                  <a:txBody>
-                    <a:bodyPr/>
-                    <a:lstStyle/>
-                    <a:p>
-                      <a:pPr algn="l"/>
-                      <a:r>
-                        <a:rPr sz="1200" b="0">
-                          <a:solidFill>
-                            <a:srgbClr val="0F172A"/>
-                          </a:solidFill>
-                          <a:latin typeface="Malgun Gothic"/>
-                        </a:rPr>
-                        <a:t>운영자(매니저)</a:t>
+                        <a:t>회원가입</a:t>
                       </a:r>
                     </a:p>
                   </a:txBody>
@@ -6197,15 +6325,76 @@
                     <a:bodyPr/>
                     <a:lstStyle/>
                     <a:p>
-                      <a:pPr algn="l"/>
                       <a:r>
-                        <a:rPr sz="1200" b="0">
+                        <a:rPr sz="1000">
                           <a:solidFill>
                             <a:srgbClr val="0F172A"/>
                           </a:solidFill>
                           <a:latin typeface="Malgun Gothic"/>
                         </a:rPr>
-                        <a:t>별도 Android / iOS 앱</a:t>
+                        <a:t>사용자 앱 전용 — 몰 웹에 가입 폼 없음</a:t>
+                      </a:r>
+                    </a:p>
+                  </a:txBody>
+                  <a:tcPr>
+                    <a:solidFill>
+                      <a:srgbClr val="F8FAFC"/>
+                    </a:solidFill>
+                  </a:tcPr>
+                </a:tc>
+              </a:tr>
+              <a:tr h="452628">
+                <a:tc>
+                  <a:txBody>
+                    <a:bodyPr/>
+                    <a:lstStyle/>
+                    <a:p>
+                      <a:r>
+                        <a:rPr sz="1000">
+                          <a:solidFill>
+                            <a:srgbClr val="0F172A"/>
+                          </a:solidFill>
+                          <a:latin typeface="Malgun Gothic"/>
+                        </a:rPr>
+                        <a:t>결제 1차</a:t>
+                      </a:r>
+                    </a:p>
+                  </a:txBody>
+                  <a:tcPr/>
+                </a:tc>
+                <a:tc>
+                  <a:txBody>
+                    <a:bodyPr/>
+                    <a:lstStyle/>
+                    <a:p>
+                      <a:r>
+                        <a:rPr sz="1000">
+                          <a:solidFill>
+                            <a:srgbClr val="0F172A"/>
+                          </a:solidFill>
+                          <a:latin typeface="Malgun Gothic"/>
+                        </a:rPr>
+                        <a:t>현금 주문 접수 → 관리자 확인</a:t>
+                      </a:r>
+                    </a:p>
+                  </a:txBody>
+                  <a:tcPr/>
+                </a:tc>
+              </a:tr>
+              <a:tr h="452628">
+                <a:tc>
+                  <a:txBody>
+                    <a:bodyPr/>
+                    <a:lstStyle/>
+                    <a:p>
+                      <a:r>
+                        <a:rPr sz="1000">
+                          <a:solidFill>
+                            <a:srgbClr val="0F172A"/>
+                          </a:solidFill>
+                          <a:latin typeface="Malgun Gothic"/>
+                        </a:rPr>
+                        <a:t>판매 유형</a:t>
                       </a:r>
                     </a:p>
                   </a:txBody>
@@ -6220,15 +6409,14 @@
                     <a:bodyPr/>
                     <a:lstStyle/>
                     <a:p>
-                      <a:pPr algn="l"/>
                       <a:r>
-                        <a:rPr sz="1200" b="0">
+                        <a:rPr sz="1000">
                           <a:solidFill>
                             <a:srgbClr val="0F172A"/>
                           </a:solidFill>
                           <a:latin typeface="Malgun Gothic"/>
                         </a:rPr>
-                        <a:t>/manager/*</a:t>
+                        <a:t>재고판매(stock) · 주문후조달(procure)</a:t>
                       </a:r>
                     </a:p>
                   </a:txBody>
@@ -6239,27 +6427,719 @@
                   </a:tcPr>
                 </a:tc>
               </a:tr>
-              <a:tr h="438912">
+              <a:tr h="452628">
                 <a:tc>
                   <a:txBody>
                     <a:bodyPr/>
                     <a:lstStyle/>
                     <a:p>
-                      <a:pPr algn="l"/>
                       <a:r>
-                        <a:rPr sz="1200" b="0">
+                        <a:rPr sz="1000">
                           <a:solidFill>
                             <a:srgbClr val="0F172A"/>
                           </a:solidFill>
                           <a:latin typeface="Malgun Gothic"/>
                         </a:rPr>
-                        <a:t>관리자</a:t>
+                        <a:t>문의</a:t>
+                      </a:r>
+                    </a:p>
+                  </a:txBody>
+                  <a:tcPr/>
+                </a:tc>
+                <a:tc>
+                  <a:txBody>
+                    <a:bodyPr/>
+                    <a:lstStyle/>
+                    <a:p>
+                      <a:r>
+                        <a:rPr sz="1000">
+                          <a:solidFill>
+                            <a:srgbClr val="0F172A"/>
+                          </a:solidFill>
+                          <a:latin typeface="Malgun Gothic"/>
+                        </a:rPr>
+                        <a:t>상품 상세 탭 · 이름·연락처·내용 → 관리자 구매 문의함</a:t>
+                      </a:r>
+                    </a:p>
+                  </a:txBody>
+                  <a:tcPr/>
+                </a:tc>
+              </a:tr>
+            </a:tbl>
+          </a:graphicData>
+        </a:graphic>
+      </p:graphicFrame>
+    </p:spTree>
+  </p:cSld>
+  <p:clrMapOvr>
+    <a:masterClrMapping/>
+  </p:clrMapOvr>
+</p:sld>
+</file>
+
+<file path=ppt/slides/slide6.xml><?xml version="1.0" encoding="utf-8"?>
+<p:sld xmlns:a="http://schemas.openxmlformats.org/drawingml/2006/main" xmlns:p="http://schemas.openxmlformats.org/presentationml/2006/main" xmlns:r="http://schemas.openxmlformats.org/officeDocument/2006/relationships">
+  <p:cSld>
+    <p:spTree>
+      <p:nvGrpSpPr>
+        <p:cNvPr id="1" name=""/>
+        <p:cNvGrpSpPr/>
+        <p:nvPr/>
+      </p:nvGrpSpPr>
+      <p:grpSpPr/>
+      <p:sp>
+        <p:nvSpPr>
+          <p:cNvPr id="2" name="Rectangle 1"/>
+          <p:cNvSpPr/>
+          <p:nvPr/>
+        </p:nvSpPr>
+        <p:spPr>
+          <a:xfrm>
+            <a:off x="0" y="0"/>
+            <a:ext cx="12191695" cy="960120"/>
+          </a:xfrm>
+          <a:prstGeom prst="rect">
+            <a:avLst/>
+          </a:prstGeom>
+          <a:solidFill>
+            <a:srgbClr val="0F172A"/>
+          </a:solidFill>
+          <a:ln>
+            <a:noFill/>
+          </a:ln>
+        </p:spPr>
+        <p:style>
+          <a:lnRef idx="1">
+            <a:schemeClr val="accent1"/>
+          </a:lnRef>
+          <a:fillRef idx="3">
+            <a:schemeClr val="accent1"/>
+          </a:fillRef>
+          <a:effectRef idx="2">
+            <a:schemeClr val="accent1"/>
+          </a:effectRef>
+          <a:fontRef idx="minor">
+            <a:schemeClr val="lt1"/>
+          </a:fontRef>
+        </p:style>
+        <p:txBody>
+          <a:bodyPr rtlCol="0" anchor="ctr"/>
+          <a:lstStyle/>
+          <a:p>
+            <a:pPr algn="ctr"/>
+          </a:p>
+        </p:txBody>
+      </p:sp>
+      <p:sp>
+        <p:nvSpPr>
+          <p:cNvPr id="3" name="TextBox 2"/>
+          <p:cNvSpPr txBox="1"/>
+          <p:nvPr/>
+        </p:nvSpPr>
+        <p:spPr>
+          <a:xfrm>
+            <a:off x="502920" y="201168"/>
+            <a:ext cx="10972800" cy="640080"/>
+          </a:xfrm>
+          <a:prstGeom prst="rect">
+            <a:avLst/>
+          </a:prstGeom>
+          <a:noFill/>
+        </p:spPr>
+        <p:txBody>
+          <a:bodyPr wrap="none">
+            <a:spAutoFit/>
+          </a:bodyPr>
+          <a:lstStyle/>
+          <a:p>
+            <a:r>
+              <a:rPr sz="2800" b="1">
+                <a:solidFill>
+                  <a:srgbClr val="FFFFFF"/>
+                </a:solidFill>
+                <a:latin typeface="Malgun Gothic"/>
+              </a:rPr>
+              <a:t>5. 쇼핑몰 관리 (/admin/mall-management)</a:t>
+            </a:r>
+          </a:p>
+        </p:txBody>
+      </p:sp>
+      <p:sp>
+        <p:nvSpPr>
+          <p:cNvPr id="4" name="TextBox 3"/>
+          <p:cNvSpPr txBox="1"/>
+          <p:nvPr/>
+        </p:nvSpPr>
+        <p:spPr>
+          <a:xfrm>
+            <a:off x="502920" y="1051560"/>
+            <a:ext cx="10972800" cy="457200"/>
+          </a:xfrm>
+          <a:prstGeom prst="rect">
+            <a:avLst/>
+          </a:prstGeom>
+          <a:noFill/>
+        </p:spPr>
+        <p:txBody>
+          <a:bodyPr wrap="none">
+            <a:spAutoFit/>
+          </a:bodyPr>
+          <a:lstStyle/>
+          <a:p>
+            <a:r>
+              <a:rPr sz="1400" b="0">
+                <a:solidFill>
+                  <a:srgbClr val="64748B"/>
+                </a:solidFill>
+                <a:latin typeface="Malgun Gothic"/>
+              </a:rPr>
+              <a:t>4개 탭 · 상품 등록/리스트/표시/문의</a:t>
+            </a:r>
+          </a:p>
+        </p:txBody>
+      </p:sp>
+      <p:sp>
+        <p:nvSpPr>
+          <p:cNvPr id="5" name="Rounded Rectangle 4"/>
+          <p:cNvSpPr/>
+          <p:nvPr/>
+        </p:nvSpPr>
+        <p:spPr>
+          <a:xfrm>
+            <a:off x="502920" y="1325880"/>
+            <a:ext cx="2686050" cy="1234440"/>
+          </a:xfrm>
+          <a:prstGeom prst="roundRect">
+            <a:avLst/>
+          </a:prstGeom>
+          <a:solidFill>
+            <a:srgbClr val="B45309"/>
+          </a:solidFill>
+          <a:ln>
+            <a:solidFill>
+              <a:srgbClr val="B45309"/>
+            </a:solidFill>
+          </a:ln>
+        </p:spPr>
+        <p:style>
+          <a:lnRef idx="1">
+            <a:schemeClr val="accent1"/>
+          </a:lnRef>
+          <a:fillRef idx="3">
+            <a:schemeClr val="accent1"/>
+          </a:fillRef>
+          <a:effectRef idx="2">
+            <a:schemeClr val="accent1"/>
+          </a:effectRef>
+          <a:fontRef idx="minor">
+            <a:schemeClr val="lt1"/>
+          </a:fontRef>
+        </p:style>
+        <p:txBody>
+          <a:bodyPr rtlCol="0" anchor="ctr"/>
+          <a:lstStyle/>
+          <a:p>
+            <a:pPr algn="ctr"/>
+            <a:r>
+              <a:rPr sz="1300" b="1">
+                <a:solidFill>
+                  <a:srgbClr val="FFFFFF"/>
+                </a:solidFill>
+                <a:latin typeface="Malgun Gothic"/>
+              </a:rPr>
+              <a:t>상품 등록</a:t>
+            </a:r>
+          </a:p>
+          <a:p>
+            <a:pPr algn="ctr"/>
+            <a:r>
+              <a:rPr sz="1000" b="0">
+                <a:solidFill>
+                  <a:srgbClr val="FFFFFF"/>
+                </a:solidFill>
+                <a:latin typeface="Malgun Gothic"/>
+              </a:rPr>
+              <a:t>신규 POST
+등록 후 초기화</a:t>
+            </a:r>
+          </a:p>
+        </p:txBody>
+      </p:sp>
+      <p:sp>
+        <p:nvSpPr>
+          <p:cNvPr id="6" name="Rounded Rectangle 5"/>
+          <p:cNvSpPr/>
+          <p:nvPr/>
+        </p:nvSpPr>
+        <p:spPr>
+          <a:xfrm>
+            <a:off x="3326130" y="1325880"/>
+            <a:ext cx="2686050" cy="1234440"/>
+          </a:xfrm>
+          <a:prstGeom prst="roundRect">
+            <a:avLst/>
+          </a:prstGeom>
+          <a:solidFill>
+            <a:srgbClr val="B45309"/>
+          </a:solidFill>
+          <a:ln>
+            <a:solidFill>
+              <a:srgbClr val="B45309"/>
+            </a:solidFill>
+          </a:ln>
+        </p:spPr>
+        <p:style>
+          <a:lnRef idx="1">
+            <a:schemeClr val="accent1"/>
+          </a:lnRef>
+          <a:fillRef idx="3">
+            <a:schemeClr val="accent1"/>
+          </a:fillRef>
+          <a:effectRef idx="2">
+            <a:schemeClr val="accent1"/>
+          </a:effectRef>
+          <a:fontRef idx="minor">
+            <a:schemeClr val="lt1"/>
+          </a:fontRef>
+        </p:style>
+        <p:txBody>
+          <a:bodyPr rtlCol="0" anchor="ctr"/>
+          <a:lstStyle/>
+          <a:p>
+            <a:pPr algn="ctr"/>
+            <a:r>
+              <a:rPr sz="1300" b="1">
+                <a:solidFill>
+                  <a:srgbClr val="FFFFFF"/>
+                </a:solidFill>
+                <a:latin typeface="Malgun Gothic"/>
+              </a:rPr>
+              <a:t>상품 리스트</a:t>
+            </a:r>
+          </a:p>
+          <a:p>
+            <a:pPr algn="ctr"/>
+            <a:r>
+              <a:rPr sz="1000" b="0">
+                <a:solidFill>
+                  <a:srgbClr val="FFFFFF"/>
+                </a:solidFill>
+                <a:latin typeface="Malgun Gothic"/>
+              </a:rPr>
+              <a:t>검색·수정
+삭제</a:t>
+            </a:r>
+          </a:p>
+        </p:txBody>
+      </p:sp>
+      <p:sp>
+        <p:nvSpPr>
+          <p:cNvPr id="7" name="Rounded Rectangle 6"/>
+          <p:cNvSpPr/>
+          <p:nvPr/>
+        </p:nvSpPr>
+        <p:spPr>
+          <a:xfrm>
+            <a:off x="6149340" y="1325880"/>
+            <a:ext cx="2686050" cy="1234440"/>
+          </a:xfrm>
+          <a:prstGeom prst="roundRect">
+            <a:avLst/>
+          </a:prstGeom>
+          <a:solidFill>
+            <a:srgbClr val="0F766E"/>
+          </a:solidFill>
+          <a:ln>
+            <a:solidFill>
+              <a:srgbClr val="0F766E"/>
+            </a:solidFill>
+          </a:ln>
+        </p:spPr>
+        <p:style>
+          <a:lnRef idx="1">
+            <a:schemeClr val="accent1"/>
+          </a:lnRef>
+          <a:fillRef idx="3">
+            <a:schemeClr val="accent1"/>
+          </a:fillRef>
+          <a:effectRef idx="2">
+            <a:schemeClr val="accent1"/>
+          </a:effectRef>
+          <a:fontRef idx="minor">
+            <a:schemeClr val="lt1"/>
+          </a:fontRef>
+        </p:style>
+        <p:txBody>
+          <a:bodyPr rtlCol="0" anchor="ctr"/>
+          <a:lstStyle/>
+          <a:p>
+            <a:pPr algn="ctr"/>
+            <a:r>
+              <a:rPr sz="1300" b="1">
+                <a:solidFill>
+                  <a:srgbClr val="FFFFFF"/>
+                </a:solidFill>
+                <a:latin typeface="Malgun Gothic"/>
+              </a:rPr>
+              <a:t>쇼핑몰 표시</a:t>
+            </a:r>
+          </a:p>
+          <a:p>
+            <a:pPr algn="ctr"/>
+            <a:r>
+              <a:rPr sz="1000" b="0">
+                <a:solidFill>
+                  <a:srgbClr val="FFFFFF"/>
+                </a:solidFill>
+                <a:latin typeface="Malgun Gothic"/>
+              </a:rPr>
+              <a:t>제목·노출
+문의 연락처</a:t>
+            </a:r>
+          </a:p>
+        </p:txBody>
+      </p:sp>
+      <p:sp>
+        <p:nvSpPr>
+          <p:cNvPr id="8" name="Rounded Rectangle 7"/>
+          <p:cNvSpPr/>
+          <p:nvPr/>
+        </p:nvSpPr>
+        <p:spPr>
+          <a:xfrm>
+            <a:off x="8972550" y="1325880"/>
+            <a:ext cx="2686050" cy="1234440"/>
+          </a:xfrm>
+          <a:prstGeom prst="roundRect">
+            <a:avLst/>
+          </a:prstGeom>
+          <a:solidFill>
+            <a:srgbClr val="E11936"/>
+          </a:solidFill>
+          <a:ln>
+            <a:solidFill>
+              <a:srgbClr val="E11936"/>
+            </a:solidFill>
+          </a:ln>
+        </p:spPr>
+        <p:style>
+          <a:lnRef idx="1">
+            <a:schemeClr val="accent1"/>
+          </a:lnRef>
+          <a:fillRef idx="3">
+            <a:schemeClr val="accent1"/>
+          </a:fillRef>
+          <a:effectRef idx="2">
+            <a:schemeClr val="accent1"/>
+          </a:effectRef>
+          <a:fontRef idx="minor">
+            <a:schemeClr val="lt1"/>
+          </a:fontRef>
+        </p:style>
+        <p:txBody>
+          <a:bodyPr rtlCol="0" anchor="ctr"/>
+          <a:lstStyle/>
+          <a:p>
+            <a:pPr algn="ctr"/>
+            <a:r>
+              <a:rPr sz="1300" b="1">
+                <a:solidFill>
+                  <a:srgbClr val="FFFFFF"/>
+                </a:solidFill>
+                <a:latin typeface="Malgun Gothic"/>
+              </a:rPr>
+              <a:t>구매 문의</a:t>
+            </a:r>
+          </a:p>
+          <a:p>
+            <a:pPr algn="ctr"/>
+            <a:r>
+              <a:rPr sz="1000" b="0">
+                <a:solidFill>
+                  <a:srgbClr val="FFFFFF"/>
+                </a:solidFill>
+                <a:latin typeface="Malgun Gothic"/>
+              </a:rPr>
+              <a:t>답변 저장
+전화·메일</a:t>
+            </a:r>
+          </a:p>
+        </p:txBody>
+      </p:sp>
+      <p:sp>
+        <p:nvSpPr>
+          <p:cNvPr id="9" name="TextBox 8"/>
+          <p:cNvSpPr txBox="1"/>
+          <p:nvPr/>
+        </p:nvSpPr>
+        <p:spPr>
+          <a:xfrm>
+            <a:off x="502920" y="2880360"/>
+            <a:ext cx="11155680" cy="347472"/>
+          </a:xfrm>
+          <a:prstGeom prst="rect">
+            <a:avLst/>
+          </a:prstGeom>
+          <a:noFill/>
+        </p:spPr>
+        <p:txBody>
+          <a:bodyPr wrap="square">
+            <a:spAutoFit/>
+          </a:bodyPr>
+          <a:lstStyle/>
+          <a:p>
+            <a:r>
+              <a:rPr sz="1300" b="0">
+                <a:solidFill>
+                  <a:srgbClr val="0F172A"/>
+                </a:solidFill>
+                <a:latin typeface="Malgun Gothic"/>
+              </a:rPr>
+              <a:t>• 상품: 카테고리 · 옵션(컬러/사이즈) · 재고판매/주문후조달 · 제품사진·상품정보 이미지</a:t>
+            </a:r>
+          </a:p>
+        </p:txBody>
+      </p:sp>
+      <p:sp>
+        <p:nvSpPr>
+          <p:cNvPr id="10" name="TextBox 9"/>
+          <p:cNvSpPr txBox="1"/>
+          <p:nvPr/>
+        </p:nvSpPr>
+        <p:spPr>
+          <a:xfrm>
+            <a:off x="502920" y="3227832"/>
+            <a:ext cx="11155680" cy="347472"/>
+          </a:xfrm>
+          <a:prstGeom prst="rect">
+            <a:avLst/>
+          </a:prstGeom>
+          <a:noFill/>
+        </p:spPr>
+        <p:txBody>
+          <a:bodyPr wrap="square">
+            <a:spAutoFit/>
+          </a:bodyPr>
+          <a:lstStyle/>
+          <a:p>
+            <a:r>
+              <a:rPr sz="1300" b="0">
+                <a:solidFill>
+                  <a:srgbClr val="0F172A"/>
+                </a:solidFill>
+                <a:latin typeface="Malgun Gothic"/>
+              </a:rPr>
+              <a:t>• 이미지: 대표 20KB/1280px · 상품정보 80KB/860px · WebP 자동압축 · GCS 또는 로컬 fallback</a:t>
+            </a:r>
+          </a:p>
+        </p:txBody>
+      </p:sp>
+      <p:sp>
+        <p:nvSpPr>
+          <p:cNvPr id="11" name="TextBox 10"/>
+          <p:cNvSpPr txBox="1"/>
+          <p:nvPr/>
+        </p:nvSpPr>
+        <p:spPr>
+          <a:xfrm>
+            <a:off x="502920" y="3575303"/>
+            <a:ext cx="11155680" cy="347472"/>
+          </a:xfrm>
+          <a:prstGeom prst="rect">
+            <a:avLst/>
+          </a:prstGeom>
+          <a:noFill/>
+        </p:spPr>
+        <p:txBody>
+          <a:bodyPr wrap="square">
+            <a:spAutoFit/>
+          </a:bodyPr>
+          <a:lstStyle/>
+          <a:p>
+            <a:r>
+              <a:rPr sz="1300" b="0">
+                <a:solidFill>
+                  <a:srgbClr val="0F172A"/>
+                </a:solidFill>
+                <a:latin typeface="Malgun Gothic"/>
+              </a:rPr>
+              <a:t>• 구매 문의: 답변글 DB 저장 · tel:/mailto: 링크 · 처리완료 표시</a:t>
+            </a:r>
+          </a:p>
+        </p:txBody>
+      </p:sp>
+    </p:spTree>
+  </p:cSld>
+  <p:clrMapOvr>
+    <a:masterClrMapping/>
+  </p:clrMapOvr>
+</p:sld>
+</file>
+
+<file path=ppt/slides/slide7.xml><?xml version="1.0" encoding="utf-8"?>
+<p:sld xmlns:a="http://schemas.openxmlformats.org/drawingml/2006/main" xmlns:p="http://schemas.openxmlformats.org/presentationml/2006/main" xmlns:r="http://schemas.openxmlformats.org/officeDocument/2006/relationships">
+  <p:cSld>
+    <p:spTree>
+      <p:nvGrpSpPr>
+        <p:cNvPr id="1" name=""/>
+        <p:cNvGrpSpPr/>
+        <p:nvPr/>
+      </p:nvGrpSpPr>
+      <p:grpSpPr/>
+      <p:sp>
+        <p:nvSpPr>
+          <p:cNvPr id="2" name="Rectangle 1"/>
+          <p:cNvSpPr/>
+          <p:nvPr/>
+        </p:nvSpPr>
+        <p:spPr>
+          <a:xfrm>
+            <a:off x="0" y="0"/>
+            <a:ext cx="12191695" cy="960120"/>
+          </a:xfrm>
+          <a:prstGeom prst="rect">
+            <a:avLst/>
+          </a:prstGeom>
+          <a:solidFill>
+            <a:srgbClr val="0F172A"/>
+          </a:solidFill>
+          <a:ln>
+            <a:noFill/>
+          </a:ln>
+        </p:spPr>
+        <p:style>
+          <a:lnRef idx="1">
+            <a:schemeClr val="accent1"/>
+          </a:lnRef>
+          <a:fillRef idx="3">
+            <a:schemeClr val="accent1"/>
+          </a:fillRef>
+          <a:effectRef idx="2">
+            <a:schemeClr val="accent1"/>
+          </a:effectRef>
+          <a:fontRef idx="minor">
+            <a:schemeClr val="lt1"/>
+          </a:fontRef>
+        </p:style>
+        <p:txBody>
+          <a:bodyPr rtlCol="0" anchor="ctr"/>
+          <a:lstStyle/>
+          <a:p>
+            <a:pPr algn="ctr"/>
+          </a:p>
+        </p:txBody>
+      </p:sp>
+      <p:sp>
+        <p:nvSpPr>
+          <p:cNvPr id="3" name="TextBox 2"/>
+          <p:cNvSpPr txBox="1"/>
+          <p:nvPr/>
+        </p:nvSpPr>
+        <p:spPr>
+          <a:xfrm>
+            <a:off x="502920" y="201168"/>
+            <a:ext cx="10972800" cy="640080"/>
+          </a:xfrm>
+          <a:prstGeom prst="rect">
+            <a:avLst/>
+          </a:prstGeom>
+          <a:noFill/>
+        </p:spPr>
+        <p:txBody>
+          <a:bodyPr wrap="none">
+            <a:spAutoFit/>
+          </a:bodyPr>
+          <a:lstStyle/>
+          <a:p>
+            <a:r>
+              <a:rPr sz="2800" b="1">
+                <a:solidFill>
+                  <a:srgbClr val="FFFFFF"/>
+                </a:solidFill>
+                <a:latin typeface="Malgun Gothic"/>
+              </a:rPr>
+              <a:t>6. 몰 운영 4모듈 (백오피스)</a:t>
+            </a:r>
+          </a:p>
+        </p:txBody>
+      </p:sp>
+      <p:sp>
+        <p:nvSpPr>
+          <p:cNvPr id="4" name="TextBox 3"/>
+          <p:cNvSpPr txBox="1"/>
+          <p:nvPr/>
+        </p:nvSpPr>
+        <p:spPr>
+          <a:xfrm>
+            <a:off x="502920" y="1051560"/>
+            <a:ext cx="10972800" cy="457200"/>
+          </a:xfrm>
+          <a:prstGeom prst="rect">
+            <a:avLst/>
+          </a:prstGeom>
+          <a:noFill/>
+        </p:spPr>
+        <p:txBody>
+          <a:bodyPr wrap="none">
+            <a:spAutoFit/>
+          </a:bodyPr>
+          <a:lstStyle/>
+          <a:p>
+            <a:r>
+              <a:rPr sz="1400" b="0">
+                <a:solidFill>
+                  <a:srgbClr val="64748B"/>
+                </a:solidFill>
+                <a:latin typeface="Malgun Gothic"/>
+              </a:rPr>
+              <a:t>주문 · 판매 · 재고 · 구매 — ERP형 흐름</a:t>
+            </a:r>
+          </a:p>
+        </p:txBody>
+      </p:sp>
+      <p:graphicFrame>
+        <p:nvGraphicFramePr>
+          <p:cNvPr id="5" name="Table 4"/>
+          <p:cNvGraphicFramePr>
+            <a:graphicFrameLocks noGrp="1"/>
+          </p:cNvGraphicFramePr>
+          <p:nvPr/>
+        </p:nvGraphicFramePr>
+        <p:xfrm>
+          <a:off x="502920" y="1417320"/>
+          <a:ext cx="11155680" cy="2331720"/>
+        </p:xfrm>
+        <a:graphic>
+          <a:graphicData uri="http://schemas.openxmlformats.org/drawingml/2006/table">
+            <a:tbl>
+              <a:tblPr firstRow="1" bandRow="1">
+                <a:tableStyleId>{5C22544A-7EE6-4342-B048-85BDC9FD1C3A}</a:tableStyleId>
+              </a:tblPr>
+              <a:tblGrid>
+                <a:gridCol w="1828800"/>
+                <a:gridCol w="3200400"/>
+                <a:gridCol w="6126480"/>
+              </a:tblGrid>
+              <a:tr h="466344">
+                <a:tc>
+                  <a:txBody>
+                    <a:bodyPr/>
+                    <a:lstStyle/>
+                    <a:p>
+                      <a:r>
+                        <a:rPr sz="1100" b="1">
+                          <a:solidFill>
+                            <a:srgbClr val="FFFFFF"/>
+                          </a:solidFill>
+                          <a:latin typeface="Malgun Gothic"/>
+                        </a:rPr>
+                        <a:t>모듈</a:t>
                       </a:r>
                     </a:p>
                   </a:txBody>
                   <a:tcPr>
                     <a:solidFill>
-                      <a:srgbClr val="FFFFFF"/>
+                      <a:srgbClr val="0F172A"/>
                     </a:solidFill>
                   </a:tcPr>
                 </a:tc>
@@ -6268,21 +7148,20 @@
                     <a:bodyPr/>
                     <a:lstStyle/>
                     <a:p>
-                      <a:pPr algn="l"/>
                       <a:r>
-                        <a:rPr sz="1200" b="0">
+                        <a:rPr sz="1100" b="1">
                           <a:solidFill>
-                            <a:srgbClr val="0F172A"/>
+                            <a:srgbClr val="FFFFFF"/>
                           </a:solidFill>
                           <a:latin typeface="Malgun Gothic"/>
                         </a:rPr>
-                        <a:t>웹 브라우저만</a:t>
+                        <a:t>경로</a:t>
                       </a:r>
                     </a:p>
                   </a:txBody>
                   <a:tcPr>
                     <a:solidFill>
-                      <a:srgbClr val="FFFFFF"/>
+                      <a:srgbClr val="0F172A"/>
                     </a:solidFill>
                   </a:tcPr>
                 </a:tc>
@@ -6291,21 +7170,268 @@
                     <a:bodyPr/>
                     <a:lstStyle/>
                     <a:p>
-                      <a:pPr algn="l"/>
                       <a:r>
-                        <a:rPr sz="1200" b="0">
+                        <a:rPr sz="1100" b="1">
+                          <a:solidFill>
+                            <a:srgbClr val="FFFFFF"/>
+                          </a:solidFill>
+                          <a:latin typeface="Malgun Gothic"/>
+                        </a:rPr>
+                        <a:t>역할</a:t>
+                      </a:r>
+                    </a:p>
+                  </a:txBody>
+                  <a:tcPr>
+                    <a:solidFill>
+                      <a:srgbClr val="0F172A"/>
+                    </a:solidFill>
+                  </a:tcPr>
+                </a:tc>
+              </a:tr>
+              <a:tr h="466344">
+                <a:tc>
+                  <a:txBody>
+                    <a:bodyPr/>
+                    <a:lstStyle/>
+                    <a:p>
+                      <a:r>
+                        <a:rPr sz="1000">
                           <a:solidFill>
                             <a:srgbClr val="0F172A"/>
                           </a:solidFill>
                           <a:latin typeface="Malgun Gothic"/>
                         </a:rPr>
-                        <a:t>/admin/*</a:t>
+                        <a:t>주문 관리</a:t>
+                      </a:r>
+                    </a:p>
+                  </a:txBody>
+                  <a:tcPr/>
+                </a:tc>
+                <a:tc>
+                  <a:txBody>
+                    <a:bodyPr/>
+                    <a:lstStyle/>
+                    <a:p>
+                      <a:r>
+                        <a:rPr sz="1000">
+                          <a:solidFill>
+                            <a:srgbClr val="0F172A"/>
+                          </a:solidFill>
+                          <a:latin typeface="Malgun Gothic"/>
+                        </a:rPr>
+                        <a:t>/admin/mall-orders</a:t>
+                      </a:r>
+                    </a:p>
+                  </a:txBody>
+                  <a:tcPr/>
+                </a:tc>
+                <a:tc>
+                  <a:txBody>
+                    <a:bodyPr/>
+                    <a:lstStyle/>
+                    <a:p>
+                      <a:r>
+                        <a:rPr sz="1000">
+                          <a:solidFill>
+                            <a:srgbClr val="0F172A"/>
+                          </a:solidFill>
+                          <a:latin typeface="Malgun Gothic"/>
+                        </a:rPr>
+                        <a:t>고객 주문 접수·상태·배송 처리</a:t>
+                      </a:r>
+                    </a:p>
+                  </a:txBody>
+                  <a:tcPr/>
+                </a:tc>
+              </a:tr>
+              <a:tr h="466344">
+                <a:tc>
+                  <a:txBody>
+                    <a:bodyPr/>
+                    <a:lstStyle/>
+                    <a:p>
+                      <a:r>
+                        <a:rPr sz="1000">
+                          <a:solidFill>
+                            <a:srgbClr val="0F172A"/>
+                          </a:solidFill>
+                          <a:latin typeface="Malgun Gothic"/>
+                        </a:rPr>
+                        <a:t>판매 관리</a:t>
                       </a:r>
                     </a:p>
                   </a:txBody>
                   <a:tcPr>
                     <a:solidFill>
-                      <a:srgbClr val="FFFFFF"/>
+                      <a:srgbClr val="F8FAFC"/>
+                    </a:solidFill>
+                  </a:tcPr>
+                </a:tc>
+                <a:tc>
+                  <a:txBody>
+                    <a:bodyPr/>
+                    <a:lstStyle/>
+                    <a:p>
+                      <a:r>
+                        <a:rPr sz="1000">
+                          <a:solidFill>
+                            <a:srgbClr val="0F172A"/>
+                          </a:solidFill>
+                          <a:latin typeface="Malgun Gothic"/>
+                        </a:rPr>
+                        <a:t>/admin/mall-sales</a:t>
+                      </a:r>
+                    </a:p>
+                  </a:txBody>
+                  <a:tcPr>
+                    <a:solidFill>
+                      <a:srgbClr val="F8FAFC"/>
+                    </a:solidFill>
+                  </a:tcPr>
+                </a:tc>
+                <a:tc>
+                  <a:txBody>
+                    <a:bodyPr/>
+                    <a:lstStyle/>
+                    <a:p>
+                      <a:r>
+                        <a:rPr sz="1000">
+                          <a:solidFill>
+                            <a:srgbClr val="0F172A"/>
+                          </a:solidFill>
+                          <a:latin typeface="Malgun Gothic"/>
+                        </a:rPr>
+                        <a:t>판매 실적·출고 연동</a:t>
+                      </a:r>
+                    </a:p>
+                  </a:txBody>
+                  <a:tcPr>
+                    <a:solidFill>
+                      <a:srgbClr val="F8FAFC"/>
+                    </a:solidFill>
+                  </a:tcPr>
+                </a:tc>
+              </a:tr>
+              <a:tr h="466344">
+                <a:tc>
+                  <a:txBody>
+                    <a:bodyPr/>
+                    <a:lstStyle/>
+                    <a:p>
+                      <a:r>
+                        <a:rPr sz="1000">
+                          <a:solidFill>
+                            <a:srgbClr val="0F172A"/>
+                          </a:solidFill>
+                          <a:latin typeface="Malgun Gothic"/>
+                        </a:rPr>
+                        <a:t>재고 관리</a:t>
+                      </a:r>
+                    </a:p>
+                  </a:txBody>
+                  <a:tcPr/>
+                </a:tc>
+                <a:tc>
+                  <a:txBody>
+                    <a:bodyPr/>
+                    <a:lstStyle/>
+                    <a:p>
+                      <a:r>
+                        <a:rPr sz="1000">
+                          <a:solidFill>
+                            <a:srgbClr val="0F172A"/>
+                          </a:solidFill>
+                          <a:latin typeface="Malgun Gothic"/>
+                        </a:rPr>
+                        <a:t>/admin/mall-inventory</a:t>
+                      </a:r>
+                    </a:p>
+                  </a:txBody>
+                  <a:tcPr/>
+                </a:tc>
+                <a:tc>
+                  <a:txBody>
+                    <a:bodyPr/>
+                    <a:lstStyle/>
+                    <a:p>
+                      <a:r>
+                        <a:rPr sz="1000">
+                          <a:solidFill>
+                            <a:srgbClr val="0F172A"/>
+                          </a:solidFill>
+                          <a:latin typeface="Malgun Gothic"/>
+                        </a:rPr>
+                        <a:t>창고·로케이션·입출고·재고 수량</a:t>
+                      </a:r>
+                    </a:p>
+                  </a:txBody>
+                  <a:tcPr/>
+                </a:tc>
+              </a:tr>
+              <a:tr h="466344">
+                <a:tc>
+                  <a:txBody>
+                    <a:bodyPr/>
+                    <a:lstStyle/>
+                    <a:p>
+                      <a:r>
+                        <a:rPr sz="1000">
+                          <a:solidFill>
+                            <a:srgbClr val="0F172A"/>
+                          </a:solidFill>
+                          <a:latin typeface="Malgun Gothic"/>
+                        </a:rPr>
+                        <a:t>구매 관리</a:t>
+                      </a:r>
+                    </a:p>
+                  </a:txBody>
+                  <a:tcPr>
+                    <a:solidFill>
+                      <a:srgbClr val="F8FAFC"/>
+                    </a:solidFill>
+                  </a:tcPr>
+                </a:tc>
+                <a:tc>
+                  <a:txBody>
+                    <a:bodyPr/>
+                    <a:lstStyle/>
+                    <a:p>
+                      <a:r>
+                        <a:rPr sz="1000">
+                          <a:solidFill>
+                            <a:srgbClr val="0F172A"/>
+                          </a:solidFill>
+                          <a:latin typeface="Malgun Gothic"/>
+                        </a:rPr>
+                        <a:t>/admin/mall-purchase</a:t>
+                      </a:r>
+                    </a:p>
+                  </a:txBody>
+                  <a:tcPr>
+                    <a:solidFill>
+                      <a:srgbClr val="F8FAFC"/>
+                    </a:solidFill>
+                  </a:tcPr>
+                </a:tc>
+                <a:tc>
+                  <a:txBody>
+                    <a:bodyPr/>
+                    <a:lstStyle/>
+                    <a:p>
+                      <a:r>
+                        <a:rPr sz="1000">
+                          <a:solidFill>
+                            <a:srgbClr val="0F172A"/>
+                          </a:solidFill>
+                          <a:latin typeface="Malgun Gothic"/>
+                        </a:rPr>
+                        <a:t>주문후조달 발주·입고·발송</a:t>
+                      </a:r>
+                    </a:p>
+                  </a:txBody>
+                  <a:tcPr>
+                    <a:solidFill>
+                      <a:srgbClr val="F8FAFC"/>
                     </a:solidFill>
                   </a:tcPr>
                 </a:tc>
@@ -6316,27 +7442,109 @@
       </p:graphicFrame>
       <p:sp>
         <p:nvSpPr>
-          <p:cNvPr id="5" name="Rounded Rectangle 4"/>
+          <p:cNvPr id="6" name="TextBox 5"/>
+          <p:cNvSpPr txBox="1"/>
+          <p:nvPr/>
+        </p:nvSpPr>
+        <p:spPr>
+          <a:xfrm>
+            <a:off x="502920" y="3657600"/>
+            <a:ext cx="11155680" cy="347472"/>
+          </a:xfrm>
+          <a:prstGeom prst="rect">
+            <a:avLst/>
+          </a:prstGeom>
+          <a:noFill/>
+        </p:spPr>
+        <p:txBody>
+          <a:bodyPr wrap="square">
+            <a:spAutoFit/>
+          </a:bodyPr>
+          <a:lstStyle/>
+          <a:p>
+            <a:r>
+              <a:rPr sz="1400" b="0">
+                <a:solidFill>
+                  <a:srgbClr val="0F172A"/>
+                </a:solidFill>
+                <a:latin typeface="Malgun Gothic"/>
+              </a:rPr>
+              <a:t>• 재고판매: 주문 시 재고 검증·차감 · 품절 시 「판매완료」</a:t>
+            </a:r>
+          </a:p>
+        </p:txBody>
+      </p:sp>
+      <p:sp>
+        <p:nvSpPr>
+          <p:cNvPr id="7" name="TextBox 6"/>
+          <p:cNvSpPr txBox="1"/>
+          <p:nvPr/>
+        </p:nvSpPr>
+        <p:spPr>
+          <a:xfrm>
+            <a:off x="502920" y="4005072"/>
+            <a:ext cx="11155680" cy="347472"/>
+          </a:xfrm>
+          <a:prstGeom prst="rect">
+            <a:avLst/>
+          </a:prstGeom>
+          <a:noFill/>
+        </p:spPr>
+        <p:txBody>
+          <a:bodyPr wrap="square">
+            <a:spAutoFit/>
+          </a:bodyPr>
+          <a:lstStyle/>
+          <a:p>
+            <a:r>
+              <a:rPr sz="1400" b="0">
+                <a:solidFill>
+                  <a:srgbClr val="0F172A"/>
+                </a:solidFill>
+                <a:latin typeface="Malgun Gothic"/>
+              </a:rPr>
+              <a:t>• 주문후조달: 재고 숫자 숨김 · 주문 → 구매관리 발주 → 재고 입고 → 주문 발송</a:t>
+            </a:r>
+          </a:p>
+        </p:txBody>
+      </p:sp>
+    </p:spTree>
+  </p:cSld>
+  <p:clrMapOvr>
+    <a:masterClrMapping/>
+  </p:clrMapOvr>
+</p:sld>
+</file>
+
+<file path=ppt/slides/slide8.xml><?xml version="1.0" encoding="utf-8"?>
+<p:sld xmlns:a="http://schemas.openxmlformats.org/drawingml/2006/main" xmlns:p="http://schemas.openxmlformats.org/presentationml/2006/main" xmlns:r="http://schemas.openxmlformats.org/officeDocument/2006/relationships">
+  <p:cSld>
+    <p:spTree>
+      <p:nvGrpSpPr>
+        <p:cNvPr id="1" name=""/>
+        <p:cNvGrpSpPr/>
+        <p:nvPr/>
+      </p:nvGrpSpPr>
+      <p:grpSpPr/>
+      <p:sp>
+        <p:nvSpPr>
+          <p:cNvPr id="2" name="Rectangle 1"/>
           <p:cNvSpPr/>
           <p:nvPr/>
         </p:nvSpPr>
         <p:spPr>
           <a:xfrm>
-            <a:off x="914400" y="3657600"/>
-            <a:ext cx="10332720" cy="1371600"/>
-          </a:xfrm>
-          <a:prstGeom prst="roundRect">
-            <a:avLst>
-              <a:gd name="adj" fmla="val 8000"/>
-            </a:avLst>
+            <a:off x="0" y="0"/>
+            <a:ext cx="12191695" cy="960120"/>
+          </a:xfrm>
+          <a:prstGeom prst="rect">
+            <a:avLst/>
           </a:prstGeom>
           <a:solidFill>
-            <a:srgbClr val="EFF6FF"/>
+            <a:srgbClr val="0F172A"/>
           </a:solidFill>
-          <a:ln w="12700">
-            <a:solidFill>
-              <a:srgbClr val="1D4ED8"/>
-            </a:solidFill>
+          <a:ln>
+            <a:noFill/>
           </a:ln>
         </p:spPr>
         <p:style>
@@ -6354,44 +7562,858 @@
           </a:fontRef>
         </p:style>
         <p:txBody>
-          <a:bodyPr rtlCol="0" anchor="ctr" wrap="square"/>
+          <a:bodyPr rtlCol="0" anchor="ctr"/>
           <a:lstStyle/>
           <a:p>
             <a:pPr algn="ctr"/>
-            <a:r>
-              <a:rPr sz="1400" b="1">
-                <a:solidFill>
-                  <a:srgbClr val="1D4ED8"/>
+          </a:p>
+        </p:txBody>
+      </p:sp>
+      <p:sp>
+        <p:nvSpPr>
+          <p:cNvPr id="3" name="TextBox 2"/>
+          <p:cNvSpPr txBox="1"/>
+          <p:nvPr/>
+        </p:nvSpPr>
+        <p:spPr>
+          <a:xfrm>
+            <a:off x="502920" y="201168"/>
+            <a:ext cx="10972800" cy="640080"/>
+          </a:xfrm>
+          <a:prstGeom prst="rect">
+            <a:avLst/>
+          </a:prstGeom>
+          <a:noFill/>
+        </p:spPr>
+        <p:txBody>
+          <a:bodyPr wrap="none">
+            <a:spAutoFit/>
+          </a:bodyPr>
+          <a:lstStyle/>
+          <a:p>
+            <a:r>
+              <a:rPr sz="2800" b="1">
+                <a:solidFill>
+                  <a:srgbClr val="FFFFFF"/>
                 </a:solidFill>
                 <a:latin typeface="Malgun Gothic"/>
               </a:rPr>
-              <a:t>참고</a:t>
-            </a:r>
-          </a:p>
-          <a:p>
-            <a:r>
-              <a:rPr sz="1300" b="0">
-                <a:solidFill>
-                  <a:srgbClr val="0F172A"/>
+              <a:t>7. 관리자 웹 메뉴 구조</a:t>
+            </a:r>
+          </a:p>
+        </p:txBody>
+      </p:sp>
+      <p:sp>
+        <p:nvSpPr>
+          <p:cNvPr id="4" name="TextBox 3"/>
+          <p:cNvSpPr txBox="1"/>
+          <p:nvPr/>
+        </p:nvSpPr>
+        <p:spPr>
+          <a:xfrm>
+            <a:off x="502920" y="1051560"/>
+            <a:ext cx="10972800" cy="457200"/>
+          </a:xfrm>
+          <a:prstGeom prst="rect">
+            <a:avLst/>
+          </a:prstGeom>
+          <a:noFill/>
+        </p:spPr>
+        <p:txBody>
+          <a:bodyPr wrap="none">
+            <a:spAutoFit/>
+          </a:bodyPr>
+          <a:lstStyle/>
+          <a:p>
+            <a:r>
+              <a:rPr sz="1400" b="0">
+                <a:solidFill>
+                  <a:srgbClr val="64748B"/>
                 </a:solidFill>
                 <a:latin typeface="Malgun Gothic"/>
               </a:rPr>
-              <a:t>Capacitor 원격 URL 모드: 앱은 WebView로 https://ppamong.com 을 엽니다.</a:t>
-            </a:r>
-          </a:p>
-          <a:p>
-            <a:r>
-              <a:rPr sz="1300" b="0">
-                <a:solidFill>
-                  <a:srgbClr val="0F172A"/>
+              <a:t>adminMenuConfig.ts · 슈퍼어드민 전용 구역 포함</a:t>
+            </a:r>
+          </a:p>
+        </p:txBody>
+      </p:sp>
+      <p:graphicFrame>
+        <p:nvGraphicFramePr>
+          <p:cNvPr id="5" name="Table 4"/>
+          <p:cNvGraphicFramePr>
+            <a:graphicFrameLocks noGrp="1"/>
+          </p:cNvGraphicFramePr>
+          <p:nvPr/>
+        </p:nvGraphicFramePr>
+        <p:xfrm>
+          <a:off x="502920" y="1371600"/>
+          <a:ext cx="11155680" cy="3099816"/>
+        </p:xfrm>
+        <a:graphic>
+          <a:graphicData uri="http://schemas.openxmlformats.org/drawingml/2006/table">
+            <a:tbl>
+              <a:tblPr firstRow="1" bandRow="1">
+                <a:tableStyleId>{5C22544A-7EE6-4342-B048-85BDC9FD1C3A}</a:tableStyleId>
+              </a:tblPr>
+              <a:tblGrid>
+                <a:gridCol w="2011680"/>
+                <a:gridCol w="9144000"/>
+              </a:tblGrid>
+              <a:tr h="442830">
+                <a:tc>
+                  <a:txBody>
+                    <a:bodyPr/>
+                    <a:lstStyle/>
+                    <a:p>
+                      <a:r>
+                        <a:rPr sz="1100" b="1">
+                          <a:solidFill>
+                            <a:srgbClr val="FFFFFF"/>
+                          </a:solidFill>
+                          <a:latin typeface="Malgun Gothic"/>
+                        </a:rPr>
+                        <a:t>섹션</a:t>
+                      </a:r>
+                    </a:p>
+                  </a:txBody>
+                  <a:tcPr>
+                    <a:solidFill>
+                      <a:srgbClr val="0F172A"/>
+                    </a:solidFill>
+                  </a:tcPr>
+                </a:tc>
+                <a:tc>
+                  <a:txBody>
+                    <a:bodyPr/>
+                    <a:lstStyle/>
+                    <a:p>
+                      <a:r>
+                        <a:rPr sz="1100" b="1">
+                          <a:solidFill>
+                            <a:srgbClr val="FFFFFF"/>
+                          </a:solidFill>
+                          <a:latin typeface="Malgun Gothic"/>
+                        </a:rPr>
+                        <a:t>대표 메뉴</a:t>
+                      </a:r>
+                    </a:p>
+                  </a:txBody>
+                  <a:tcPr>
+                    <a:solidFill>
+                      <a:srgbClr val="0F172A"/>
+                    </a:solidFill>
+                  </a:tcPr>
+                </a:tc>
+              </a:tr>
+              <a:tr h="442830">
+                <a:tc>
+                  <a:txBody>
+                    <a:bodyPr/>
+                    <a:lstStyle/>
+                    <a:p>
+                      <a:r>
+                        <a:rPr sz="1000">
+                          <a:solidFill>
+                            <a:srgbClr val="0F172A"/>
+                          </a:solidFill>
+                          <a:latin typeface="Malgun Gothic"/>
+                        </a:rPr>
+                        <a:t>기본</a:t>
+                      </a:r>
+                    </a:p>
+                  </a:txBody>
+                  <a:tcPr/>
+                </a:tc>
+                <a:tc>
+                  <a:txBody>
+                    <a:bodyPr/>
+                    <a:lstStyle/>
+                    <a:p>
+                      <a:r>
+                        <a:rPr sz="1000">
+                          <a:solidFill>
+                            <a:srgbClr val="0F172A"/>
+                          </a:solidFill>
+                          <a:latin typeface="Malgun Gothic"/>
+                        </a:rPr>
+                        <a:t>대시보드 · 앱 홈 설정</a:t>
+                      </a:r>
+                    </a:p>
+                  </a:txBody>
+                  <a:tcPr/>
+                </a:tc>
+              </a:tr>
+              <a:tr h="442830">
+                <a:tc>
+                  <a:txBody>
+                    <a:bodyPr/>
+                    <a:lstStyle/>
+                    <a:p>
+                      <a:r>
+                        <a:rPr sz="1000">
+                          <a:solidFill>
+                            <a:srgbClr val="0F172A"/>
+                          </a:solidFill>
+                          <a:latin typeface="Malgun Gothic"/>
+                        </a:rPr>
+                        <a:t>쇼핑몰</a:t>
+                      </a:r>
+                    </a:p>
+                  </a:txBody>
+                  <a:tcPr>
+                    <a:solidFill>
+                      <a:srgbClr val="F8FAFC"/>
+                    </a:solidFill>
+                  </a:tcPr>
+                </a:tc>
+                <a:tc>
+                  <a:txBody>
+                    <a:bodyPr/>
+                    <a:lstStyle/>
+                    <a:p>
+                      <a:r>
+                        <a:rPr sz="1000">
+                          <a:solidFill>
+                            <a:srgbClr val="0F172A"/>
+                          </a:solidFill>
+                          <a:latin typeface="Malgun Gothic"/>
+                        </a:rPr>
+                        <a:t>몰 확인 · 몰 관리 · 주문·판매·재고·구매</a:t>
+                      </a:r>
+                    </a:p>
+                  </a:txBody>
+                  <a:tcPr>
+                    <a:solidFill>
+                      <a:srgbClr val="F8FAFC"/>
+                    </a:solidFill>
+                  </a:tcPr>
+                </a:tc>
+              </a:tr>
+              <a:tr h="442830">
+                <a:tc>
+                  <a:txBody>
+                    <a:bodyPr/>
+                    <a:lstStyle/>
+                    <a:p>
+                      <a:r>
+                        <a:rPr sz="1000">
+                          <a:solidFill>
+                            <a:srgbClr val="0F172A"/>
+                          </a:solidFill>
+                          <a:latin typeface="Malgun Gothic"/>
+                        </a:rPr>
+                        <a:t>슈퍼바이저</a:t>
+                      </a:r>
+                    </a:p>
+                  </a:txBody>
+                  <a:tcPr/>
+                </a:tc>
+                <a:tc>
+                  <a:txBody>
+                    <a:bodyPr/>
+                    <a:lstStyle/>
+                    <a:p>
+                      <a:r>
+                        <a:rPr sz="1000">
+                          <a:solidFill>
+                            <a:srgbClr val="0F172A"/>
+                          </a:solidFill>
+                          <a:latin typeface="Malgun Gothic"/>
+                        </a:rPr>
+                        <a:t>관리자 등록/리스트 · DB백업 · 로그인 현황</a:t>
+                      </a:r>
+                    </a:p>
+                  </a:txBody>
+                  <a:tcPr/>
+                </a:tc>
+              </a:tr>
+              <a:tr h="442830">
+                <a:tc>
+                  <a:txBody>
+                    <a:bodyPr/>
+                    <a:lstStyle/>
+                    <a:p>
+                      <a:r>
+                        <a:rPr sz="1000">
+                          <a:solidFill>
+                            <a:srgbClr val="0F172A"/>
+                          </a:solidFill>
+                          <a:latin typeface="Malgun Gothic"/>
+                        </a:rPr>
+                        <a:t>수익·운영자</a:t>
+                      </a:r>
+                    </a:p>
+                  </a:txBody>
+                  <a:tcPr>
+                    <a:solidFill>
+                      <a:srgbClr val="F8FAFC"/>
+                    </a:solidFill>
+                  </a:tcPr>
+                </a:tc>
+                <a:tc>
+                  <a:txBody>
+                    <a:bodyPr/>
+                    <a:lstStyle/>
+                    <a:p>
+                      <a:r>
+                        <a:rPr sz="1000">
+                          <a:solidFill>
+                            <a:srgbClr val="0F172A"/>
+                          </a:solidFill>
+                          <a:latin typeface="Malgun Gothic"/>
+                        </a:rPr>
+                        <a:t>동영상 광고 수익 · 운영자 등록·모니터링</a:t>
+                      </a:r>
+                    </a:p>
+                  </a:txBody>
+                  <a:tcPr>
+                    <a:solidFill>
+                      <a:srgbClr val="F8FAFC"/>
+                    </a:solidFill>
+                  </a:tcPr>
+                </a:tc>
+              </a:tr>
+              <a:tr h="442830">
+                <a:tc>
+                  <a:txBody>
+                    <a:bodyPr/>
+                    <a:lstStyle/>
+                    <a:p>
+                      <a:r>
+                        <a:rPr sz="1000">
+                          <a:solidFill>
+                            <a:srgbClr val="0F172A"/>
+                          </a:solidFill>
+                          <a:latin typeface="Malgun Gothic"/>
+                        </a:rPr>
+                        <a:t>경기·회원</a:t>
+                      </a:r>
+                    </a:p>
+                  </a:txBody>
+                  <a:tcPr/>
+                </a:tc>
+                <a:tc>
+                  <a:txBody>
+                    <a:bodyPr/>
+                    <a:lstStyle/>
+                    <a:p>
+                      <a:r>
+                        <a:rPr sz="1000">
+                          <a:solidFill>
+                            <a:srgbClr val="0F172A"/>
+                          </a:solidFill>
+                          <a:latin typeface="Malgun Gothic"/>
+                        </a:rPr>
+                        <a:t>경기 관리 · 회원 리스트 · 사회공헌</a:t>
+                      </a:r>
+                    </a:p>
+                  </a:txBody>
+                  <a:tcPr/>
+                </a:tc>
+              </a:tr>
+              <a:tr h="442836">
+                <a:tc>
+                  <a:txBody>
+                    <a:bodyPr/>
+                    <a:lstStyle/>
+                    <a:p>
+                      <a:r>
+                        <a:rPr sz="1000">
+                          <a:solidFill>
+                            <a:srgbClr val="0F172A"/>
+                          </a:solidFill>
+                          <a:latin typeface="Malgun Gothic"/>
+                        </a:rPr>
+                        <a:t>공지·지원</a:t>
+                      </a:r>
+                    </a:p>
+                  </a:txBody>
+                  <a:tcPr>
+                    <a:solidFill>
+                      <a:srgbClr val="F8FAFC"/>
+                    </a:solidFill>
+                  </a:tcPr>
+                </a:tc>
+                <a:tc>
+                  <a:txBody>
+                    <a:bodyPr/>
+                    <a:lstStyle/>
+                    <a:p>
+                      <a:r>
+                        <a:rPr sz="1000">
+                          <a:solidFill>
+                            <a:srgbClr val="0F172A"/>
+                          </a:solidFill>
+                          <a:latin typeface="Malgun Gothic"/>
+                        </a:rPr>
+                        <a:t>공지 · 고객 지원 · 약관</a:t>
+                      </a:r>
+                    </a:p>
+                  </a:txBody>
+                  <a:tcPr>
+                    <a:solidFill>
+                      <a:srgbClr val="F8FAFC"/>
+                    </a:solidFill>
+                  </a:tcPr>
+                </a:tc>
+              </a:tr>
+            </a:tbl>
+          </a:graphicData>
+        </a:graphic>
+      </p:graphicFrame>
+    </p:spTree>
+  </p:cSld>
+  <p:clrMapOvr>
+    <a:masterClrMapping/>
+  </p:clrMapOvr>
+</p:sld>
+</file>
+
+<file path=ppt/slides/slide9.xml><?xml version="1.0" encoding="utf-8"?>
+<p:sld xmlns:a="http://schemas.openxmlformats.org/drawingml/2006/main" xmlns:p="http://schemas.openxmlformats.org/presentationml/2006/main" xmlns:r="http://schemas.openxmlformats.org/officeDocument/2006/relationships">
+  <p:cSld>
+    <p:spTree>
+      <p:nvGrpSpPr>
+        <p:cNvPr id="1" name=""/>
+        <p:cNvGrpSpPr/>
+        <p:nvPr/>
+      </p:nvGrpSpPr>
+      <p:grpSpPr/>
+      <p:sp>
+        <p:nvSpPr>
+          <p:cNvPr id="2" name="Rectangle 1"/>
+          <p:cNvSpPr/>
+          <p:nvPr/>
+        </p:nvSpPr>
+        <p:spPr>
+          <a:xfrm>
+            <a:off x="0" y="0"/>
+            <a:ext cx="12191695" cy="960120"/>
+          </a:xfrm>
+          <a:prstGeom prst="rect">
+            <a:avLst/>
+          </a:prstGeom>
+          <a:solidFill>
+            <a:srgbClr val="0F172A"/>
+          </a:solidFill>
+          <a:ln>
+            <a:noFill/>
+          </a:ln>
+        </p:spPr>
+        <p:style>
+          <a:lnRef idx="1">
+            <a:schemeClr val="accent1"/>
+          </a:lnRef>
+          <a:fillRef idx="3">
+            <a:schemeClr val="accent1"/>
+          </a:fillRef>
+          <a:effectRef idx="2">
+            <a:schemeClr val="accent1"/>
+          </a:effectRef>
+          <a:fontRef idx="minor">
+            <a:schemeClr val="lt1"/>
+          </a:fontRef>
+        </p:style>
+        <p:txBody>
+          <a:bodyPr rtlCol="0" anchor="ctr"/>
+          <a:lstStyle/>
+          <a:p>
+            <a:pPr algn="ctr"/>
+          </a:p>
+        </p:txBody>
+      </p:sp>
+      <p:sp>
+        <p:nvSpPr>
+          <p:cNvPr id="3" name="TextBox 2"/>
+          <p:cNvSpPr txBox="1"/>
+          <p:nvPr/>
+        </p:nvSpPr>
+        <p:spPr>
+          <a:xfrm>
+            <a:off x="502920" y="201168"/>
+            <a:ext cx="10972800" cy="640080"/>
+          </a:xfrm>
+          <a:prstGeom prst="rect">
+            <a:avLst/>
+          </a:prstGeom>
+          <a:noFill/>
+        </p:spPr>
+        <p:txBody>
+          <a:bodyPr wrap="none">
+            <a:spAutoFit/>
+          </a:bodyPr>
+          <a:lstStyle/>
+          <a:p>
+            <a:r>
+              <a:rPr sz="2800" b="1">
+                <a:solidFill>
+                  <a:srgbClr val="FFFFFF"/>
                 </a:solidFill>
                 <a:latin typeface="Malgun Gothic"/>
               </a:rPr>
-              <a:t>화면·기능 변경은 주로 Replit 배포(web)만 하면 됩니다.</a:t>
-            </a:r>
-          </a:p>
-        </p:txBody>
-      </p:sp>
+              <a:t>8. 데이터 · 인프라</a:t>
+            </a:r>
+          </a:p>
+        </p:txBody>
+      </p:sp>
+      <p:sp>
+        <p:nvSpPr>
+          <p:cNvPr id="4" name="TextBox 3"/>
+          <p:cNvSpPr txBox="1"/>
+          <p:nvPr/>
+        </p:nvSpPr>
+        <p:spPr>
+          <a:xfrm>
+            <a:off x="502920" y="1051560"/>
+            <a:ext cx="10972800" cy="457200"/>
+          </a:xfrm>
+          <a:prstGeom prst="rect">
+            <a:avLst/>
+          </a:prstGeom>
+          <a:noFill/>
+        </p:spPr>
+        <p:txBody>
+          <a:bodyPr wrap="none">
+            <a:spAutoFit/>
+          </a:bodyPr>
+          <a:lstStyle/>
+          <a:p>
+            <a:r>
+              <a:rPr sz="1400" b="0">
+                <a:solidFill>
+                  <a:srgbClr val="64748B"/>
+                </a:solidFill>
+                <a:latin typeface="Malgun Gothic"/>
+              </a:rPr>
+              <a:t>MongoDB · Redis · Object Storage · DNS</a:t>
+            </a:r>
+          </a:p>
+        </p:txBody>
+      </p:sp>
+      <p:graphicFrame>
+        <p:nvGraphicFramePr>
+          <p:cNvPr id="5" name="Table 4"/>
+          <p:cNvGraphicFramePr>
+            <a:graphicFrameLocks noGrp="1"/>
+          </p:cNvGraphicFramePr>
+          <p:nvPr/>
+        </p:nvGraphicFramePr>
+        <p:xfrm>
+          <a:off x="502920" y="1371600"/>
+          <a:ext cx="11155680" cy="3099816"/>
+        </p:xfrm>
+        <a:graphic>
+          <a:graphicData uri="http://schemas.openxmlformats.org/drawingml/2006/table">
+            <a:tbl>
+              <a:tblPr firstRow="1" bandRow="1">
+                <a:tableStyleId>{5C22544A-7EE6-4342-B048-85BDC9FD1C3A}</a:tableStyleId>
+              </a:tblPr>
+              <a:tblGrid>
+                <a:gridCol w="2560320"/>
+                <a:gridCol w="8595360"/>
+              </a:tblGrid>
+              <a:tr h="442830">
+                <a:tc>
+                  <a:txBody>
+                    <a:bodyPr/>
+                    <a:lstStyle/>
+                    <a:p>
+                      <a:r>
+                        <a:rPr sz="1100" b="1">
+                          <a:solidFill>
+                            <a:srgbClr val="FFFFFF"/>
+                          </a:solidFill>
+                          <a:latin typeface="Malgun Gothic"/>
+                        </a:rPr>
+                        <a:t>구성</a:t>
+                      </a:r>
+                    </a:p>
+                  </a:txBody>
+                  <a:tcPr>
+                    <a:solidFill>
+                      <a:srgbClr val="0F172A"/>
+                    </a:solidFill>
+                  </a:tcPr>
+                </a:tc>
+                <a:tc>
+                  <a:txBody>
+                    <a:bodyPr/>
+                    <a:lstStyle/>
+                    <a:p>
+                      <a:r>
+                        <a:rPr sz="1100" b="1">
+                          <a:solidFill>
+                            <a:srgbClr val="FFFFFF"/>
+                          </a:solidFill>
+                          <a:latin typeface="Malgun Gothic"/>
+                        </a:rPr>
+                        <a:t>내용</a:t>
+                      </a:r>
+                    </a:p>
+                  </a:txBody>
+                  <a:tcPr>
+                    <a:solidFill>
+                      <a:srgbClr val="0F172A"/>
+                    </a:solidFill>
+                  </a:tcPr>
+                </a:tc>
+              </a:tr>
+              <a:tr h="442830">
+                <a:tc>
+                  <a:txBody>
+                    <a:bodyPr/>
+                    <a:lstStyle/>
+                    <a:p>
+                      <a:r>
+                        <a:rPr sz="1000">
+                          <a:solidFill>
+                            <a:srgbClr val="0F172A"/>
+                          </a:solidFill>
+                          <a:latin typeface="Malgun Gothic"/>
+                        </a:rPr>
+                        <a:t>MongoDB Atlas</a:t>
+                      </a:r>
+                    </a:p>
+                  </a:txBody>
+                  <a:tcPr/>
+                </a:tc>
+                <a:tc>
+                  <a:txBody>
+                    <a:bodyPr/>
+                    <a:lstStyle/>
+                    <a:p>
+                      <a:r>
+                        <a:rPr sz="1000">
+                          <a:solidFill>
+                            <a:srgbClr val="0F172A"/>
+                          </a:solidFill>
+                          <a:latin typeface="Malgun Gothic"/>
+                        </a:rPr>
+                        <a:t>회원·경기·상품(GoodsProduct)·주문·ShopInquiry·리뷰 등</a:t>
+                      </a:r>
+                    </a:p>
+                  </a:txBody>
+                  <a:tcPr/>
+                </a:tc>
+              </a:tr>
+              <a:tr h="442830">
+                <a:tc>
+                  <a:txBody>
+                    <a:bodyPr/>
+                    <a:lstStyle/>
+                    <a:p>
+                      <a:r>
+                        <a:rPr sz="1000">
+                          <a:solidFill>
+                            <a:srgbClr val="0F172A"/>
+                          </a:solidFill>
+                          <a:latin typeface="Malgun Gothic"/>
+                        </a:rPr>
+                        <a:t>Redis</a:t>
+                      </a:r>
+                    </a:p>
+                  </a:txBody>
+                  <a:tcPr>
+                    <a:solidFill>
+                      <a:srgbClr val="F8FAFC"/>
+                    </a:solidFill>
+                  </a:tcPr>
+                </a:tc>
+                <a:tc>
+                  <a:txBody>
+                    <a:bodyPr/>
+                    <a:lstStyle/>
+                    <a:p>
+                      <a:r>
+                        <a:rPr sz="1000">
+                          <a:solidFill>
+                            <a:srgbClr val="0F172A"/>
+                          </a:solidFill>
+                          <a:latin typeface="Malgun Gothic"/>
+                        </a:rPr>
+                        <a:t>세션 · 캐시 (Replit 내장)</a:t>
+                      </a:r>
+                    </a:p>
+                  </a:txBody>
+                  <a:tcPr>
+                    <a:solidFill>
+                      <a:srgbClr val="F8FAFC"/>
+                    </a:solidFill>
+                  </a:tcPr>
+                </a:tc>
+              </a:tr>
+              <a:tr h="442830">
+                <a:tc>
+                  <a:txBody>
+                    <a:bodyPr/>
+                    <a:lstStyle/>
+                    <a:p>
+                      <a:r>
+                        <a:rPr sz="1000">
+                          <a:solidFill>
+                            <a:srgbClr val="0F172A"/>
+                          </a:solidFill>
+                          <a:latin typeface="Malgun Gothic"/>
+                        </a:rPr>
+                        <a:t>Object Storage</a:t>
+                      </a:r>
+                    </a:p>
+                  </a:txBody>
+                  <a:tcPr/>
+                </a:tc>
+                <a:tc>
+                  <a:txBody>
+                    <a:bodyPr/>
+                    <a:lstStyle/>
+                    <a:p>
+                      <a:r>
+                        <a:rPr sz="1000">
+                          <a:solidFill>
+                            <a:srgbClr val="0F172A"/>
+                          </a:solidFill>
+                          <a:latin typeface="Malgun Gothic"/>
+                        </a:rPr>
+                        <a:t>PRIVATE_OBJECT_DIR · 영상·광고·몰 상품 이미지 (GCS)</a:t>
+                      </a:r>
+                    </a:p>
+                  </a:txBody>
+                  <a:tcPr/>
+                </a:tc>
+              </a:tr>
+              <a:tr h="442830">
+                <a:tc>
+                  <a:txBody>
+                    <a:bodyPr/>
+                    <a:lstStyle/>
+                    <a:p>
+                      <a:r>
+                        <a:rPr sz="1000">
+                          <a:solidFill>
+                            <a:srgbClr val="0F172A"/>
+                          </a:solidFill>
+                          <a:latin typeface="Malgun Gothic"/>
+                        </a:rPr>
+                        <a:t>로컬 fallback</a:t>
+                      </a:r>
+                    </a:p>
+                  </a:txBody>
+                  <a:tcPr>
+                    <a:solidFill>
+                      <a:srgbClr val="F8FAFC"/>
+                    </a:solidFill>
+                  </a:tcPr>
+                </a:tc>
+                <a:tc>
+                  <a:txBody>
+                    <a:bodyPr/>
+                    <a:lstStyle/>
+                    <a:p>
+                      <a:r>
+                        <a:rPr sz="1000">
+                          <a:solidFill>
+                            <a:srgbClr val="0F172A"/>
+                          </a:solidFill>
+                          <a:latin typeface="Malgun Gothic"/>
+                        </a:rPr>
+                        <a:t>Object Storage 미설정 시 data/uploads/mall-products/</a:t>
+                      </a:r>
+                    </a:p>
+                  </a:txBody>
+                  <a:tcPr>
+                    <a:solidFill>
+                      <a:srgbClr val="F8FAFC"/>
+                    </a:solidFill>
+                  </a:tcPr>
+                </a:tc>
+              </a:tr>
+              <a:tr h="442830">
+                <a:tc>
+                  <a:txBody>
+                    <a:bodyPr/>
+                    <a:lstStyle/>
+                    <a:p>
+                      <a:r>
+                        <a:rPr sz="1000">
+                          <a:solidFill>
+                            <a:srgbClr val="0F172A"/>
+                          </a:solidFill>
+                          <a:latin typeface="Malgun Gothic"/>
+                        </a:rPr>
+                        <a:t>DNS</a:t>
+                      </a:r>
+                    </a:p>
+                  </a:txBody>
+                  <a:tcPr/>
+                </a:tc>
+                <a:tc>
+                  <a:txBody>
+                    <a:bodyPr/>
+                    <a:lstStyle/>
+                    <a:p>
+                      <a:r>
+                        <a:rPr sz="1000">
+                          <a:solidFill>
+                            <a:srgbClr val="0F172A"/>
+                          </a:solidFill>
+                          <a:latin typeface="Malgun Gothic"/>
+                        </a:rPr>
+                        <a:t>가비아 → ppamong.com → Replit</a:t>
+                      </a:r>
+                    </a:p>
+                  </a:txBody>
+                  <a:tcPr/>
+                </a:tc>
+              </a:tr>
+              <a:tr h="442836">
+                <a:tc>
+                  <a:txBody>
+                    <a:bodyPr/>
+                    <a:lstStyle/>
+                    <a:p>
+                      <a:r>
+                        <a:rPr sz="1000">
+                          <a:solidFill>
+                            <a:srgbClr val="0F172A"/>
+                          </a:solidFill>
+                          <a:latin typeface="Malgun Gothic"/>
+                        </a:rPr>
+                        <a:t>타임존</a:t>
+                      </a:r>
+                    </a:p>
+                  </a:txBody>
+                  <a:tcPr>
+                    <a:solidFill>
+                      <a:srgbClr val="F8FAFC"/>
+                    </a:solidFill>
+                  </a:tcPr>
+                </a:tc>
+                <a:tc>
+                  <a:txBody>
+                    <a:bodyPr/>
+                    <a:lstStyle/>
+                    <a:p>
+                      <a:r>
+                        <a:rPr sz="1000">
+                          <a:solidFill>
+                            <a:srgbClr val="0F172A"/>
+                          </a:solidFill>
+                          <a:latin typeface="Malgun Gothic"/>
+                        </a:rPr>
+                        <a:t>Asia/Seoul (KST)</a:t>
+                      </a:r>
+                    </a:p>
+                  </a:txBody>
+                  <a:tcPr>
+                    <a:solidFill>
+                      <a:srgbClr val="F8FAFC"/>
+                    </a:solidFill>
+                  </a:tcPr>
+                </a:tc>
+              </a:tr>
+            </a:tbl>
+          </a:graphicData>
+        </a:graphic>
+      </p:graphicFrame>
     </p:spTree>
   </p:cSld>
   <p:clrMapOvr>
